--- a/slides/DELTA_progress.pptx
+++ b/slides/DELTA_progress.pptx
@@ -26,6 +26,7 @@
     <p:sldId id="274" r:id="rId25"/>
     <p:sldId id="275" r:id="rId26"/>
     <p:sldId id="276" r:id="rId27"/>
+    <p:sldId id="277" r:id="rId28"/>
   </p:sldIdLst>
   <p:sldSz cx="12191695" cy="6858000" type="screen4x3"/>
   <p:notesSz cx="6858000" cy="9144000"/>
@@ -3315,7 +3316,7 @@
                 </a:solidFill>
                 <a:latin typeface="Calibri"/>
               </a:rPr>
-              <a:t>Progress 5 — VLM-alignment literature (analysed)</a:t>
+              <a:t>Progress 4 — the DELTA code ("WLTA")</a:t>
             </a:r>
           </a:p>
           <a:p>
@@ -3326,7 +3327,7 @@
                 </a:solidFill>
                 <a:latin typeface="Calibri"/>
               </a:rPr>
-              <a:t>no single paper = {weak supervision} × {VLM alignment} × {long-term anticipation}  →  that is the contribution</a:t>
+              <a:t>what it is · how it runs · what it means for us</a:t>
             </a:r>
           </a:p>
         </p:txBody>
@@ -3374,574 +3375,141 @@
           </a:p>
         </p:txBody>
       </p:sp>
-      <p:graphicFrame>
-        <p:nvGraphicFramePr>
-          <p:cNvPr id="4" name="Table 3"/>
-          <p:cNvGraphicFramePr>
-            <a:graphicFrameLocks noGrp="1"/>
-          </p:cNvGraphicFramePr>
+      <p:sp>
+        <p:nvSpPr>
+          <p:cNvPr id="4" name="TextBox 3"/>
+          <p:cNvSpPr txBox="1"/>
           <p:nvPr/>
-        </p:nvGraphicFramePr>
-        <p:xfrm>
-          <a:off x="548640" y="1645920"/>
-          <a:ext cx="11064240" cy="2194560"/>
-        </p:xfrm>
-        <a:graphic>
-          <a:graphicData uri="http://schemas.openxmlformats.org/drawingml/2006/table">
-            <a:tbl>
-              <a:tblPr firstRow="1" bandRow="1">
-                <a:tableStyleId>{5C22544A-7EE6-4342-B048-85BDC9FD1C3A}</a:tableStyleId>
-              </a:tblPr>
-              <a:tblGrid>
-                <a:gridCol w="1737360"/>
-                <a:gridCol w="914400"/>
-                <a:gridCol w="5760720"/>
-                <a:gridCol w="2651760"/>
-              </a:tblGrid>
-              <a:tr h="365760">
-                <a:tc>
-                  <a:txBody>
-                    <a:bodyPr/>
-                    <a:lstStyle/>
-                    <a:p>
-                      <a:r>
-                        <a:rPr sz="1050" b="1">
-                          <a:solidFill>
-                            <a:srgbClr val="FFFFFF"/>
-                          </a:solidFill>
-                          <a:latin typeface="Calibri"/>
-                        </a:rPr>
-                        <a:t>Paper</a:t>
-                      </a:r>
-                    </a:p>
-                  </a:txBody>
-                  <a:tcPr>
-                    <a:solidFill>
-                      <a:srgbClr val="1F3A5F"/>
-                    </a:solidFill>
-                  </a:tcPr>
-                </a:tc>
-                <a:tc>
-                  <a:txBody>
-                    <a:bodyPr/>
-                    <a:lstStyle/>
-                    <a:p>
-                      <a:r>
-                        <a:rPr sz="1050" b="1">
-                          <a:solidFill>
-                            <a:srgbClr val="FFFFFF"/>
-                          </a:solidFill>
-                          <a:latin typeface="Calibri"/>
-                        </a:rPr>
-                        <a:t>Venue</a:t>
-                      </a:r>
-                    </a:p>
-                  </a:txBody>
-                  <a:tcPr>
-                    <a:solidFill>
-                      <a:srgbClr val="1F3A5F"/>
-                    </a:solidFill>
-                  </a:tcPr>
-                </a:tc>
-                <a:tc>
-                  <a:txBody>
-                    <a:bodyPr/>
-                    <a:lstStyle/>
-                    <a:p>
-                      <a:r>
-                        <a:rPr sz="1050" b="1">
-                          <a:solidFill>
-                            <a:srgbClr val="FFFFFF"/>
-                          </a:solidFill>
-                          <a:latin typeface="Calibri"/>
-                        </a:rPr>
-                        <a:t>What it is</a:t>
-                      </a:r>
-                    </a:p>
-                  </a:txBody>
-                  <a:tcPr>
-                    <a:solidFill>
-                      <a:srgbClr val="1F3A5F"/>
-                    </a:solidFill>
-                  </a:tcPr>
-                </a:tc>
-                <a:tc>
-                  <a:txBody>
-                    <a:bodyPr/>
-                    <a:lstStyle/>
-                    <a:p>
-                      <a:r>
-                        <a:rPr sz="1050" b="1">
-                          <a:solidFill>
-                            <a:srgbClr val="FFFFFF"/>
-                          </a:solidFill>
-                          <a:latin typeface="Calibri"/>
-                        </a:rPr>
-                        <a:t>Role for us</a:t>
-                      </a:r>
-                    </a:p>
-                  </a:txBody>
-                  <a:tcPr>
-                    <a:solidFill>
-                      <a:srgbClr val="1F3A5F"/>
-                    </a:solidFill>
-                  </a:tcPr>
-                </a:tc>
-              </a:tr>
-              <a:tr h="365760">
-                <a:tc>
-                  <a:txBody>
-                    <a:bodyPr/>
-                    <a:lstStyle/>
-                    <a:p>
-                      <a:r>
-                        <a:rPr sz="950">
-                          <a:solidFill>
-                            <a:srgbClr val="22262B"/>
-                          </a:solidFill>
-                          <a:latin typeface="Calibri"/>
-                        </a:rPr>
-                        <a:t>ATBA</a:t>
-                      </a:r>
-                    </a:p>
-                  </a:txBody>
-                  <a:tcPr>
-                    <a:solidFill>
-                      <a:srgbClr val="FFFFFF"/>
-                    </a:solidFill>
-                  </a:tcPr>
-                </a:tc>
-                <a:tc>
-                  <a:txBody>
-                    <a:bodyPr/>
-                    <a:lstStyle/>
-                    <a:p>
-                      <a:r>
-                        <a:rPr sz="950">
-                          <a:solidFill>
-                            <a:srgbClr val="22262B"/>
-                          </a:solidFill>
-                          <a:latin typeface="Calibri"/>
-                        </a:rPr>
-                        <a:t>CVPR'24</a:t>
-                      </a:r>
-                    </a:p>
-                  </a:txBody>
-                  <a:tcPr>
-                    <a:solidFill>
-                      <a:srgbClr val="FFFFFF"/>
-                    </a:solidFill>
-                  </a:tcPr>
-                </a:tc>
-                <a:tc>
-                  <a:txBody>
-                    <a:bodyPr/>
-                    <a:lstStyle/>
-                    <a:p>
-                      <a:r>
-                        <a:rPr sz="950">
-                          <a:solidFill>
-                            <a:srgbClr val="22262B"/>
-                          </a:solidFill>
-                          <a:latin typeface="Calibri"/>
-                        </a:rPr>
-                        <a:t>the classifier→DP alignment DELTA's TA follows</a:t>
-                      </a:r>
-                    </a:p>
-                  </a:txBody>
-                  <a:tcPr>
-                    <a:solidFill>
-                      <a:srgbClr val="FFFFFF"/>
-                    </a:solidFill>
-                  </a:tcPr>
-                </a:tc>
-                <a:tc>
-                  <a:txBody>
-                    <a:bodyPr/>
-                    <a:lstStyle/>
-                    <a:p>
-                      <a:r>
-                        <a:rPr sz="950">
-                          <a:solidFill>
-                            <a:srgbClr val="22262B"/>
-                          </a:solidFill>
-                          <a:latin typeface="Calibri"/>
-                        </a:rPr>
-                        <a:t>the baseline we replace</a:t>
-                      </a:r>
-                    </a:p>
-                  </a:txBody>
-                  <a:tcPr>
-                    <a:solidFill>
-                      <a:srgbClr val="FFFFFF"/>
-                    </a:solidFill>
-                  </a:tcPr>
-                </a:tc>
-              </a:tr>
-              <a:tr h="365760">
-                <a:tc>
-                  <a:txBody>
-                    <a:bodyPr/>
-                    <a:lstStyle/>
-                    <a:p>
-                      <a:r>
-                        <a:rPr sz="950">
-                          <a:solidFill>
-                            <a:srgbClr val="22262B"/>
-                          </a:solidFill>
-                          <a:latin typeface="Calibri"/>
-                        </a:rPr>
-                        <a:t>HAL</a:t>
-                      </a:r>
-                    </a:p>
-                  </a:txBody>
-                  <a:tcPr>
-                    <a:solidFill>
-                      <a:srgbClr val="ECEEF1"/>
-                    </a:solidFill>
-                  </a:tcPr>
-                </a:tc>
-                <a:tc>
-                  <a:txBody>
-                    <a:bodyPr/>
-                    <a:lstStyle/>
-                    <a:p>
-                      <a:r>
-                        <a:rPr sz="950">
-                          <a:solidFill>
-                            <a:srgbClr val="22262B"/>
-                          </a:solidFill>
-                          <a:latin typeface="Calibri"/>
-                        </a:rPr>
-                        <a:t>CVPR'26</a:t>
-                      </a:r>
-                    </a:p>
-                  </a:txBody>
-                  <a:tcPr>
-                    <a:solidFill>
-                      <a:srgbClr val="ECEEF1"/>
-                    </a:solidFill>
-                  </a:tcPr>
-                </a:tc>
-                <a:tc>
-                  <a:txBody>
-                    <a:bodyPr/>
-                    <a:lstStyle/>
-                    <a:p>
-                      <a:r>
-                        <a:rPr sz="950">
-                          <a:solidFill>
-                            <a:srgbClr val="22262B"/>
-                          </a:solidFill>
-                          <a:latin typeface="Calibri"/>
-                        </a:rPr>
-                        <a:t>= ATBA + a VAE regulariser; +2–3 MoF; segmentation-based; skips 50Salads</a:t>
-                      </a:r>
-                    </a:p>
-                  </a:txBody>
-                  <a:tcPr>
-                    <a:solidFill>
-                      <a:srgbClr val="ECEEF1"/>
-                    </a:solidFill>
-                  </a:tcPr>
-                </a:tc>
-                <a:tc>
-                  <a:txBody>
-                    <a:bodyPr/>
-                    <a:lstStyle/>
-                    <a:p>
-                      <a:r>
-                        <a:rPr sz="950">
-                          <a:solidFill>
-                            <a:srgbClr val="22262B"/>
-                          </a:solidFill>
-                          <a:latin typeface="Calibri"/>
-                        </a:rPr>
-                        <a:t>analysed, then DROPPED (no-segmentation)</a:t>
-                      </a:r>
-                    </a:p>
-                  </a:txBody>
-                  <a:tcPr>
-                    <a:solidFill>
-                      <a:srgbClr val="ECEEF1"/>
-                    </a:solidFill>
-                  </a:tcPr>
-                </a:tc>
-              </a:tr>
-              <a:tr h="365760">
-                <a:tc>
-                  <a:txBody>
-                    <a:bodyPr/>
-                    <a:lstStyle/>
-                    <a:p>
-                      <a:r>
-                        <a:rPr sz="950">
-                          <a:solidFill>
-                            <a:srgbClr val="22262B"/>
-                          </a:solidFill>
-                          <a:latin typeface="Calibri"/>
-                        </a:rPr>
-                        <a:t>CVA</a:t>
-                      </a:r>
-                    </a:p>
-                  </a:txBody>
-                  <a:tcPr>
-                    <a:solidFill>
-                      <a:srgbClr val="FFFFFF"/>
-                    </a:solidFill>
-                  </a:tcPr>
-                </a:tc>
-                <a:tc>
-                  <a:txBody>
-                    <a:bodyPr/>
-                    <a:lstStyle/>
-                    <a:p>
-                      <a:r>
-                        <a:rPr sz="950">
-                          <a:solidFill>
-                            <a:srgbClr val="22262B"/>
-                          </a:solidFill>
-                          <a:latin typeface="Calibri"/>
-                        </a:rPr>
-                        <a:t>CVPR'26</a:t>
-                      </a:r>
-                    </a:p>
-                  </a:txBody>
-                  <a:tcPr>
-                    <a:solidFill>
-                      <a:srgbClr val="FFFFFF"/>
-                    </a:solidFill>
-                  </a:tcPr>
-                </a:tc>
-                <a:tc>
-                  <a:txBody>
-                    <a:bodyPr/>
-                    <a:lstStyle/>
-                    <a:p>
-                      <a:r>
-                        <a:rPr sz="950">
-                          <a:solidFill>
-                            <a:srgbClr val="22262B"/>
-                          </a:solidFill>
-                          <a:latin typeface="Calibri"/>
-                        </a:rPr>
-                        <a:t>VLM video-text alignment for grounding; hierarchical encoder + boundary-contrastive loss; SOTA</a:t>
-                      </a:r>
-                    </a:p>
-                  </a:txBody>
-                  <a:tcPr>
-                    <a:solidFill>
-                      <a:srgbClr val="FFFFFF"/>
-                    </a:solidFill>
-                  </a:tcPr>
-                </a:tc>
-                <a:tc>
-                  <a:txBody>
-                    <a:bodyPr/>
-                    <a:lstStyle/>
-                    <a:p>
-                      <a:r>
-                        <a:rPr sz="950">
-                          <a:solidFill>
-                            <a:srgbClr val="22262B"/>
-                          </a:solidFill>
-                          <a:latin typeface="Calibri"/>
-                        </a:rPr>
-                        <a:t>the VLM aligner</a:t>
-                      </a:r>
-                    </a:p>
-                  </a:txBody>
-                  <a:tcPr>
-                    <a:solidFill>
-                      <a:srgbClr val="FFFFFF"/>
-                    </a:solidFill>
-                  </a:tcPr>
-                </a:tc>
-              </a:tr>
-              <a:tr h="365760">
-                <a:tc>
-                  <a:txBody>
-                    <a:bodyPr/>
-                    <a:lstStyle/>
-                    <a:p>
-                      <a:r>
-                        <a:rPr sz="950">
-                          <a:solidFill>
-                            <a:srgbClr val="22262B"/>
-                          </a:solidFill>
-                          <a:latin typeface="Calibri"/>
-                        </a:rPr>
-                        <a:t>MASRA</a:t>
-                      </a:r>
-                    </a:p>
-                  </a:txBody>
-                  <a:tcPr>
-                    <a:solidFill>
-                      <a:srgbClr val="ECEEF1"/>
-                    </a:solidFill>
-                  </a:tcPr>
-                </a:tc>
-                <a:tc>
-                  <a:txBody>
-                    <a:bodyPr/>
-                    <a:lstStyle/>
-                    <a:p>
-                      <a:r>
-                        <a:rPr sz="950">
-                          <a:solidFill>
-                            <a:srgbClr val="22262B"/>
-                          </a:solidFill>
-                          <a:latin typeface="Calibri"/>
-                        </a:rPr>
-                        <a:t>2026</a:t>
-                      </a:r>
-                    </a:p>
-                  </a:txBody>
-                  <a:tcPr>
-                    <a:solidFill>
-                      <a:srgbClr val="ECEEF1"/>
-                    </a:solidFill>
-                  </a:tcPr>
-                </a:tc>
-                <a:tc>
-                  <a:txBody>
-                    <a:bodyPr/>
-                    <a:lstStyle/>
-                    <a:p>
-                      <a:r>
-                        <a:rPr sz="950">
-                          <a:solidFill>
-                            <a:srgbClr val="22262B"/>
-                          </a:solidFill>
-                          <a:latin typeface="Calibri"/>
-                        </a:rPr>
-                        <a:t>MLLM-assisted alignment: align a text relation-matrix to the video similarity matrix; MLLM train-only</a:t>
-                      </a:r>
-                    </a:p>
-                  </a:txBody>
-                  <a:tcPr>
-                    <a:solidFill>
-                      <a:srgbClr val="ECEEF1"/>
-                    </a:solidFill>
-                  </a:tcPr>
-                </a:tc>
-                <a:tc>
-                  <a:txBody>
-                    <a:bodyPr/>
-                    <a:lstStyle/>
-                    <a:p>
-                      <a:r>
-                        <a:rPr sz="950">
-                          <a:solidFill>
-                            <a:srgbClr val="22262B"/>
-                          </a:solidFill>
-                          <a:latin typeface="Calibri"/>
-                        </a:rPr>
-                        <a:t>Stage B2 — relational training signal</a:t>
-                      </a:r>
-                    </a:p>
-                  </a:txBody>
-                  <a:tcPr>
-                    <a:solidFill>
-                      <a:srgbClr val="ECEEF1"/>
-                    </a:solidFill>
-                  </a:tcPr>
-                </a:tc>
-              </a:tr>
-              <a:tr h="365760">
-                <a:tc>
-                  <a:txBody>
-                    <a:bodyPr/>
-                    <a:lstStyle/>
-                    <a:p>
-                      <a:r>
-                        <a:rPr sz="950">
-                          <a:solidFill>
-                            <a:srgbClr val="22262B"/>
-                          </a:solidFill>
-                          <a:latin typeface="Calibri"/>
-                        </a:rPr>
-                        <a:t>TAN / StepFormer</a:t>
-                      </a:r>
-                    </a:p>
-                  </a:txBody>
-                  <a:tcPr>
-                    <a:solidFill>
-                      <a:srgbClr val="FFFFFF"/>
-                    </a:solidFill>
-                  </a:tcPr>
-                </a:tc>
-                <a:tc>
-                  <a:txBody>
-                    <a:bodyPr/>
-                    <a:lstStyle/>
-                    <a:p>
-                      <a:r>
-                        <a:rPr sz="950">
-                          <a:solidFill>
-                            <a:srgbClr val="22262B"/>
-                          </a:solidFill>
-                          <a:latin typeface="Calibri"/>
-                        </a:rPr>
-                        <a:t>CVPR'22/'23</a:t>
-                      </a:r>
-                    </a:p>
-                  </a:txBody>
-                  <a:tcPr>
-                    <a:solidFill>
-                      <a:srgbClr val="FFFFFF"/>
-                    </a:solidFill>
-                  </a:tcPr>
-                </a:tc>
-                <a:tc>
-                  <a:txBody>
-                    <a:bodyPr/>
-                    <a:lstStyle/>
-                    <a:p>
-                      <a:r>
-                        <a:rPr sz="950">
-                          <a:solidFill>
-                            <a:srgbClr val="22262B"/>
-                          </a:solidFill>
-                          <a:latin typeface="Calibri"/>
-                        </a:rPr>
-                        <a:t>the genuine transcript/sequence→video aligners (weak/self-sup)</a:t>
-                      </a:r>
-                    </a:p>
-                  </a:txBody>
-                  <a:tcPr>
-                    <a:solidFill>
-                      <a:srgbClr val="FFFFFF"/>
-                    </a:solidFill>
-                  </a:tcPr>
-                </a:tc>
-                <a:tc>
-                  <a:txBody>
-                    <a:bodyPr/>
-                    <a:lstStyle/>
-                    <a:p>
-                      <a:r>
-                        <a:rPr sz="950">
-                          <a:solidFill>
-                            <a:srgbClr val="22262B"/>
-                          </a:solidFill>
-                          <a:latin typeface="Calibri"/>
-                        </a:rPr>
-                        <a:t>the alignment mechanism references</a:t>
-                      </a:r>
-                    </a:p>
-                  </a:txBody>
-                  <a:tcPr>
-                    <a:solidFill>
-                      <a:srgbClr val="FFFFFF"/>
-                    </a:solidFill>
-                  </a:tcPr>
-                </a:tc>
-              </a:tr>
-            </a:tbl>
-          </a:graphicData>
-        </a:graphic>
-      </p:graphicFrame>
+        </p:nvSpPr>
+        <p:spPr>
+          <a:xfrm>
+            <a:off x="640080" y="1600200"/>
+            <a:ext cx="10972800" cy="4937760"/>
+          </a:xfrm>
+          <a:prstGeom prst="rect">
+            <a:avLst/>
+          </a:prstGeom>
+          <a:noFill/>
+        </p:spPr>
+        <p:txBody>
+          <a:bodyPr wrap="square">
+            <a:spAutoFit/>
+          </a:bodyPr>
+          <a:lstStyle/>
+          <a:p>
+            <a:pPr>
+              <a:spcAft>
+                <a:spcPts val="600"/>
+              </a:spcAft>
+            </a:pPr>
+            <a:r>
+              <a:rPr sz="1700" b="0">
+                <a:solidFill>
+                  <a:srgbClr val="22262B"/>
+                </a:solidFill>
+                <a:latin typeface="Calibri"/>
+              </a:rPr>
+              <a:t>▸ Received from the group; analysed in docs/delta-code.md. WLTA = Weakly-supervised Long-Term Anticipation.</a:t>
+            </a:r>
+          </a:p>
+          <a:p>
+            <a:pPr>
+              <a:spcAft>
+                <a:spcPts val="600"/>
+              </a:spcAft>
+            </a:pPr>
+            <a:r>
+              <a:rPr sz="1700" b="0">
+                <a:solidFill>
+                  <a:srgbClr val="22262B"/>
+                </a:solidFill>
+                <a:latin typeface="Calibri"/>
+              </a:rPr>
+              <a:t>▸ Built on the CLOT / ASOT codebase — so it already contains BOTH alignment mechanisms:</a:t>
+            </a:r>
+          </a:p>
+          <a:p>
+            <a:pPr lvl="1">
+              <a:spcAft>
+                <a:spcPts val="600"/>
+              </a:spcAft>
+            </a:pPr>
+            <a:r>
+              <a:rPr sz="1500">
+                <a:solidFill>
+                  <a:srgbClr val="5B6470"/>
+                </a:solidFill>
+                <a:latin typeface="Calibri"/>
+              </a:rPr>
+              <a:t>– --model_type atba  → the ATBA boundary detector (src/atba_loss.py)</a:t>
+            </a:r>
+          </a:p>
+          <a:p>
+            <a:pPr lvl="1">
+              <a:spcAft>
+                <a:spcPts val="600"/>
+              </a:spcAft>
+            </a:pPr>
+            <a:r>
+              <a:rPr sz="1500">
+                <a:solidFill>
+                  <a:srgbClr val="5B6470"/>
+                </a:solidFill>
+                <a:latin typeface="Calibri"/>
+              </a:rPr>
+              <a:t>– --model_type wclot → ASOT optimal transport (src/asot.py, gsw.py)</a:t>
+            </a:r>
+          </a:p>
+          <a:p>
+            <a:pPr lvl="1">
+              <a:spcAft>
+                <a:spcPts val="600"/>
+              </a:spcAft>
+            </a:pPr>
+            <a:r>
+              <a:rPr sz="1500">
+                <a:solidFill>
+                  <a:srgbClr val="5B6470"/>
+                </a:solidFill>
+                <a:latin typeface="Calibri"/>
+              </a:rPr>
+              <a:t>– plus CTC, TSM smoothing, cross-modal attention, linear-chain CRF, DistilBERT, full LTA eval.</a:t>
+            </a:r>
+          </a:p>
+          <a:p>
+            <a:pPr>
+              <a:spcAft>
+                <a:spcPts val="600"/>
+              </a:spcAft>
+            </a:pPr>
+            <a:r>
+              <a:rPr sz="1700" b="0">
+                <a:solidFill>
+                  <a:srgbClr val="22262B"/>
+                </a:solidFill>
+                <a:latin typeface="Calibri"/>
+              </a:rPr>
+              <a:t>▸ The "situation": README is CLOT's; run scripts call a missing train_edit_elena9sept.py; hardcoded paths; needs Linux + CUDA + conda + wandb.</a:t>
+            </a:r>
+          </a:p>
+          <a:p>
+            <a:pPr>
+              <a:spcAft>
+                <a:spcPts val="600"/>
+              </a:spcAft>
+            </a:pPr>
+            <a:r>
+              <a:rPr sz="1700" b="0">
+                <a:solidFill>
+                  <a:srgbClr val="22262B"/>
+                </a:solidFill>
+                <a:latin typeface="Calibri"/>
+              </a:rPr>
+              <a:t>▸ Implication: our contribution narrows cleanly — swap the frame-classifier posteriors / OT cost matrix for a frozen-VLM similarity; reuse everything downstream. And we can run the real baseline.</a:t>
+            </a:r>
+          </a:p>
+        </p:txBody>
+      </p:sp>
     </p:spTree>
   </p:cSld>
   <p:clrMapOvr>
@@ -3997,7 +3565,7 @@
                 </a:solidFill>
                 <a:latin typeface="Calibri"/>
               </a:rPr>
-              <a:t>Progress 6 — two papers we borrow components from</a:t>
+              <a:t>Progress 5 — VLM-alignment literature (analysed)</a:t>
             </a:r>
           </a:p>
           <a:p>
@@ -4008,7 +3576,7 @@
                 </a:solidFill>
                 <a:latin typeface="Calibri"/>
               </a:rPr>
-              <a:t>we take principles and rebuild them for the weak setting — the adaptation is ours</a:t>
+              <a:t>no single paper = {weak supervision} × {VLM alignment} × {long-term anticipation}  →  that is the contribution</a:t>
             </a:r>
           </a:p>
         </p:txBody>
@@ -4056,157 +3624,574 @@
           </a:p>
         </p:txBody>
       </p:sp>
-      <p:sp>
-        <p:nvSpPr>
-          <p:cNvPr id="4" name="TextBox 3"/>
-          <p:cNvSpPr txBox="1"/>
+      <p:graphicFrame>
+        <p:nvGraphicFramePr>
+          <p:cNvPr id="4" name="Table 3"/>
+          <p:cNvGraphicFramePr>
+            <a:graphicFrameLocks noGrp="1"/>
+          </p:cNvGraphicFramePr>
           <p:nvPr/>
-        </p:nvSpPr>
-        <p:spPr>
-          <a:xfrm>
-            <a:off x="640080" y="1600200"/>
-            <a:ext cx="10972800" cy="4937760"/>
-          </a:xfrm>
-          <a:prstGeom prst="rect">
-            <a:avLst/>
-          </a:prstGeom>
-          <a:noFill/>
-        </p:spPr>
-        <p:txBody>
-          <a:bodyPr wrap="square">
-            <a:spAutoFit/>
-          </a:bodyPr>
-          <a:lstStyle/>
-          <a:p>
-            <a:pPr>
-              <a:spcAft>
-                <a:spcPts val="600"/>
-              </a:spcAft>
-            </a:pPr>
-            <a:r>
-              <a:rPr sz="1700" b="0">
-                <a:solidFill>
-                  <a:srgbClr val="22262B"/>
-                </a:solidFill>
-                <a:latin typeface="Calibri"/>
-              </a:rPr>
-              <a:t>▸ CVA (CVPR'26) — Context-aware Video-text Alignment.  Task: video temporal grounding (query → span), CLIP + SlowFast, SOTA, FULLY SUPERVISED:</a:t>
-            </a:r>
-          </a:p>
-          <a:p>
-            <a:pPr lvl="1">
-              <a:spcAft>
-                <a:spcPts val="600"/>
-              </a:spcAft>
-            </a:pPr>
-            <a:r>
-              <a:rPr sz="1500">
-                <a:solidFill>
-                  <a:srgbClr val="5B6470"/>
-                </a:solidFill>
-                <a:latin typeface="Calibri"/>
-              </a:rPr>
-              <a:t>– CTE hierarchical encoder;  CBD boundary-contrastive loss;  QCD query-aware augmentation.</a:t>
-            </a:r>
-          </a:p>
-          <a:p>
-            <a:pPr lvl="1">
-              <a:spcAft>
-                <a:spcPts val="600"/>
-              </a:spcAft>
-            </a:pPr>
-            <a:r>
-              <a:rPr sz="1500">
-                <a:solidFill>
-                  <a:srgbClr val="5B6470"/>
-                </a:solidFill>
-                <a:latin typeface="Calibri"/>
-              </a:rPr>
-              <a:t>– Important: published CBD anchors on GROUND-TRUTH span boundaries and defines its negatives relative to that span.  We cannot use it as-is.</a:t>
-            </a:r>
-          </a:p>
-          <a:p>
-            <a:pPr lvl="1">
-              <a:spcAft>
-                <a:spcPts val="600"/>
-              </a:spcAft>
-            </a:pPr>
-            <a:r>
-              <a:rPr sz="1500">
-                <a:solidFill>
-                  <a:srgbClr val="5B6470"/>
-                </a:solidFill>
-                <a:latin typeface="Calibri"/>
-              </a:rPr>
-              <a:t>– → we keep only the principle — a boundary deserves its own contrastive representation — and rebuild it on our own CONFIDENT pseudo-boundaries.  That is our objective (PBCR), not CVA's.</a:t>
-            </a:r>
-          </a:p>
-          <a:p>
-            <a:pPr>
-              <a:spcAft>
-                <a:spcPts val="600"/>
-              </a:spcAft>
-            </a:pPr>
-            <a:r>
-              <a:rPr sz="1700" b="0">
-                <a:solidFill>
-                  <a:srgbClr val="22262B"/>
-                </a:solidFill>
-                <a:latin typeface="Calibri"/>
-              </a:rPr>
-              <a:t>▸ MASRA (2026) — MLLM-Assisted Semantic-Relational Consistent Alignment.  Same task, also fully supervised.  We take the training-time regularisers:</a:t>
-            </a:r>
-          </a:p>
-          <a:p>
-            <a:pPr lvl="1">
-              <a:spcAft>
-                <a:spcPts val="600"/>
-              </a:spcAft>
-            </a:pPr>
-            <a:r>
-              <a:rPr sz="1500">
-                <a:solidFill>
-                  <a:srgbClr val="5B6470"/>
-                </a:solidFill>
-                <a:latin typeface="Calibri"/>
-              </a:rPr>
-              <a:t>– LRCA — align a text relation-matrix with the video's similarity matrix;  ESTA — align pooled temporal context with action semantics.</a:t>
-            </a:r>
-          </a:p>
-          <a:p>
-            <a:pPr lvl="1">
-              <a:spcAft>
-                <a:spcPts val="600"/>
-              </a:spcAft>
-            </a:pPr>
-            <a:r>
-              <a:rPr sz="1500">
-                <a:solidFill>
-                  <a:srgbClr val="5B6470"/>
-                </a:solidFill>
-                <a:latin typeface="Calibri"/>
-              </a:rPr>
-              <a:t>– MLLM used ONLY at training, discarded at inference  (= DELTA's philosophy).</a:t>
-            </a:r>
-          </a:p>
-          <a:p>
-            <a:pPr>
-              <a:spcAft>
-                <a:spcPts val="600"/>
-              </a:spcAft>
-            </a:pPr>
-            <a:r>
-              <a:rPr sz="1700" b="0">
-                <a:solidFill>
-                  <a:srgbClr val="22262B"/>
-                </a:solidFill>
-                <a:latin typeface="Calibri"/>
-              </a:rPr>
-              <a:t>▸ Both are grounding tasks and supervised — components, not drop-in methods.</a:t>
-            </a:r>
-          </a:p>
-        </p:txBody>
-      </p:sp>
+        </p:nvGraphicFramePr>
+        <p:xfrm>
+          <a:off x="548640" y="1645920"/>
+          <a:ext cx="11064240" cy="2194560"/>
+        </p:xfrm>
+        <a:graphic>
+          <a:graphicData uri="http://schemas.openxmlformats.org/drawingml/2006/table">
+            <a:tbl>
+              <a:tblPr firstRow="1" bandRow="1">
+                <a:tableStyleId>{5C22544A-7EE6-4342-B048-85BDC9FD1C3A}</a:tableStyleId>
+              </a:tblPr>
+              <a:tblGrid>
+                <a:gridCol w="1737360"/>
+                <a:gridCol w="914400"/>
+                <a:gridCol w="5760720"/>
+                <a:gridCol w="2651760"/>
+              </a:tblGrid>
+              <a:tr h="365760">
+                <a:tc>
+                  <a:txBody>
+                    <a:bodyPr/>
+                    <a:lstStyle/>
+                    <a:p>
+                      <a:r>
+                        <a:rPr sz="1050" b="1">
+                          <a:solidFill>
+                            <a:srgbClr val="FFFFFF"/>
+                          </a:solidFill>
+                          <a:latin typeface="Calibri"/>
+                        </a:rPr>
+                        <a:t>Paper</a:t>
+                      </a:r>
+                    </a:p>
+                  </a:txBody>
+                  <a:tcPr>
+                    <a:solidFill>
+                      <a:srgbClr val="1F3A5F"/>
+                    </a:solidFill>
+                  </a:tcPr>
+                </a:tc>
+                <a:tc>
+                  <a:txBody>
+                    <a:bodyPr/>
+                    <a:lstStyle/>
+                    <a:p>
+                      <a:r>
+                        <a:rPr sz="1050" b="1">
+                          <a:solidFill>
+                            <a:srgbClr val="FFFFFF"/>
+                          </a:solidFill>
+                          <a:latin typeface="Calibri"/>
+                        </a:rPr>
+                        <a:t>Venue</a:t>
+                      </a:r>
+                    </a:p>
+                  </a:txBody>
+                  <a:tcPr>
+                    <a:solidFill>
+                      <a:srgbClr val="1F3A5F"/>
+                    </a:solidFill>
+                  </a:tcPr>
+                </a:tc>
+                <a:tc>
+                  <a:txBody>
+                    <a:bodyPr/>
+                    <a:lstStyle/>
+                    <a:p>
+                      <a:r>
+                        <a:rPr sz="1050" b="1">
+                          <a:solidFill>
+                            <a:srgbClr val="FFFFFF"/>
+                          </a:solidFill>
+                          <a:latin typeface="Calibri"/>
+                        </a:rPr>
+                        <a:t>What it is</a:t>
+                      </a:r>
+                    </a:p>
+                  </a:txBody>
+                  <a:tcPr>
+                    <a:solidFill>
+                      <a:srgbClr val="1F3A5F"/>
+                    </a:solidFill>
+                  </a:tcPr>
+                </a:tc>
+                <a:tc>
+                  <a:txBody>
+                    <a:bodyPr/>
+                    <a:lstStyle/>
+                    <a:p>
+                      <a:r>
+                        <a:rPr sz="1050" b="1">
+                          <a:solidFill>
+                            <a:srgbClr val="FFFFFF"/>
+                          </a:solidFill>
+                          <a:latin typeface="Calibri"/>
+                        </a:rPr>
+                        <a:t>Role for us</a:t>
+                      </a:r>
+                    </a:p>
+                  </a:txBody>
+                  <a:tcPr>
+                    <a:solidFill>
+                      <a:srgbClr val="1F3A5F"/>
+                    </a:solidFill>
+                  </a:tcPr>
+                </a:tc>
+              </a:tr>
+              <a:tr h="365760">
+                <a:tc>
+                  <a:txBody>
+                    <a:bodyPr/>
+                    <a:lstStyle/>
+                    <a:p>
+                      <a:r>
+                        <a:rPr sz="950">
+                          <a:solidFill>
+                            <a:srgbClr val="22262B"/>
+                          </a:solidFill>
+                          <a:latin typeface="Calibri"/>
+                        </a:rPr>
+                        <a:t>ATBA</a:t>
+                      </a:r>
+                    </a:p>
+                  </a:txBody>
+                  <a:tcPr>
+                    <a:solidFill>
+                      <a:srgbClr val="FFFFFF"/>
+                    </a:solidFill>
+                  </a:tcPr>
+                </a:tc>
+                <a:tc>
+                  <a:txBody>
+                    <a:bodyPr/>
+                    <a:lstStyle/>
+                    <a:p>
+                      <a:r>
+                        <a:rPr sz="950">
+                          <a:solidFill>
+                            <a:srgbClr val="22262B"/>
+                          </a:solidFill>
+                          <a:latin typeface="Calibri"/>
+                        </a:rPr>
+                        <a:t>CVPR'24</a:t>
+                      </a:r>
+                    </a:p>
+                  </a:txBody>
+                  <a:tcPr>
+                    <a:solidFill>
+                      <a:srgbClr val="FFFFFF"/>
+                    </a:solidFill>
+                  </a:tcPr>
+                </a:tc>
+                <a:tc>
+                  <a:txBody>
+                    <a:bodyPr/>
+                    <a:lstStyle/>
+                    <a:p>
+                      <a:r>
+                        <a:rPr sz="950">
+                          <a:solidFill>
+                            <a:srgbClr val="22262B"/>
+                          </a:solidFill>
+                          <a:latin typeface="Calibri"/>
+                        </a:rPr>
+                        <a:t>the classifier→DP alignment DELTA's TA follows</a:t>
+                      </a:r>
+                    </a:p>
+                  </a:txBody>
+                  <a:tcPr>
+                    <a:solidFill>
+                      <a:srgbClr val="FFFFFF"/>
+                    </a:solidFill>
+                  </a:tcPr>
+                </a:tc>
+                <a:tc>
+                  <a:txBody>
+                    <a:bodyPr/>
+                    <a:lstStyle/>
+                    <a:p>
+                      <a:r>
+                        <a:rPr sz="950">
+                          <a:solidFill>
+                            <a:srgbClr val="22262B"/>
+                          </a:solidFill>
+                          <a:latin typeface="Calibri"/>
+                        </a:rPr>
+                        <a:t>the baseline we replace</a:t>
+                      </a:r>
+                    </a:p>
+                  </a:txBody>
+                  <a:tcPr>
+                    <a:solidFill>
+                      <a:srgbClr val="FFFFFF"/>
+                    </a:solidFill>
+                  </a:tcPr>
+                </a:tc>
+              </a:tr>
+              <a:tr h="365760">
+                <a:tc>
+                  <a:txBody>
+                    <a:bodyPr/>
+                    <a:lstStyle/>
+                    <a:p>
+                      <a:r>
+                        <a:rPr sz="950">
+                          <a:solidFill>
+                            <a:srgbClr val="22262B"/>
+                          </a:solidFill>
+                          <a:latin typeface="Calibri"/>
+                        </a:rPr>
+                        <a:t>HAL</a:t>
+                      </a:r>
+                    </a:p>
+                  </a:txBody>
+                  <a:tcPr>
+                    <a:solidFill>
+                      <a:srgbClr val="ECEEF1"/>
+                    </a:solidFill>
+                  </a:tcPr>
+                </a:tc>
+                <a:tc>
+                  <a:txBody>
+                    <a:bodyPr/>
+                    <a:lstStyle/>
+                    <a:p>
+                      <a:r>
+                        <a:rPr sz="950">
+                          <a:solidFill>
+                            <a:srgbClr val="22262B"/>
+                          </a:solidFill>
+                          <a:latin typeface="Calibri"/>
+                        </a:rPr>
+                        <a:t>CVPR'26</a:t>
+                      </a:r>
+                    </a:p>
+                  </a:txBody>
+                  <a:tcPr>
+                    <a:solidFill>
+                      <a:srgbClr val="ECEEF1"/>
+                    </a:solidFill>
+                  </a:tcPr>
+                </a:tc>
+                <a:tc>
+                  <a:txBody>
+                    <a:bodyPr/>
+                    <a:lstStyle/>
+                    <a:p>
+                      <a:r>
+                        <a:rPr sz="950">
+                          <a:solidFill>
+                            <a:srgbClr val="22262B"/>
+                          </a:solidFill>
+                          <a:latin typeface="Calibri"/>
+                        </a:rPr>
+                        <a:t>= ATBA + a VAE regulariser; +2–3 MoF; segmentation-based; skips 50Salads</a:t>
+                      </a:r>
+                    </a:p>
+                  </a:txBody>
+                  <a:tcPr>
+                    <a:solidFill>
+                      <a:srgbClr val="ECEEF1"/>
+                    </a:solidFill>
+                  </a:tcPr>
+                </a:tc>
+                <a:tc>
+                  <a:txBody>
+                    <a:bodyPr/>
+                    <a:lstStyle/>
+                    <a:p>
+                      <a:r>
+                        <a:rPr sz="950">
+                          <a:solidFill>
+                            <a:srgbClr val="22262B"/>
+                          </a:solidFill>
+                          <a:latin typeface="Calibri"/>
+                        </a:rPr>
+                        <a:t>analysed, then DROPPED (no-segmentation)</a:t>
+                      </a:r>
+                    </a:p>
+                  </a:txBody>
+                  <a:tcPr>
+                    <a:solidFill>
+                      <a:srgbClr val="ECEEF1"/>
+                    </a:solidFill>
+                  </a:tcPr>
+                </a:tc>
+              </a:tr>
+              <a:tr h="365760">
+                <a:tc>
+                  <a:txBody>
+                    <a:bodyPr/>
+                    <a:lstStyle/>
+                    <a:p>
+                      <a:r>
+                        <a:rPr sz="950">
+                          <a:solidFill>
+                            <a:srgbClr val="22262B"/>
+                          </a:solidFill>
+                          <a:latin typeface="Calibri"/>
+                        </a:rPr>
+                        <a:t>CVA</a:t>
+                      </a:r>
+                    </a:p>
+                  </a:txBody>
+                  <a:tcPr>
+                    <a:solidFill>
+                      <a:srgbClr val="FFFFFF"/>
+                    </a:solidFill>
+                  </a:tcPr>
+                </a:tc>
+                <a:tc>
+                  <a:txBody>
+                    <a:bodyPr/>
+                    <a:lstStyle/>
+                    <a:p>
+                      <a:r>
+                        <a:rPr sz="950">
+                          <a:solidFill>
+                            <a:srgbClr val="22262B"/>
+                          </a:solidFill>
+                          <a:latin typeface="Calibri"/>
+                        </a:rPr>
+                        <a:t>CVPR'26</a:t>
+                      </a:r>
+                    </a:p>
+                  </a:txBody>
+                  <a:tcPr>
+                    <a:solidFill>
+                      <a:srgbClr val="FFFFFF"/>
+                    </a:solidFill>
+                  </a:tcPr>
+                </a:tc>
+                <a:tc>
+                  <a:txBody>
+                    <a:bodyPr/>
+                    <a:lstStyle/>
+                    <a:p>
+                      <a:r>
+                        <a:rPr sz="950">
+                          <a:solidFill>
+                            <a:srgbClr val="22262B"/>
+                          </a:solidFill>
+                          <a:latin typeface="Calibri"/>
+                        </a:rPr>
+                        <a:t>VLM video-text alignment for grounding; hierarchical encoder + boundary-contrastive loss; SOTA</a:t>
+                      </a:r>
+                    </a:p>
+                  </a:txBody>
+                  <a:tcPr>
+                    <a:solidFill>
+                      <a:srgbClr val="FFFFFF"/>
+                    </a:solidFill>
+                  </a:tcPr>
+                </a:tc>
+                <a:tc>
+                  <a:txBody>
+                    <a:bodyPr/>
+                    <a:lstStyle/>
+                    <a:p>
+                      <a:r>
+                        <a:rPr sz="950">
+                          <a:solidFill>
+                            <a:srgbClr val="22262B"/>
+                          </a:solidFill>
+                          <a:latin typeface="Calibri"/>
+                        </a:rPr>
+                        <a:t>the VLM aligner</a:t>
+                      </a:r>
+                    </a:p>
+                  </a:txBody>
+                  <a:tcPr>
+                    <a:solidFill>
+                      <a:srgbClr val="FFFFFF"/>
+                    </a:solidFill>
+                  </a:tcPr>
+                </a:tc>
+              </a:tr>
+              <a:tr h="365760">
+                <a:tc>
+                  <a:txBody>
+                    <a:bodyPr/>
+                    <a:lstStyle/>
+                    <a:p>
+                      <a:r>
+                        <a:rPr sz="950">
+                          <a:solidFill>
+                            <a:srgbClr val="22262B"/>
+                          </a:solidFill>
+                          <a:latin typeface="Calibri"/>
+                        </a:rPr>
+                        <a:t>MASRA</a:t>
+                      </a:r>
+                    </a:p>
+                  </a:txBody>
+                  <a:tcPr>
+                    <a:solidFill>
+                      <a:srgbClr val="ECEEF1"/>
+                    </a:solidFill>
+                  </a:tcPr>
+                </a:tc>
+                <a:tc>
+                  <a:txBody>
+                    <a:bodyPr/>
+                    <a:lstStyle/>
+                    <a:p>
+                      <a:r>
+                        <a:rPr sz="950">
+                          <a:solidFill>
+                            <a:srgbClr val="22262B"/>
+                          </a:solidFill>
+                          <a:latin typeface="Calibri"/>
+                        </a:rPr>
+                        <a:t>2026</a:t>
+                      </a:r>
+                    </a:p>
+                  </a:txBody>
+                  <a:tcPr>
+                    <a:solidFill>
+                      <a:srgbClr val="ECEEF1"/>
+                    </a:solidFill>
+                  </a:tcPr>
+                </a:tc>
+                <a:tc>
+                  <a:txBody>
+                    <a:bodyPr/>
+                    <a:lstStyle/>
+                    <a:p>
+                      <a:r>
+                        <a:rPr sz="950">
+                          <a:solidFill>
+                            <a:srgbClr val="22262B"/>
+                          </a:solidFill>
+                          <a:latin typeface="Calibri"/>
+                        </a:rPr>
+                        <a:t>MLLM-assisted alignment: align a text relation-matrix to the video similarity matrix; MLLM train-only</a:t>
+                      </a:r>
+                    </a:p>
+                  </a:txBody>
+                  <a:tcPr>
+                    <a:solidFill>
+                      <a:srgbClr val="ECEEF1"/>
+                    </a:solidFill>
+                  </a:tcPr>
+                </a:tc>
+                <a:tc>
+                  <a:txBody>
+                    <a:bodyPr/>
+                    <a:lstStyle/>
+                    <a:p>
+                      <a:r>
+                        <a:rPr sz="950">
+                          <a:solidFill>
+                            <a:srgbClr val="22262B"/>
+                          </a:solidFill>
+                          <a:latin typeface="Calibri"/>
+                        </a:rPr>
+                        <a:t>Stage B2 — relational training signal</a:t>
+                      </a:r>
+                    </a:p>
+                  </a:txBody>
+                  <a:tcPr>
+                    <a:solidFill>
+                      <a:srgbClr val="ECEEF1"/>
+                    </a:solidFill>
+                  </a:tcPr>
+                </a:tc>
+              </a:tr>
+              <a:tr h="365760">
+                <a:tc>
+                  <a:txBody>
+                    <a:bodyPr/>
+                    <a:lstStyle/>
+                    <a:p>
+                      <a:r>
+                        <a:rPr sz="950">
+                          <a:solidFill>
+                            <a:srgbClr val="22262B"/>
+                          </a:solidFill>
+                          <a:latin typeface="Calibri"/>
+                        </a:rPr>
+                        <a:t>TAN / StepFormer</a:t>
+                      </a:r>
+                    </a:p>
+                  </a:txBody>
+                  <a:tcPr>
+                    <a:solidFill>
+                      <a:srgbClr val="FFFFFF"/>
+                    </a:solidFill>
+                  </a:tcPr>
+                </a:tc>
+                <a:tc>
+                  <a:txBody>
+                    <a:bodyPr/>
+                    <a:lstStyle/>
+                    <a:p>
+                      <a:r>
+                        <a:rPr sz="950">
+                          <a:solidFill>
+                            <a:srgbClr val="22262B"/>
+                          </a:solidFill>
+                          <a:latin typeface="Calibri"/>
+                        </a:rPr>
+                        <a:t>CVPR'22/'23</a:t>
+                      </a:r>
+                    </a:p>
+                  </a:txBody>
+                  <a:tcPr>
+                    <a:solidFill>
+                      <a:srgbClr val="FFFFFF"/>
+                    </a:solidFill>
+                  </a:tcPr>
+                </a:tc>
+                <a:tc>
+                  <a:txBody>
+                    <a:bodyPr/>
+                    <a:lstStyle/>
+                    <a:p>
+                      <a:r>
+                        <a:rPr sz="950">
+                          <a:solidFill>
+                            <a:srgbClr val="22262B"/>
+                          </a:solidFill>
+                          <a:latin typeface="Calibri"/>
+                        </a:rPr>
+                        <a:t>the genuine transcript/sequence→video aligners (weak/self-sup)</a:t>
+                      </a:r>
+                    </a:p>
+                  </a:txBody>
+                  <a:tcPr>
+                    <a:solidFill>
+                      <a:srgbClr val="FFFFFF"/>
+                    </a:solidFill>
+                  </a:tcPr>
+                </a:tc>
+                <a:tc>
+                  <a:txBody>
+                    <a:bodyPr/>
+                    <a:lstStyle/>
+                    <a:p>
+                      <a:r>
+                        <a:rPr sz="950">
+                          <a:solidFill>
+                            <a:srgbClr val="22262B"/>
+                          </a:solidFill>
+                          <a:latin typeface="Calibri"/>
+                        </a:rPr>
+                        <a:t>the alignment mechanism references</a:t>
+                      </a:r>
+                    </a:p>
+                  </a:txBody>
+                  <a:tcPr>
+                    <a:solidFill>
+                      <a:srgbClr val="FFFFFF"/>
+                    </a:solidFill>
+                  </a:tcPr>
+                </a:tc>
+              </a:tr>
+            </a:tbl>
+          </a:graphicData>
+        </a:graphic>
+      </p:graphicFrame>
     </p:spTree>
   </p:cSld>
   <p:clrMapOvr>
@@ -4262,7 +4247,7 @@
                 </a:solidFill>
                 <a:latin typeface="Calibri"/>
               </a:rPr>
-              <a:t>The hybrid — which paper feeds which stage</a:t>
+              <a:t>Progress 6 — two papers we borrow components from</a:t>
             </a:r>
           </a:p>
           <a:p>
@@ -4273,7 +4258,7 @@
                 </a:solidFill>
                 <a:latin typeface="Calibri"/>
               </a:rPr>
-              <a:t>VideoLLaMA3 as the encoder throughout  ·  full table in articles-by-pipeline-part.xlsx</a:t>
+              <a:t>we take principles and rebuild them for the weak setting — the adaptation is ours</a:t>
             </a:r>
           </a:p>
         </p:txBody>
@@ -4355,7 +4340,55 @@
                 </a:solidFill>
                 <a:latin typeface="Calibri"/>
               </a:rPr>
-              <a:t>▸ Input:  raw video + ordered transcript, no timestamps  —  DELTA's weak-supervision setup.</a:t>
+              <a:t>▸ CVA (CVPR'26) — Context-aware Video-text Alignment.  Task: video temporal grounding (query → span), CLIP + SlowFast, SOTA, FULLY SUPERVISED:</a:t>
+            </a:r>
+          </a:p>
+          <a:p>
+            <a:pPr lvl="1">
+              <a:spcAft>
+                <a:spcPts val="600"/>
+              </a:spcAft>
+            </a:pPr>
+            <a:r>
+              <a:rPr sz="1500">
+                <a:solidFill>
+                  <a:srgbClr val="5B6470"/>
+                </a:solidFill>
+                <a:latin typeface="Calibri"/>
+              </a:rPr>
+              <a:t>– CTE hierarchical encoder;  CBD boundary-contrastive loss;  QCD query-aware augmentation.</a:t>
+            </a:r>
+          </a:p>
+          <a:p>
+            <a:pPr lvl="1">
+              <a:spcAft>
+                <a:spcPts val="600"/>
+              </a:spcAft>
+            </a:pPr>
+            <a:r>
+              <a:rPr sz="1500">
+                <a:solidFill>
+                  <a:srgbClr val="5B6470"/>
+                </a:solidFill>
+                <a:latin typeface="Calibri"/>
+              </a:rPr>
+              <a:t>– Important: published CBD anchors on GROUND-TRUTH span boundaries and defines its negatives relative to that span.  We cannot use it as-is.</a:t>
+            </a:r>
+          </a:p>
+          <a:p>
+            <a:pPr lvl="1">
+              <a:spcAft>
+                <a:spcPts val="600"/>
+              </a:spcAft>
+            </a:pPr>
+            <a:r>
+              <a:rPr sz="1500">
+                <a:solidFill>
+                  <a:srgbClr val="5B6470"/>
+                </a:solidFill>
+                <a:latin typeface="Calibri"/>
+              </a:rPr>
+              <a:t>– → we keep only the principle — a boundary deserves its own contrastive representation — and rebuild it on our own CONFIDENT pseudo-boundaries.  That is our objective (PBCR), not CVA's.</a:t>
             </a:r>
           </a:p>
           <a:p>
@@ -4371,7 +4404,39 @@
                 </a:solidFill>
                 <a:latin typeface="Calibri"/>
               </a:rPr>
-              <a:t>▸ Semantic front-end:  frozen VLM clip↔action similarity  —  OVTAS.</a:t>
+              <a:t>▸ MASRA (2026) — MLLM-Assisted Semantic-Relational Consistent Alignment.  Same task, also fully supervised.  We take the training-time regularisers:</a:t>
+            </a:r>
+          </a:p>
+          <a:p>
+            <a:pPr lvl="1">
+              <a:spcAft>
+                <a:spcPts val="600"/>
+              </a:spcAft>
+            </a:pPr>
+            <a:r>
+              <a:rPr sz="1500">
+                <a:solidFill>
+                  <a:srgbClr val="5B6470"/>
+                </a:solidFill>
+                <a:latin typeface="Calibri"/>
+              </a:rPr>
+              <a:t>– LRCA — align a text relation-matrix with the video's similarity matrix;  ESTA — align pooled temporal context with action semantics.</a:t>
+            </a:r>
+          </a:p>
+          <a:p>
+            <a:pPr lvl="1">
+              <a:spcAft>
+                <a:spcPts val="600"/>
+              </a:spcAft>
+            </a:pPr>
+            <a:r>
+              <a:rPr sz="1500">
+                <a:solidFill>
+                  <a:srgbClr val="5B6470"/>
+                </a:solidFill>
+                <a:latin typeface="Calibri"/>
+              </a:rPr>
+              <a:t>– MLLM used ONLY at training, discarded at inference  (= DELTA's philosophy).</a:t>
             </a:r>
           </a:p>
           <a:p>
@@ -4387,87 +4452,7 @@
                 </a:solidFill>
                 <a:latin typeface="Calibri"/>
               </a:rPr>
-              <a:t>▸ Stage A, coarse alignment:  force actions into transcript order  —  monotonic DP + HiERO-StepG's strict monotonicity; solved with ASOT / CLOT optimal transport.</a:t>
-            </a:r>
-          </a:p>
-          <a:p>
-            <a:pPr>
-              <a:spcAft>
-                <a:spcPts val="600"/>
-              </a:spcAft>
-            </a:pPr>
-            <a:r>
-              <a:rPr sz="1700" b="0">
-                <a:solidFill>
-                  <a:srgbClr val="22262B"/>
-                </a:solidFill>
-                <a:latin typeface="Calibri"/>
-              </a:rPr>
-              <a:t>▸ Stage B1, segment extent:  confident temporal extent around each coarse location  —  HiERO-StepG.</a:t>
-            </a:r>
-          </a:p>
-          <a:p>
-            <a:pPr>
-              <a:spcAft>
-                <a:spcPts val="600"/>
-              </a:spcAft>
-            </a:pPr>
-            <a:r>
-              <a:rPr sz="1700" b="0">
-                <a:solidFill>
-                  <a:srgbClr val="22262B"/>
-                </a:solidFill>
-                <a:latin typeface="Calibri"/>
-              </a:rPr>
-              <a:t>▸ Stage B2, exact transition:  search for the best crossover point  —  OURS, with CVA's boundary-contrastive principle and MASRA's LRCA as the training signal.</a:t>
-            </a:r>
-          </a:p>
-          <a:p>
-            <a:pPr>
-              <a:spcAft>
-                <a:spcPts val="600"/>
-              </a:spcAft>
-            </a:pPr>
-            <a:r>
-              <a:rPr sz="1700" b="0">
-                <a:solidFill>
-                  <a:srgbClr val="22262B"/>
-                </a:solidFill>
-                <a:latin typeface="Calibri"/>
-              </a:rPr>
-              <a:t>▸ Optional C:  frame/segment consistency if boundaries stay noisy  —  CLOT / D-CLOT.</a:t>
-            </a:r>
-          </a:p>
-          <a:p>
-            <a:pPr>
-              <a:spcAft>
-                <a:spcPts val="600"/>
-              </a:spcAft>
-            </a:pPr>
-            <a:r>
-              <a:rPr sz="1700" b="0">
-                <a:solidFill>
-                  <a:srgbClr val="22262B"/>
-                </a:solidFill>
-                <a:latin typeface="Calibri"/>
-              </a:rPr>
-              <a:t>▸ Optional D:  reason only about difficult boundaries  —  TOGA / VideoLLaMA3.</a:t>
-            </a:r>
-          </a:p>
-          <a:p>
-            <a:pPr>
-              <a:spcAft>
-                <a:spcPts val="600"/>
-              </a:spcAft>
-            </a:pPr>
-            <a:r>
-              <a:rPr sz="1700" b="0">
-                <a:solidFill>
-                  <a:srgbClr val="22262B"/>
-                </a:solidFill>
-                <a:latin typeface="Calibri"/>
-              </a:rPr>
-              <a:t>▸ Output:  dense Y* into the unchanged DELTA decoder.</a:t>
+              <a:t>▸ Both are grounding tasks and supervised — components, not drop-in methods.</a:t>
             </a:r>
           </a:p>
         </p:txBody>
@@ -4527,7 +4512,7 @@
                 </a:solidFill>
                 <a:latin typeface="Calibri"/>
               </a:rPr>
-              <a:t>Key takeaways</a:t>
+              <a:t>The hybrid — which paper feeds which stage</a:t>
             </a:r>
           </a:p>
           <a:p>
@@ -4538,7 +4523,7 @@
                 </a:solidFill>
                 <a:latin typeface="Calibri"/>
               </a:rPr>
-              <a:t>what the work so far establishes</a:t>
+              <a:t>VideoLLaMA3 as the encoder throughout  ·  full table in articles-by-pipeline-part.xlsx</a:t>
             </a:r>
           </a:p>
         </p:txBody>
@@ -4620,7 +4605,7 @@
                 </a:solidFill>
                 <a:latin typeface="Calibri"/>
               </a:rPr>
-              <a:t>▸ The pipeline is implemented end to end and unit-tested; the approach is unproven.</a:t>
+              <a:t>▸ Input:  raw video + ordered transcript, no timestamps  —  DELTA's weak-supervision setup.</a:t>
             </a:r>
           </a:p>
           <a:p>
@@ -4636,7 +4621,7 @@
                 </a:solidFill>
                 <a:latin typeface="Calibri"/>
               </a:rPr>
-              <a:t>▸ Both paradigms lose to the no-evidence floor on 50Salads — VLM-direct AND classifier-based. The bottleneck is the evidence, not the algorithm.</a:t>
+              <a:t>▸ Semantic front-end:  frozen VLM clip↔action similarity  —  OVTAS.</a:t>
             </a:r>
           </a:p>
           <a:p>
@@ -4652,7 +4637,7 @@
                 </a:solidFill>
                 <a:latin typeface="Calibri"/>
               </a:rPr>
-              <a:t>▸ DELTA already has optimal-transport alignment (ASOT, --model_type wclot), so our Y* drops into the existing decoder unchanged — CTC / CRF / duration head / eval all reused.</a:t>
+              <a:t>▸ Stage A, coarse alignment:  force actions into transcript order  —  monotonic DP + HiERO-StepG's strict monotonicity; solved with ASOT / CLOT optimal transport.</a:t>
             </a:r>
           </a:p>
           <a:p>
@@ -4668,7 +4653,7 @@
                 </a:solidFill>
                 <a:latin typeface="Calibri"/>
               </a:rPr>
-              <a:t>▸ Ideas are drawn from OVTAS (similarity), HiERO-StepG (monotonic decode), CVA (boundary contrastive), MASRA (relational losses); the local boundary search is ours.</a:t>
+              <a:t>▸ Stage B1, segment extent:  confident temporal extent around each coarse location  —  HiERO-StepG.</a:t>
             </a:r>
           </a:p>
           <a:p>
@@ -4684,7 +4669,55 @@
                 </a:solidFill>
                 <a:latin typeface="Calibri"/>
               </a:rPr>
-              <a:t>▸ Next real test: video-level features (VideoLLaMA3) rather than frame-level — the one thing that directly addresses the measured failure.</a:t>
+              <a:t>▸ Stage B2, exact transition:  search for the best crossover point  —  OURS, with CVA's boundary-contrastive principle and MASRA's LRCA as the training signal.</a:t>
+            </a:r>
+          </a:p>
+          <a:p>
+            <a:pPr>
+              <a:spcAft>
+                <a:spcPts val="600"/>
+              </a:spcAft>
+            </a:pPr>
+            <a:r>
+              <a:rPr sz="1700" b="0">
+                <a:solidFill>
+                  <a:srgbClr val="22262B"/>
+                </a:solidFill>
+                <a:latin typeface="Calibri"/>
+              </a:rPr>
+              <a:t>▸ Optional C:  frame/segment consistency if boundaries stay noisy  —  CLOT / D-CLOT.</a:t>
+            </a:r>
+          </a:p>
+          <a:p>
+            <a:pPr>
+              <a:spcAft>
+                <a:spcPts val="600"/>
+              </a:spcAft>
+            </a:pPr>
+            <a:r>
+              <a:rPr sz="1700" b="0">
+                <a:solidFill>
+                  <a:srgbClr val="22262B"/>
+                </a:solidFill>
+                <a:latin typeface="Calibri"/>
+              </a:rPr>
+              <a:t>▸ Optional D:  reason only about difficult boundaries  —  TOGA / VideoLLaMA3.</a:t>
+            </a:r>
+          </a:p>
+          <a:p>
+            <a:pPr>
+              <a:spcAft>
+                <a:spcPts val="600"/>
+              </a:spcAft>
+            </a:pPr>
+            <a:r>
+              <a:rPr sz="1700" b="0">
+                <a:solidFill>
+                  <a:srgbClr val="22262B"/>
+                </a:solidFill>
+                <a:latin typeface="Calibri"/>
+              </a:rPr>
+              <a:t>▸ Output:  dense Y* into the unchanged DELTA decoder.</a:t>
             </a:r>
           </a:p>
         </p:txBody>
@@ -4744,6 +4777,223 @@
                 </a:solidFill>
                 <a:latin typeface="Calibri"/>
               </a:rPr>
+              <a:t>Key takeaways</a:t>
+            </a:r>
+          </a:p>
+          <a:p>
+            <a:r>
+              <a:rPr sz="1400">
+                <a:solidFill>
+                  <a:srgbClr val="5B6470"/>
+                </a:solidFill>
+                <a:latin typeface="Calibri"/>
+              </a:rPr>
+              <a:t>what the work so far establishes</a:t>
+            </a:r>
+          </a:p>
+        </p:txBody>
+      </p:sp>
+      <p:sp>
+        <p:nvSpPr>
+          <p:cNvPr id="3" name="Rectangle 2"/>
+          <p:cNvSpPr/>
+          <p:nvPr/>
+        </p:nvSpPr>
+        <p:spPr>
+          <a:xfrm>
+            <a:off x="502920" y="1325880"/>
+            <a:ext cx="11155680" cy="25400"/>
+          </a:xfrm>
+          <a:prstGeom prst="rect">
+            <a:avLst/>
+          </a:prstGeom>
+          <a:solidFill>
+            <a:srgbClr val="1F6F4D"/>
+          </a:solidFill>
+          <a:ln>
+            <a:noFill/>
+          </a:ln>
+        </p:spPr>
+        <p:style>
+          <a:lnRef idx="1">
+            <a:schemeClr val="accent1"/>
+          </a:lnRef>
+          <a:fillRef idx="3">
+            <a:schemeClr val="accent1"/>
+          </a:fillRef>
+          <a:effectRef idx="2">
+            <a:schemeClr val="accent1"/>
+          </a:effectRef>
+          <a:fontRef idx="minor">
+            <a:schemeClr val="lt1"/>
+          </a:fontRef>
+        </p:style>
+        <p:txBody>
+          <a:bodyPr rtlCol="0" anchor="ctr"/>
+          <a:lstStyle/>
+          <a:p>
+            <a:pPr algn="ctr"/>
+          </a:p>
+        </p:txBody>
+      </p:sp>
+      <p:sp>
+        <p:nvSpPr>
+          <p:cNvPr id="4" name="TextBox 3"/>
+          <p:cNvSpPr txBox="1"/>
+          <p:nvPr/>
+        </p:nvSpPr>
+        <p:spPr>
+          <a:xfrm>
+            <a:off x="640080" y="1600200"/>
+            <a:ext cx="10972800" cy="4937760"/>
+          </a:xfrm>
+          <a:prstGeom prst="rect">
+            <a:avLst/>
+          </a:prstGeom>
+          <a:noFill/>
+        </p:spPr>
+        <p:txBody>
+          <a:bodyPr wrap="square">
+            <a:spAutoFit/>
+          </a:bodyPr>
+          <a:lstStyle/>
+          <a:p>
+            <a:pPr>
+              <a:spcAft>
+                <a:spcPts val="600"/>
+              </a:spcAft>
+            </a:pPr>
+            <a:r>
+              <a:rPr sz="1700" b="0">
+                <a:solidFill>
+                  <a:srgbClr val="22262B"/>
+                </a:solidFill>
+                <a:latin typeface="Calibri"/>
+              </a:rPr>
+              <a:t>▸ The pipeline is implemented end to end and unit-tested; the approach is unproven.</a:t>
+            </a:r>
+          </a:p>
+          <a:p>
+            <a:pPr>
+              <a:spcAft>
+                <a:spcPts val="600"/>
+              </a:spcAft>
+            </a:pPr>
+            <a:r>
+              <a:rPr sz="1700" b="0">
+                <a:solidFill>
+                  <a:srgbClr val="22262B"/>
+                </a:solidFill>
+                <a:latin typeface="Calibri"/>
+              </a:rPr>
+              <a:t>▸ Both paradigms lose to the no-evidence floor on 50Salads — VLM-direct AND classifier-based. The bottleneck is the evidence, not the algorithm.</a:t>
+            </a:r>
+          </a:p>
+          <a:p>
+            <a:pPr>
+              <a:spcAft>
+                <a:spcPts val="600"/>
+              </a:spcAft>
+            </a:pPr>
+            <a:r>
+              <a:rPr sz="1700" b="0">
+                <a:solidFill>
+                  <a:srgbClr val="22262B"/>
+                </a:solidFill>
+                <a:latin typeface="Calibri"/>
+              </a:rPr>
+              <a:t>▸ DELTA already has optimal-transport alignment (ASOT, --model_type wclot), so our Y* drops into the existing decoder unchanged — CTC / CRF / duration head / eval all reused.</a:t>
+            </a:r>
+          </a:p>
+          <a:p>
+            <a:pPr>
+              <a:spcAft>
+                <a:spcPts val="600"/>
+              </a:spcAft>
+            </a:pPr>
+            <a:r>
+              <a:rPr sz="1700" b="0">
+                <a:solidFill>
+                  <a:srgbClr val="22262B"/>
+                </a:solidFill>
+                <a:latin typeface="Calibri"/>
+              </a:rPr>
+              <a:t>▸ Ideas are drawn from OVTAS (similarity), HiERO-StepG (monotonic decode), CVA (boundary contrastive), MASRA (relational losses); the local boundary search is ours.</a:t>
+            </a:r>
+          </a:p>
+          <a:p>
+            <a:pPr>
+              <a:spcAft>
+                <a:spcPts val="600"/>
+              </a:spcAft>
+            </a:pPr>
+            <a:r>
+              <a:rPr sz="1700" b="0">
+                <a:solidFill>
+                  <a:srgbClr val="22262B"/>
+                </a:solidFill>
+                <a:latin typeface="Calibri"/>
+              </a:rPr>
+              <a:t>▸ Next real test: video-level features (VideoLLaMA3) rather than frame-level — the one thing that directly addresses the measured failure.</a:t>
+            </a:r>
+          </a:p>
+        </p:txBody>
+      </p:sp>
+    </p:spTree>
+  </p:cSld>
+  <p:clrMapOvr>
+    <a:masterClrMapping/>
+  </p:clrMapOvr>
+</p:sld>
+</file>
+
+<file path=ppt/slides/slide15.xml><?xml version="1.0" encoding="utf-8"?>
+<p:sld xmlns:a="http://schemas.openxmlformats.org/drawingml/2006/main" xmlns:p="http://schemas.openxmlformats.org/presentationml/2006/main" xmlns:r="http://schemas.openxmlformats.org/officeDocument/2006/relationships">
+  <p:cSld>
+    <p:bg>
+      <p:bgPr>
+        <a:solidFill>
+          <a:srgbClr val="FFFFFF"/>
+        </a:solidFill>
+        <a:effectLst/>
+      </p:bgPr>
+    </p:bg>
+    <p:spTree>
+      <p:nvGrpSpPr>
+        <p:cNvPr id="1" name=""/>
+        <p:cNvGrpSpPr/>
+        <p:nvPr/>
+      </p:nvGrpSpPr>
+      <p:grpSpPr/>
+      <p:sp>
+        <p:nvSpPr>
+          <p:cNvPr id="2" name="TextBox 1"/>
+          <p:cNvSpPr txBox="1"/>
+          <p:nvPr/>
+        </p:nvSpPr>
+        <p:spPr>
+          <a:xfrm>
+            <a:off x="502920" y="320040"/>
+            <a:ext cx="11155680" cy="868680"/>
+          </a:xfrm>
+          <a:prstGeom prst="rect">
+            <a:avLst/>
+          </a:prstGeom>
+          <a:noFill/>
+        </p:spPr>
+        <p:txBody>
+          <a:bodyPr wrap="square">
+            <a:spAutoFit/>
+          </a:bodyPr>
+          <a:lstStyle/>
+          <a:p>
+            <a:r>
+              <a:rPr sz="3000" b="1">
+                <a:solidFill>
+                  <a:srgbClr val="1F3A5F"/>
+                </a:solidFill>
+                <a:latin typeface="Calibri"/>
+              </a:rPr>
               <a:t>Blockers &amp; risks</a:t>
             </a:r>
           </a:p>
@@ -5246,7 +5496,7 @@
 </p:sld>
 </file>
 
-<file path=ppt/slides/slide15.xml><?xml version="1.0" encoding="utf-8"?>
+<file path=ppt/slides/slide16.xml><?xml version="1.0" encoding="utf-8"?>
 <p:sld xmlns:a="http://schemas.openxmlformats.org/drawingml/2006/main" xmlns:p="http://schemas.openxmlformats.org/presentationml/2006/main" xmlns:r="http://schemas.openxmlformats.org/officeDocument/2006/relationships">
   <p:cSld>
     <p:bg>
@@ -5309,778 +5559,6 @@
           </a:p>
         </p:txBody>
       </p:sp>
-    </p:spTree>
-  </p:cSld>
-  <p:clrMapOvr>
-    <a:masterClrMapping/>
-  </p:clrMapOvr>
-</p:sld>
-</file>
-
-<file path=ppt/slides/slide16.xml><?xml version="1.0" encoding="utf-8"?>
-<p:sld xmlns:a="http://schemas.openxmlformats.org/drawingml/2006/main" xmlns:p="http://schemas.openxmlformats.org/presentationml/2006/main" xmlns:r="http://schemas.openxmlformats.org/officeDocument/2006/relationships">
-  <p:cSld>
-    <p:bg>
-      <p:bgPr>
-        <a:solidFill>
-          <a:srgbClr val="FFFFFF"/>
-        </a:solidFill>
-        <a:effectLst/>
-      </p:bgPr>
-    </p:bg>
-    <p:spTree>
-      <p:nvGrpSpPr>
-        <p:cNvPr id="1" name=""/>
-        <p:cNvGrpSpPr/>
-        <p:nvPr/>
-      </p:nvGrpSpPr>
-      <p:grpSpPr/>
-      <p:sp>
-        <p:nvSpPr>
-          <p:cNvPr id="2" name="TextBox 1"/>
-          <p:cNvSpPr txBox="1"/>
-          <p:nvPr/>
-        </p:nvSpPr>
-        <p:spPr>
-          <a:xfrm>
-            <a:off x="502920" y="320040"/>
-            <a:ext cx="11155680" cy="868680"/>
-          </a:xfrm>
-          <a:prstGeom prst="rect">
-            <a:avLst/>
-          </a:prstGeom>
-          <a:noFill/>
-        </p:spPr>
-        <p:txBody>
-          <a:bodyPr wrap="square">
-            <a:spAutoFit/>
-          </a:bodyPr>
-          <a:lstStyle/>
-          <a:p>
-            <a:r>
-              <a:rPr sz="3000" b="1">
-                <a:solidFill>
-                  <a:srgbClr val="1F3A5F"/>
-                </a:solidFill>
-                <a:latin typeface="Calibri"/>
-              </a:rPr>
-              <a:t>The headline — nothing beats a baseline that ignores the video</a:t>
-            </a:r>
-          </a:p>
-          <a:p>
-            <a:r>
-              <a:rPr sz="1400">
-                <a:solidFill>
-                  <a:srgbClr val="5B6470"/>
-                </a:solidFill>
-                <a:latin typeface="Calibri"/>
-              </a:rPr>
-              <a:t>50Salads split-1 test.  The floor uses NO visual information at all — anything below it means the visual evidence is hurting, not helping.</a:t>
-            </a:r>
-          </a:p>
-        </p:txBody>
-      </p:sp>
-      <p:sp>
-        <p:nvSpPr>
-          <p:cNvPr id="3" name="Rectangle 2"/>
-          <p:cNvSpPr/>
-          <p:nvPr/>
-        </p:nvSpPr>
-        <p:spPr>
-          <a:xfrm>
-            <a:off x="502920" y="1325880"/>
-            <a:ext cx="11155680" cy="25400"/>
-          </a:xfrm>
-          <a:prstGeom prst="rect">
-            <a:avLst/>
-          </a:prstGeom>
-          <a:solidFill>
-            <a:srgbClr val="1F6F4D"/>
-          </a:solidFill>
-          <a:ln>
-            <a:noFill/>
-          </a:ln>
-        </p:spPr>
-        <p:style>
-          <a:lnRef idx="1">
-            <a:schemeClr val="accent1"/>
-          </a:lnRef>
-          <a:fillRef idx="3">
-            <a:schemeClr val="accent1"/>
-          </a:fillRef>
-          <a:effectRef idx="2">
-            <a:schemeClr val="accent1"/>
-          </a:effectRef>
-          <a:fontRef idx="minor">
-            <a:schemeClr val="lt1"/>
-          </a:fontRef>
-        </p:style>
-        <p:txBody>
-          <a:bodyPr rtlCol="0" anchor="ctr"/>
-          <a:lstStyle/>
-          <a:p>
-            <a:pPr algn="ctr"/>
-          </a:p>
-        </p:txBody>
-      </p:sp>
-      <p:graphicFrame>
-        <p:nvGraphicFramePr>
-          <p:cNvPr id="4" name="Table 3"/>
-          <p:cNvGraphicFramePr>
-            <a:graphicFrameLocks noGrp="1"/>
-          </p:cNvGraphicFramePr>
-          <p:nvPr/>
-        </p:nvGraphicFramePr>
-        <p:xfrm>
-          <a:off x="548640" y="1645920"/>
-          <a:ext cx="10424160" cy="2560320"/>
-        </p:xfrm>
-        <a:graphic>
-          <a:graphicData uri="http://schemas.openxmlformats.org/drawingml/2006/table">
-            <a:tbl>
-              <a:tblPr firstRow="1" bandRow="1">
-                <a:tableStyleId>{5C22544A-7EE6-4342-B048-85BDC9FD1C3A}</a:tableStyleId>
-              </a:tblPr>
-              <a:tblGrid>
-                <a:gridCol w="6035040"/>
-                <a:gridCol w="1463040"/>
-                <a:gridCol w="1463040"/>
-                <a:gridCol w="1463040"/>
-              </a:tblGrid>
-              <a:tr h="365760">
-                <a:tc>
-                  <a:txBody>
-                    <a:bodyPr/>
-                    <a:lstStyle/>
-                    <a:p>
-                      <a:r>
-                        <a:rPr sz="1150" b="1">
-                          <a:solidFill>
-                            <a:srgbClr val="FFFFFF"/>
-                          </a:solidFill>
-                          <a:latin typeface="Calibri"/>
-                        </a:rPr>
-                        <a:t>Method</a:t>
-                      </a:r>
-                    </a:p>
-                  </a:txBody>
-                  <a:tcPr>
-                    <a:solidFill>
-                      <a:srgbClr val="1F3A5F"/>
-                    </a:solidFill>
-                  </a:tcPr>
-                </a:tc>
-                <a:tc>
-                  <a:txBody>
-                    <a:bodyPr/>
-                    <a:lstStyle/>
-                    <a:p>
-                      <a:r>
-                        <a:rPr sz="1150" b="1">
-                          <a:solidFill>
-                            <a:srgbClr val="FFFFFF"/>
-                          </a:solidFill>
-                          <a:latin typeface="Calibri"/>
-                        </a:rPr>
-                        <a:t>Uses video?</a:t>
-                      </a:r>
-                    </a:p>
-                  </a:txBody>
-                  <a:tcPr>
-                    <a:solidFill>
-                      <a:srgbClr val="1F3A5F"/>
-                    </a:solidFill>
-                  </a:tcPr>
-                </a:tc>
-                <a:tc>
-                  <a:txBody>
-                    <a:bodyPr/>
-                    <a:lstStyle/>
-                    <a:p>
-                      <a:r>
-                        <a:rPr sz="1150" b="1">
-                          <a:solidFill>
-                            <a:srgbClr val="FFFFFF"/>
-                          </a:solidFill>
-                          <a:latin typeface="Calibri"/>
-                        </a:rPr>
-                        <a:t>MoC</a:t>
-                      </a:r>
-                    </a:p>
-                  </a:txBody>
-                  <a:tcPr>
-                    <a:solidFill>
-                      <a:srgbClr val="1F3A5F"/>
-                    </a:solidFill>
-                  </a:tcPr>
-                </a:tc>
-                <a:tc>
-                  <a:txBody>
-                    <a:bodyPr/>
-                    <a:lstStyle/>
-                    <a:p>
-                      <a:r>
-                        <a:rPr sz="1150" b="1">
-                          <a:solidFill>
-                            <a:srgbClr val="FFFFFF"/>
-                          </a:solidFill>
-                          <a:latin typeface="Calibri"/>
-                        </a:rPr>
-                        <a:t>F1@50</a:t>
-                      </a:r>
-                    </a:p>
-                  </a:txBody>
-                  <a:tcPr>
-                    <a:solidFill>
-                      <a:srgbClr val="1F3A5F"/>
-                    </a:solidFill>
-                  </a:tcPr>
-                </a:tc>
-              </a:tr>
-              <a:tr h="365760">
-                <a:tc>
-                  <a:txBody>
-                    <a:bodyPr/>
-                    <a:lstStyle/>
-                    <a:p>
-                      <a:r>
-                        <a:rPr sz="1050">
-                          <a:solidFill>
-                            <a:srgbClr val="22262B"/>
-                          </a:solidFill>
-                          <a:latin typeface="Calibri"/>
-                        </a:rPr>
-                        <a:t>naive-uniform  (split into N equal blocks, transcript order)</a:t>
-                      </a:r>
-                    </a:p>
-                  </a:txBody>
-                  <a:tcPr>
-                    <a:solidFill>
-                      <a:srgbClr val="FFFFFF"/>
-                    </a:solidFill>
-                  </a:tcPr>
-                </a:tc>
-                <a:tc>
-                  <a:txBody>
-                    <a:bodyPr/>
-                    <a:lstStyle/>
-                    <a:p>
-                      <a:r>
-                        <a:rPr sz="1050">
-                          <a:solidFill>
-                            <a:srgbClr val="22262B"/>
-                          </a:solidFill>
-                          <a:latin typeface="Calibri"/>
-                        </a:rPr>
-                        <a:t>no</a:t>
-                      </a:r>
-                    </a:p>
-                  </a:txBody>
-                  <a:tcPr>
-                    <a:solidFill>
-                      <a:srgbClr val="FFFFFF"/>
-                    </a:solidFill>
-                  </a:tcPr>
-                </a:tc>
-                <a:tc>
-                  <a:txBody>
-                    <a:bodyPr/>
-                    <a:lstStyle/>
-                    <a:p>
-                      <a:r>
-                        <a:rPr sz="1050">
-                          <a:solidFill>
-                            <a:srgbClr val="22262B"/>
-                          </a:solidFill>
-                          <a:latin typeface="Calibri"/>
-                        </a:rPr>
-                        <a:t>0.366</a:t>
-                      </a:r>
-                    </a:p>
-                  </a:txBody>
-                  <a:tcPr>
-                    <a:solidFill>
-                      <a:srgbClr val="FFFFFF"/>
-                    </a:solidFill>
-                  </a:tcPr>
-                </a:tc>
-                <a:tc>
-                  <a:txBody>
-                    <a:bodyPr/>
-                    <a:lstStyle/>
-                    <a:p>
-                      <a:r>
-                        <a:rPr sz="1050">
-                          <a:solidFill>
-                            <a:srgbClr val="22262B"/>
-                          </a:solidFill>
-                          <a:latin typeface="Calibri"/>
-                        </a:rPr>
-                        <a:t>26.2</a:t>
-                      </a:r>
-                    </a:p>
-                  </a:txBody>
-                  <a:tcPr>
-                    <a:solidFill>
-                      <a:srgbClr val="FFFFFF"/>
-                    </a:solidFill>
-                  </a:tcPr>
-                </a:tc>
-              </a:tr>
-              <a:tr h="365760">
-                <a:tc>
-                  <a:txBody>
-                    <a:bodyPr/>
-                    <a:lstStyle/>
-                    <a:p>
-                      <a:r>
-                        <a:rPr sz="1050">
-                          <a:solidFill>
-                            <a:srgbClr val="22262B"/>
-                          </a:solidFill>
-                          <a:latin typeface="Calibri"/>
-                        </a:rPr>
-                        <a:t>VLM: ASOT + local boundary refinement</a:t>
-                      </a:r>
-                    </a:p>
-                  </a:txBody>
-                  <a:tcPr>
-                    <a:solidFill>
-                      <a:srgbClr val="ECEEF1"/>
-                    </a:solidFill>
-                  </a:tcPr>
-                </a:tc>
-                <a:tc>
-                  <a:txBody>
-                    <a:bodyPr/>
-                    <a:lstStyle/>
-                    <a:p>
-                      <a:r>
-                        <a:rPr sz="1050">
-                          <a:solidFill>
-                            <a:srgbClr val="22262B"/>
-                          </a:solidFill>
-                          <a:latin typeface="Calibri"/>
-                        </a:rPr>
-                        <a:t>yes</a:t>
-                      </a:r>
-                    </a:p>
-                  </a:txBody>
-                  <a:tcPr>
-                    <a:solidFill>
-                      <a:srgbClr val="ECEEF1"/>
-                    </a:solidFill>
-                  </a:tcPr>
-                </a:tc>
-                <a:tc>
-                  <a:txBody>
-                    <a:bodyPr/>
-                    <a:lstStyle/>
-                    <a:p>
-                      <a:r>
-                        <a:rPr sz="1050">
-                          <a:solidFill>
-                            <a:srgbClr val="22262B"/>
-                          </a:solidFill>
-                          <a:latin typeface="Calibri"/>
-                        </a:rPr>
-                        <a:t>0.352</a:t>
-                      </a:r>
-                    </a:p>
-                  </a:txBody>
-                  <a:tcPr>
-                    <a:solidFill>
-                      <a:srgbClr val="ECEEF1"/>
-                    </a:solidFill>
-                  </a:tcPr>
-                </a:tc>
-                <a:tc>
-                  <a:txBody>
-                    <a:bodyPr/>
-                    <a:lstStyle/>
-                    <a:p>
-                      <a:r>
-                        <a:rPr sz="1050">
-                          <a:solidFill>
-                            <a:srgbClr val="22262B"/>
-                          </a:solidFill>
-                          <a:latin typeface="Calibri"/>
-                        </a:rPr>
-                        <a:t>23.4</a:t>
-                      </a:r>
-                    </a:p>
-                  </a:txBody>
-                  <a:tcPr>
-                    <a:solidFill>
-                      <a:srgbClr val="ECEEF1"/>
-                    </a:solidFill>
-                  </a:tcPr>
-                </a:tc>
-              </a:tr>
-              <a:tr h="365760">
-                <a:tc>
-                  <a:txBody>
-                    <a:bodyPr/>
-                    <a:lstStyle/>
-                    <a:p>
-                      <a:r>
-                        <a:rPr sz="1050">
-                          <a:solidFill>
-                            <a:srgbClr val="22262B"/>
-                          </a:solidFill>
-                          <a:latin typeface="Calibri"/>
-                        </a:rPr>
-                        <a:t>VLM: ASOT (OT + temporal prior)</a:t>
-                      </a:r>
-                    </a:p>
-                  </a:txBody>
-                  <a:tcPr>
-                    <a:solidFill>
-                      <a:srgbClr val="FFFFFF"/>
-                    </a:solidFill>
-                  </a:tcPr>
-                </a:tc>
-                <a:tc>
-                  <a:txBody>
-                    <a:bodyPr/>
-                    <a:lstStyle/>
-                    <a:p>
-                      <a:r>
-                        <a:rPr sz="1050">
-                          <a:solidFill>
-                            <a:srgbClr val="22262B"/>
-                          </a:solidFill>
-                          <a:latin typeface="Calibri"/>
-                        </a:rPr>
-                        <a:t>yes</a:t>
-                      </a:r>
-                    </a:p>
-                  </a:txBody>
-                  <a:tcPr>
-                    <a:solidFill>
-                      <a:srgbClr val="FFFFFF"/>
-                    </a:solidFill>
-                  </a:tcPr>
-                </a:tc>
-                <a:tc>
-                  <a:txBody>
-                    <a:bodyPr/>
-                    <a:lstStyle/>
-                    <a:p>
-                      <a:r>
-                        <a:rPr sz="1050">
-                          <a:solidFill>
-                            <a:srgbClr val="22262B"/>
-                          </a:solidFill>
-                          <a:latin typeface="Calibri"/>
-                        </a:rPr>
-                        <a:t>0.342</a:t>
-                      </a:r>
-                    </a:p>
-                  </a:txBody>
-                  <a:tcPr>
-                    <a:solidFill>
-                      <a:srgbClr val="FFFFFF"/>
-                    </a:solidFill>
-                  </a:tcPr>
-                </a:tc>
-                <a:tc>
-                  <a:txBody>
-                    <a:bodyPr/>
-                    <a:lstStyle/>
-                    <a:p>
-                      <a:r>
-                        <a:rPr sz="1050">
-                          <a:solidFill>
-                            <a:srgbClr val="22262B"/>
-                          </a:solidFill>
-                          <a:latin typeface="Calibri"/>
-                        </a:rPr>
-                        <a:t>22.9</a:t>
-                      </a:r>
-                    </a:p>
-                  </a:txBody>
-                  <a:tcPr>
-                    <a:solidFill>
-                      <a:srgbClr val="FFFFFF"/>
-                    </a:solidFill>
-                  </a:tcPr>
-                </a:tc>
-              </a:tr>
-              <a:tr h="365760">
-                <a:tc>
-                  <a:txBody>
-                    <a:bodyPr/>
-                    <a:lstStyle/>
-                    <a:p>
-                      <a:r>
-                        <a:rPr sz="1050">
-                          <a:solidFill>
-                            <a:srgbClr val="22262B"/>
-                          </a:solidFill>
-                          <a:latin typeface="Calibri"/>
-                        </a:rPr>
-                        <a:t>Segmentation: ATBA-style classifier + DP loop</a:t>
-                      </a:r>
-                    </a:p>
-                  </a:txBody>
-                  <a:tcPr>
-                    <a:solidFill>
-                      <a:srgbClr val="ECEEF1"/>
-                    </a:solidFill>
-                  </a:tcPr>
-                </a:tc>
-                <a:tc>
-                  <a:txBody>
-                    <a:bodyPr/>
-                    <a:lstStyle/>
-                    <a:p>
-                      <a:r>
-                        <a:rPr sz="1050">
-                          <a:solidFill>
-                            <a:srgbClr val="22262B"/>
-                          </a:solidFill>
-                          <a:latin typeface="Calibri"/>
-                        </a:rPr>
-                        <a:t>yes</a:t>
-                      </a:r>
-                    </a:p>
-                  </a:txBody>
-                  <a:tcPr>
-                    <a:solidFill>
-                      <a:srgbClr val="ECEEF1"/>
-                    </a:solidFill>
-                  </a:tcPr>
-                </a:tc>
-                <a:tc>
-                  <a:txBody>
-                    <a:bodyPr/>
-                    <a:lstStyle/>
-                    <a:p>
-                      <a:r>
-                        <a:rPr sz="1050">
-                          <a:solidFill>
-                            <a:srgbClr val="22262B"/>
-                          </a:solidFill>
-                          <a:latin typeface="Calibri"/>
-                        </a:rPr>
-                        <a:t>0.202</a:t>
-                      </a:r>
-                    </a:p>
-                  </a:txBody>
-                  <a:tcPr>
-                    <a:solidFill>
-                      <a:srgbClr val="ECEEF1"/>
-                    </a:solidFill>
-                  </a:tcPr>
-                </a:tc>
-                <a:tc>
-                  <a:txBody>
-                    <a:bodyPr/>
-                    <a:lstStyle/>
-                    <a:p>
-                      <a:r>
-                        <a:rPr sz="1050">
-                          <a:solidFill>
-                            <a:srgbClr val="22262B"/>
-                          </a:solidFill>
-                          <a:latin typeface="Calibri"/>
-                        </a:rPr>
-                        <a:t>14.0</a:t>
-                      </a:r>
-                    </a:p>
-                  </a:txBody>
-                  <a:tcPr>
-                    <a:solidFill>
-                      <a:srgbClr val="ECEEF1"/>
-                    </a:solidFill>
-                  </a:tcPr>
-                </a:tc>
-              </a:tr>
-              <a:tr h="365760">
-                <a:tc>
-                  <a:txBody>
-                    <a:bodyPr/>
-                    <a:lstStyle/>
-                    <a:p>
-                      <a:r>
-                        <a:rPr sz="1050">
-                          <a:solidFill>
-                            <a:srgbClr val="22262B"/>
-                          </a:solidFill>
-                          <a:latin typeface="Calibri"/>
-                        </a:rPr>
-                        <a:t>VLM: hard DP on similarity</a:t>
-                      </a:r>
-                    </a:p>
-                  </a:txBody>
-                  <a:tcPr>
-                    <a:solidFill>
-                      <a:srgbClr val="FFFFFF"/>
-                    </a:solidFill>
-                  </a:tcPr>
-                </a:tc>
-                <a:tc>
-                  <a:txBody>
-                    <a:bodyPr/>
-                    <a:lstStyle/>
-                    <a:p>
-                      <a:r>
-                        <a:rPr sz="1050">
-                          <a:solidFill>
-                            <a:srgbClr val="22262B"/>
-                          </a:solidFill>
-                          <a:latin typeface="Calibri"/>
-                        </a:rPr>
-                        <a:t>yes</a:t>
-                      </a:r>
-                    </a:p>
-                  </a:txBody>
-                  <a:tcPr>
-                    <a:solidFill>
-                      <a:srgbClr val="FFFFFF"/>
-                    </a:solidFill>
-                  </a:tcPr>
-                </a:tc>
-                <a:tc>
-                  <a:txBody>
-                    <a:bodyPr/>
-                    <a:lstStyle/>
-                    <a:p>
-                      <a:r>
-                        <a:rPr sz="1050">
-                          <a:solidFill>
-                            <a:srgbClr val="22262B"/>
-                          </a:solidFill>
-                          <a:latin typeface="Calibri"/>
-                        </a:rPr>
-                        <a:t>0.199</a:t>
-                      </a:r>
-                    </a:p>
-                  </a:txBody>
-                  <a:tcPr>
-                    <a:solidFill>
-                      <a:srgbClr val="FFFFFF"/>
-                    </a:solidFill>
-                  </a:tcPr>
-                </a:tc>
-                <a:tc>
-                  <a:txBody>
-                    <a:bodyPr/>
-                    <a:lstStyle/>
-                    <a:p>
-                      <a:r>
-                        <a:rPr sz="1050">
-                          <a:solidFill>
-                            <a:srgbClr val="22262B"/>
-                          </a:solidFill>
-                          <a:latin typeface="Calibri"/>
-                        </a:rPr>
-                        <a:t>6.7</a:t>
-                      </a:r>
-                    </a:p>
-                  </a:txBody>
-                  <a:tcPr>
-                    <a:solidFill>
-                      <a:srgbClr val="FFFFFF"/>
-                    </a:solidFill>
-                  </a:tcPr>
-                </a:tc>
-              </a:tr>
-              <a:tr h="365760">
-                <a:tc>
-                  <a:txBody>
-                    <a:bodyPr/>
-                    <a:lstStyle/>
-                    <a:p>
-                      <a:r>
-                        <a:rPr sz="1050">
-                          <a:solidFill>
-                            <a:srgbClr val="22262B"/>
-                          </a:solidFill>
-                          <a:latin typeface="Calibri"/>
-                        </a:rPr>
-                        <a:t>Segmentation: HAL-style (+ recon regulariser)</a:t>
-                      </a:r>
-                    </a:p>
-                  </a:txBody>
-                  <a:tcPr>
-                    <a:solidFill>
-                      <a:srgbClr val="ECEEF1"/>
-                    </a:solidFill>
-                  </a:tcPr>
-                </a:tc>
-                <a:tc>
-                  <a:txBody>
-                    <a:bodyPr/>
-                    <a:lstStyle/>
-                    <a:p>
-                      <a:r>
-                        <a:rPr sz="1050">
-                          <a:solidFill>
-                            <a:srgbClr val="22262B"/>
-                          </a:solidFill>
-                          <a:latin typeface="Calibri"/>
-                        </a:rPr>
-                        <a:t>yes</a:t>
-                      </a:r>
-                    </a:p>
-                  </a:txBody>
-                  <a:tcPr>
-                    <a:solidFill>
-                      <a:srgbClr val="ECEEF1"/>
-                    </a:solidFill>
-                  </a:tcPr>
-                </a:tc>
-                <a:tc>
-                  <a:txBody>
-                    <a:bodyPr/>
-                    <a:lstStyle/>
-                    <a:p>
-                      <a:r>
-                        <a:rPr sz="1050">
-                          <a:solidFill>
-                            <a:srgbClr val="22262B"/>
-                          </a:solidFill>
-                          <a:latin typeface="Calibri"/>
-                        </a:rPr>
-                        <a:t>0.149</a:t>
-                      </a:r>
-                    </a:p>
-                  </a:txBody>
-                  <a:tcPr>
-                    <a:solidFill>
-                      <a:srgbClr val="ECEEF1"/>
-                    </a:solidFill>
-                  </a:tcPr>
-                </a:tc>
-                <a:tc>
-                  <a:txBody>
-                    <a:bodyPr/>
-                    <a:lstStyle/>
-                    <a:p>
-                      <a:r>
-                        <a:rPr sz="1050">
-                          <a:solidFill>
-                            <a:srgbClr val="22262B"/>
-                          </a:solidFill>
-                          <a:latin typeface="Calibri"/>
-                        </a:rPr>
-                        <a:t>9.4</a:t>
-                      </a:r>
-                    </a:p>
-                  </a:txBody>
-                  <a:tcPr>
-                    <a:solidFill>
-                      <a:srgbClr val="ECEEF1"/>
-                    </a:solidFill>
-                  </a:tcPr>
-                </a:tc>
-              </a:tr>
-            </a:tbl>
-          </a:graphicData>
-        </a:graphic>
-      </p:graphicFrame>
     </p:spTree>
   </p:cSld>
   <p:clrMapOvr>
@@ -6136,7 +5614,7 @@
                 </a:solidFill>
                 <a:latin typeface="Calibri"/>
               </a:rPr>
-              <a:t>Why — the diagnostic evidence</a:t>
+              <a:t>The headline — nothing beats a baseline that ignores the video</a:t>
             </a:r>
           </a:p>
           <a:p>
@@ -6147,7 +5625,7 @@
                 </a:solidFill>
                 <a:latin typeface="Calibri"/>
               </a:rPr>
-              <a:t>the difficulty is the evidence available, not the choice of algorithm</a:t>
+              <a:t>50Salads split-1 test.  The floor uses NO visual information at all — anything below it means the visual evidence is hurting, not helping.</a:t>
             </a:r>
           </a:p>
         </p:txBody>
@@ -6195,125 +5673,664 @@
           </a:p>
         </p:txBody>
       </p:sp>
-      <p:sp>
-        <p:nvSpPr>
-          <p:cNvPr id="4" name="TextBox 3"/>
-          <p:cNvSpPr txBox="1"/>
+      <p:graphicFrame>
+        <p:nvGraphicFramePr>
+          <p:cNvPr id="4" name="Table 3"/>
+          <p:cNvGraphicFramePr>
+            <a:graphicFrameLocks noGrp="1"/>
+          </p:cNvGraphicFramePr>
           <p:nvPr/>
-        </p:nvSpPr>
-        <p:spPr>
-          <a:xfrm>
-            <a:off x="640080" y="1600200"/>
-            <a:ext cx="10972800" cy="4937760"/>
-          </a:xfrm>
-          <a:prstGeom prst="rect">
-            <a:avLst/>
-          </a:prstGeom>
-          <a:noFill/>
-        </p:spPr>
-        <p:txBody>
-          <a:bodyPr wrap="square">
-            <a:spAutoFit/>
-          </a:bodyPr>
-          <a:lstStyle/>
-          <a:p>
-            <a:pPr>
-              <a:spcAft>
-                <a:spcPts val="600"/>
-              </a:spcAft>
-            </a:pPr>
-            <a:r>
-              <a:rPr sz="1700" b="0">
-                <a:solidFill>
-                  <a:srgbClr val="22262B"/>
-                </a:solidFill>
-                <a:latin typeface="Calibri"/>
-              </a:rPr>
-              <a:t>▸ Fixed overhead camera:  consecutive frames are 0.94 cosine-similar.  Almost nothing changes visually.</a:t>
-            </a:r>
-          </a:p>
-          <a:p>
-            <a:pPr>
-              <a:spcAft>
-                <a:spcPts val="600"/>
-              </a:spcAft>
-            </a:pPr>
-            <a:r>
-              <a:rPr sz="1700" b="0">
-                <a:solidFill>
-                  <a:srgbClr val="22262B"/>
-                </a:solidFill>
-                <a:latin typeface="Calibri"/>
-              </a:rPr>
-              <a:t>▸ Single-frame semantics are weak:  with the correct action vs the OTHER actions in the same transcript, SigLIP2 picks the right one only 27% of the time.</a:t>
-            </a:r>
-          </a:p>
-          <a:p>
-            <a:pPr lvl="1">
-              <a:spcAft>
-                <a:spcPts val="600"/>
-              </a:spcAft>
-            </a:pPr>
-            <a:r>
-              <a:rPr sz="1500">
-                <a:solidFill>
-                  <a:srgbClr val="5B6470"/>
-                </a:solidFill>
-                <a:latin typeface="Calibri"/>
-              </a:rPr>
-              <a:t>– Beating a *random* action is easy (cut_tomato vs add_dressing → 73%). The hard part is cut_tomato vs cut_cucumber vs cut_cheese — which is exactly what the aligner must do.</a:t>
-            </a:r>
-          </a:p>
-          <a:p>
-            <a:pPr>
-              <a:spcAft>
-                <a:spcPts val="600"/>
-              </a:spcAft>
-            </a:pPr>
-            <a:r>
-              <a:rPr sz="1700" b="0">
-                <a:solidFill>
-                  <a:srgbClr val="22262B"/>
-                </a:solidFill>
-                <a:latin typeface="Calibri"/>
-              </a:rPr>
-              <a:t>▸ Boundary signal is near chance:  frame-similarity at true boundaries scores 0.52 (0.50 = chance); I3D managed 0.67.</a:t>
-            </a:r>
-          </a:p>
-          <a:p>
-            <a:pPr>
-              <a:spcAft>
-                <a:spcPts val="600"/>
-              </a:spcAft>
-            </a:pPr>
-            <a:r>
-              <a:rPr sz="1700" b="0">
-                <a:solidFill>
-                  <a:srgbClr val="22262B"/>
-                </a:solidFill>
-                <a:latin typeface="Calibri"/>
-              </a:rPr>
-              <a:t>▸ The segmentation loop self-confirms:  loss 2.47 → 0.45 while relabelling falls 73% → 8% — the classifier confidently fits its own initial mistakes.</a:t>
-            </a:r>
-          </a:p>
-          <a:p>
-            <a:pPr>
-              <a:spcAft>
-                <a:spcPts val="600"/>
-              </a:spcAft>
-            </a:pPr>
-            <a:r>
-              <a:rPr sz="1700" b="0">
-                <a:solidFill>
-                  <a:srgbClr val="22262B"/>
-                </a:solidFill>
-                <a:latin typeface="Calibri"/>
-              </a:rPr>
-              <a:t>▸ Adaptive sampling skips 85% of frames, but only 32% of true boundaries fall inside a refined zone — driven by the same weak similarity.</a:t>
-            </a:r>
-          </a:p>
-        </p:txBody>
-      </p:sp>
+        </p:nvGraphicFramePr>
+        <p:xfrm>
+          <a:off x="548640" y="1645920"/>
+          <a:ext cx="10424160" cy="2560320"/>
+        </p:xfrm>
+        <a:graphic>
+          <a:graphicData uri="http://schemas.openxmlformats.org/drawingml/2006/table">
+            <a:tbl>
+              <a:tblPr firstRow="1" bandRow="1">
+                <a:tableStyleId>{5C22544A-7EE6-4342-B048-85BDC9FD1C3A}</a:tableStyleId>
+              </a:tblPr>
+              <a:tblGrid>
+                <a:gridCol w="6035040"/>
+                <a:gridCol w="1463040"/>
+                <a:gridCol w="1463040"/>
+                <a:gridCol w="1463040"/>
+              </a:tblGrid>
+              <a:tr h="365760">
+                <a:tc>
+                  <a:txBody>
+                    <a:bodyPr/>
+                    <a:lstStyle/>
+                    <a:p>
+                      <a:r>
+                        <a:rPr sz="1150" b="1">
+                          <a:solidFill>
+                            <a:srgbClr val="FFFFFF"/>
+                          </a:solidFill>
+                          <a:latin typeface="Calibri"/>
+                        </a:rPr>
+                        <a:t>Method</a:t>
+                      </a:r>
+                    </a:p>
+                  </a:txBody>
+                  <a:tcPr>
+                    <a:solidFill>
+                      <a:srgbClr val="1F3A5F"/>
+                    </a:solidFill>
+                  </a:tcPr>
+                </a:tc>
+                <a:tc>
+                  <a:txBody>
+                    <a:bodyPr/>
+                    <a:lstStyle/>
+                    <a:p>
+                      <a:r>
+                        <a:rPr sz="1150" b="1">
+                          <a:solidFill>
+                            <a:srgbClr val="FFFFFF"/>
+                          </a:solidFill>
+                          <a:latin typeface="Calibri"/>
+                        </a:rPr>
+                        <a:t>Uses video?</a:t>
+                      </a:r>
+                    </a:p>
+                  </a:txBody>
+                  <a:tcPr>
+                    <a:solidFill>
+                      <a:srgbClr val="1F3A5F"/>
+                    </a:solidFill>
+                  </a:tcPr>
+                </a:tc>
+                <a:tc>
+                  <a:txBody>
+                    <a:bodyPr/>
+                    <a:lstStyle/>
+                    <a:p>
+                      <a:r>
+                        <a:rPr sz="1150" b="1">
+                          <a:solidFill>
+                            <a:srgbClr val="FFFFFF"/>
+                          </a:solidFill>
+                          <a:latin typeface="Calibri"/>
+                        </a:rPr>
+                        <a:t>MoC</a:t>
+                      </a:r>
+                    </a:p>
+                  </a:txBody>
+                  <a:tcPr>
+                    <a:solidFill>
+                      <a:srgbClr val="1F3A5F"/>
+                    </a:solidFill>
+                  </a:tcPr>
+                </a:tc>
+                <a:tc>
+                  <a:txBody>
+                    <a:bodyPr/>
+                    <a:lstStyle/>
+                    <a:p>
+                      <a:r>
+                        <a:rPr sz="1150" b="1">
+                          <a:solidFill>
+                            <a:srgbClr val="FFFFFF"/>
+                          </a:solidFill>
+                          <a:latin typeface="Calibri"/>
+                        </a:rPr>
+                        <a:t>F1@50</a:t>
+                      </a:r>
+                    </a:p>
+                  </a:txBody>
+                  <a:tcPr>
+                    <a:solidFill>
+                      <a:srgbClr val="1F3A5F"/>
+                    </a:solidFill>
+                  </a:tcPr>
+                </a:tc>
+              </a:tr>
+              <a:tr h="365760">
+                <a:tc>
+                  <a:txBody>
+                    <a:bodyPr/>
+                    <a:lstStyle/>
+                    <a:p>
+                      <a:r>
+                        <a:rPr sz="1050">
+                          <a:solidFill>
+                            <a:srgbClr val="22262B"/>
+                          </a:solidFill>
+                          <a:latin typeface="Calibri"/>
+                        </a:rPr>
+                        <a:t>naive-uniform  (split into N equal blocks, transcript order)</a:t>
+                      </a:r>
+                    </a:p>
+                  </a:txBody>
+                  <a:tcPr>
+                    <a:solidFill>
+                      <a:srgbClr val="FFFFFF"/>
+                    </a:solidFill>
+                  </a:tcPr>
+                </a:tc>
+                <a:tc>
+                  <a:txBody>
+                    <a:bodyPr/>
+                    <a:lstStyle/>
+                    <a:p>
+                      <a:r>
+                        <a:rPr sz="1050">
+                          <a:solidFill>
+                            <a:srgbClr val="22262B"/>
+                          </a:solidFill>
+                          <a:latin typeface="Calibri"/>
+                        </a:rPr>
+                        <a:t>no</a:t>
+                      </a:r>
+                    </a:p>
+                  </a:txBody>
+                  <a:tcPr>
+                    <a:solidFill>
+                      <a:srgbClr val="FFFFFF"/>
+                    </a:solidFill>
+                  </a:tcPr>
+                </a:tc>
+                <a:tc>
+                  <a:txBody>
+                    <a:bodyPr/>
+                    <a:lstStyle/>
+                    <a:p>
+                      <a:r>
+                        <a:rPr sz="1050">
+                          <a:solidFill>
+                            <a:srgbClr val="22262B"/>
+                          </a:solidFill>
+                          <a:latin typeface="Calibri"/>
+                        </a:rPr>
+                        <a:t>0.366</a:t>
+                      </a:r>
+                    </a:p>
+                  </a:txBody>
+                  <a:tcPr>
+                    <a:solidFill>
+                      <a:srgbClr val="FFFFFF"/>
+                    </a:solidFill>
+                  </a:tcPr>
+                </a:tc>
+                <a:tc>
+                  <a:txBody>
+                    <a:bodyPr/>
+                    <a:lstStyle/>
+                    <a:p>
+                      <a:r>
+                        <a:rPr sz="1050">
+                          <a:solidFill>
+                            <a:srgbClr val="22262B"/>
+                          </a:solidFill>
+                          <a:latin typeface="Calibri"/>
+                        </a:rPr>
+                        <a:t>26.2</a:t>
+                      </a:r>
+                    </a:p>
+                  </a:txBody>
+                  <a:tcPr>
+                    <a:solidFill>
+                      <a:srgbClr val="FFFFFF"/>
+                    </a:solidFill>
+                  </a:tcPr>
+                </a:tc>
+              </a:tr>
+              <a:tr h="365760">
+                <a:tc>
+                  <a:txBody>
+                    <a:bodyPr/>
+                    <a:lstStyle/>
+                    <a:p>
+                      <a:r>
+                        <a:rPr sz="1050">
+                          <a:solidFill>
+                            <a:srgbClr val="22262B"/>
+                          </a:solidFill>
+                          <a:latin typeface="Calibri"/>
+                        </a:rPr>
+                        <a:t>VLM: ASOT + local boundary refinement</a:t>
+                      </a:r>
+                    </a:p>
+                  </a:txBody>
+                  <a:tcPr>
+                    <a:solidFill>
+                      <a:srgbClr val="ECEEF1"/>
+                    </a:solidFill>
+                  </a:tcPr>
+                </a:tc>
+                <a:tc>
+                  <a:txBody>
+                    <a:bodyPr/>
+                    <a:lstStyle/>
+                    <a:p>
+                      <a:r>
+                        <a:rPr sz="1050">
+                          <a:solidFill>
+                            <a:srgbClr val="22262B"/>
+                          </a:solidFill>
+                          <a:latin typeface="Calibri"/>
+                        </a:rPr>
+                        <a:t>yes</a:t>
+                      </a:r>
+                    </a:p>
+                  </a:txBody>
+                  <a:tcPr>
+                    <a:solidFill>
+                      <a:srgbClr val="ECEEF1"/>
+                    </a:solidFill>
+                  </a:tcPr>
+                </a:tc>
+                <a:tc>
+                  <a:txBody>
+                    <a:bodyPr/>
+                    <a:lstStyle/>
+                    <a:p>
+                      <a:r>
+                        <a:rPr sz="1050">
+                          <a:solidFill>
+                            <a:srgbClr val="22262B"/>
+                          </a:solidFill>
+                          <a:latin typeface="Calibri"/>
+                        </a:rPr>
+                        <a:t>0.352</a:t>
+                      </a:r>
+                    </a:p>
+                  </a:txBody>
+                  <a:tcPr>
+                    <a:solidFill>
+                      <a:srgbClr val="ECEEF1"/>
+                    </a:solidFill>
+                  </a:tcPr>
+                </a:tc>
+                <a:tc>
+                  <a:txBody>
+                    <a:bodyPr/>
+                    <a:lstStyle/>
+                    <a:p>
+                      <a:r>
+                        <a:rPr sz="1050">
+                          <a:solidFill>
+                            <a:srgbClr val="22262B"/>
+                          </a:solidFill>
+                          <a:latin typeface="Calibri"/>
+                        </a:rPr>
+                        <a:t>23.4</a:t>
+                      </a:r>
+                    </a:p>
+                  </a:txBody>
+                  <a:tcPr>
+                    <a:solidFill>
+                      <a:srgbClr val="ECEEF1"/>
+                    </a:solidFill>
+                  </a:tcPr>
+                </a:tc>
+              </a:tr>
+              <a:tr h="365760">
+                <a:tc>
+                  <a:txBody>
+                    <a:bodyPr/>
+                    <a:lstStyle/>
+                    <a:p>
+                      <a:r>
+                        <a:rPr sz="1050">
+                          <a:solidFill>
+                            <a:srgbClr val="22262B"/>
+                          </a:solidFill>
+                          <a:latin typeface="Calibri"/>
+                        </a:rPr>
+                        <a:t>VLM: ASOT (OT + temporal prior)</a:t>
+                      </a:r>
+                    </a:p>
+                  </a:txBody>
+                  <a:tcPr>
+                    <a:solidFill>
+                      <a:srgbClr val="FFFFFF"/>
+                    </a:solidFill>
+                  </a:tcPr>
+                </a:tc>
+                <a:tc>
+                  <a:txBody>
+                    <a:bodyPr/>
+                    <a:lstStyle/>
+                    <a:p>
+                      <a:r>
+                        <a:rPr sz="1050">
+                          <a:solidFill>
+                            <a:srgbClr val="22262B"/>
+                          </a:solidFill>
+                          <a:latin typeface="Calibri"/>
+                        </a:rPr>
+                        <a:t>yes</a:t>
+                      </a:r>
+                    </a:p>
+                  </a:txBody>
+                  <a:tcPr>
+                    <a:solidFill>
+                      <a:srgbClr val="FFFFFF"/>
+                    </a:solidFill>
+                  </a:tcPr>
+                </a:tc>
+                <a:tc>
+                  <a:txBody>
+                    <a:bodyPr/>
+                    <a:lstStyle/>
+                    <a:p>
+                      <a:r>
+                        <a:rPr sz="1050">
+                          <a:solidFill>
+                            <a:srgbClr val="22262B"/>
+                          </a:solidFill>
+                          <a:latin typeface="Calibri"/>
+                        </a:rPr>
+                        <a:t>0.342</a:t>
+                      </a:r>
+                    </a:p>
+                  </a:txBody>
+                  <a:tcPr>
+                    <a:solidFill>
+                      <a:srgbClr val="FFFFFF"/>
+                    </a:solidFill>
+                  </a:tcPr>
+                </a:tc>
+                <a:tc>
+                  <a:txBody>
+                    <a:bodyPr/>
+                    <a:lstStyle/>
+                    <a:p>
+                      <a:r>
+                        <a:rPr sz="1050">
+                          <a:solidFill>
+                            <a:srgbClr val="22262B"/>
+                          </a:solidFill>
+                          <a:latin typeface="Calibri"/>
+                        </a:rPr>
+                        <a:t>22.9</a:t>
+                      </a:r>
+                    </a:p>
+                  </a:txBody>
+                  <a:tcPr>
+                    <a:solidFill>
+                      <a:srgbClr val="FFFFFF"/>
+                    </a:solidFill>
+                  </a:tcPr>
+                </a:tc>
+              </a:tr>
+              <a:tr h="365760">
+                <a:tc>
+                  <a:txBody>
+                    <a:bodyPr/>
+                    <a:lstStyle/>
+                    <a:p>
+                      <a:r>
+                        <a:rPr sz="1050">
+                          <a:solidFill>
+                            <a:srgbClr val="22262B"/>
+                          </a:solidFill>
+                          <a:latin typeface="Calibri"/>
+                        </a:rPr>
+                        <a:t>Segmentation: ATBA-style classifier + DP loop</a:t>
+                      </a:r>
+                    </a:p>
+                  </a:txBody>
+                  <a:tcPr>
+                    <a:solidFill>
+                      <a:srgbClr val="ECEEF1"/>
+                    </a:solidFill>
+                  </a:tcPr>
+                </a:tc>
+                <a:tc>
+                  <a:txBody>
+                    <a:bodyPr/>
+                    <a:lstStyle/>
+                    <a:p>
+                      <a:r>
+                        <a:rPr sz="1050">
+                          <a:solidFill>
+                            <a:srgbClr val="22262B"/>
+                          </a:solidFill>
+                          <a:latin typeface="Calibri"/>
+                        </a:rPr>
+                        <a:t>yes</a:t>
+                      </a:r>
+                    </a:p>
+                  </a:txBody>
+                  <a:tcPr>
+                    <a:solidFill>
+                      <a:srgbClr val="ECEEF1"/>
+                    </a:solidFill>
+                  </a:tcPr>
+                </a:tc>
+                <a:tc>
+                  <a:txBody>
+                    <a:bodyPr/>
+                    <a:lstStyle/>
+                    <a:p>
+                      <a:r>
+                        <a:rPr sz="1050">
+                          <a:solidFill>
+                            <a:srgbClr val="22262B"/>
+                          </a:solidFill>
+                          <a:latin typeface="Calibri"/>
+                        </a:rPr>
+                        <a:t>0.202</a:t>
+                      </a:r>
+                    </a:p>
+                  </a:txBody>
+                  <a:tcPr>
+                    <a:solidFill>
+                      <a:srgbClr val="ECEEF1"/>
+                    </a:solidFill>
+                  </a:tcPr>
+                </a:tc>
+                <a:tc>
+                  <a:txBody>
+                    <a:bodyPr/>
+                    <a:lstStyle/>
+                    <a:p>
+                      <a:r>
+                        <a:rPr sz="1050">
+                          <a:solidFill>
+                            <a:srgbClr val="22262B"/>
+                          </a:solidFill>
+                          <a:latin typeface="Calibri"/>
+                        </a:rPr>
+                        <a:t>14.0</a:t>
+                      </a:r>
+                    </a:p>
+                  </a:txBody>
+                  <a:tcPr>
+                    <a:solidFill>
+                      <a:srgbClr val="ECEEF1"/>
+                    </a:solidFill>
+                  </a:tcPr>
+                </a:tc>
+              </a:tr>
+              <a:tr h="365760">
+                <a:tc>
+                  <a:txBody>
+                    <a:bodyPr/>
+                    <a:lstStyle/>
+                    <a:p>
+                      <a:r>
+                        <a:rPr sz="1050">
+                          <a:solidFill>
+                            <a:srgbClr val="22262B"/>
+                          </a:solidFill>
+                          <a:latin typeface="Calibri"/>
+                        </a:rPr>
+                        <a:t>VLM: hard DP on similarity</a:t>
+                      </a:r>
+                    </a:p>
+                  </a:txBody>
+                  <a:tcPr>
+                    <a:solidFill>
+                      <a:srgbClr val="FFFFFF"/>
+                    </a:solidFill>
+                  </a:tcPr>
+                </a:tc>
+                <a:tc>
+                  <a:txBody>
+                    <a:bodyPr/>
+                    <a:lstStyle/>
+                    <a:p>
+                      <a:r>
+                        <a:rPr sz="1050">
+                          <a:solidFill>
+                            <a:srgbClr val="22262B"/>
+                          </a:solidFill>
+                          <a:latin typeface="Calibri"/>
+                        </a:rPr>
+                        <a:t>yes</a:t>
+                      </a:r>
+                    </a:p>
+                  </a:txBody>
+                  <a:tcPr>
+                    <a:solidFill>
+                      <a:srgbClr val="FFFFFF"/>
+                    </a:solidFill>
+                  </a:tcPr>
+                </a:tc>
+                <a:tc>
+                  <a:txBody>
+                    <a:bodyPr/>
+                    <a:lstStyle/>
+                    <a:p>
+                      <a:r>
+                        <a:rPr sz="1050">
+                          <a:solidFill>
+                            <a:srgbClr val="22262B"/>
+                          </a:solidFill>
+                          <a:latin typeface="Calibri"/>
+                        </a:rPr>
+                        <a:t>0.199</a:t>
+                      </a:r>
+                    </a:p>
+                  </a:txBody>
+                  <a:tcPr>
+                    <a:solidFill>
+                      <a:srgbClr val="FFFFFF"/>
+                    </a:solidFill>
+                  </a:tcPr>
+                </a:tc>
+                <a:tc>
+                  <a:txBody>
+                    <a:bodyPr/>
+                    <a:lstStyle/>
+                    <a:p>
+                      <a:r>
+                        <a:rPr sz="1050">
+                          <a:solidFill>
+                            <a:srgbClr val="22262B"/>
+                          </a:solidFill>
+                          <a:latin typeface="Calibri"/>
+                        </a:rPr>
+                        <a:t>6.7</a:t>
+                      </a:r>
+                    </a:p>
+                  </a:txBody>
+                  <a:tcPr>
+                    <a:solidFill>
+                      <a:srgbClr val="FFFFFF"/>
+                    </a:solidFill>
+                  </a:tcPr>
+                </a:tc>
+              </a:tr>
+              <a:tr h="365760">
+                <a:tc>
+                  <a:txBody>
+                    <a:bodyPr/>
+                    <a:lstStyle/>
+                    <a:p>
+                      <a:r>
+                        <a:rPr sz="1050">
+                          <a:solidFill>
+                            <a:srgbClr val="22262B"/>
+                          </a:solidFill>
+                          <a:latin typeface="Calibri"/>
+                        </a:rPr>
+                        <a:t>Segmentation: HAL-style (+ recon regulariser)</a:t>
+                      </a:r>
+                    </a:p>
+                  </a:txBody>
+                  <a:tcPr>
+                    <a:solidFill>
+                      <a:srgbClr val="ECEEF1"/>
+                    </a:solidFill>
+                  </a:tcPr>
+                </a:tc>
+                <a:tc>
+                  <a:txBody>
+                    <a:bodyPr/>
+                    <a:lstStyle/>
+                    <a:p>
+                      <a:r>
+                        <a:rPr sz="1050">
+                          <a:solidFill>
+                            <a:srgbClr val="22262B"/>
+                          </a:solidFill>
+                          <a:latin typeface="Calibri"/>
+                        </a:rPr>
+                        <a:t>yes</a:t>
+                      </a:r>
+                    </a:p>
+                  </a:txBody>
+                  <a:tcPr>
+                    <a:solidFill>
+                      <a:srgbClr val="ECEEF1"/>
+                    </a:solidFill>
+                  </a:tcPr>
+                </a:tc>
+                <a:tc>
+                  <a:txBody>
+                    <a:bodyPr/>
+                    <a:lstStyle/>
+                    <a:p>
+                      <a:r>
+                        <a:rPr sz="1050">
+                          <a:solidFill>
+                            <a:srgbClr val="22262B"/>
+                          </a:solidFill>
+                          <a:latin typeface="Calibri"/>
+                        </a:rPr>
+                        <a:t>0.149</a:t>
+                      </a:r>
+                    </a:p>
+                  </a:txBody>
+                  <a:tcPr>
+                    <a:solidFill>
+                      <a:srgbClr val="ECEEF1"/>
+                    </a:solidFill>
+                  </a:tcPr>
+                </a:tc>
+                <a:tc>
+                  <a:txBody>
+                    <a:bodyPr/>
+                    <a:lstStyle/>
+                    <a:p>
+                      <a:r>
+                        <a:rPr sz="1050">
+                          <a:solidFill>
+                            <a:srgbClr val="22262B"/>
+                          </a:solidFill>
+                          <a:latin typeface="Calibri"/>
+                        </a:rPr>
+                        <a:t>9.4</a:t>
+                      </a:r>
+                    </a:p>
+                  </a:txBody>
+                  <a:tcPr>
+                    <a:solidFill>
+                      <a:srgbClr val="ECEEF1"/>
+                    </a:solidFill>
+                  </a:tcPr>
+                </a:tc>
+              </a:tr>
+            </a:tbl>
+          </a:graphicData>
+        </a:graphic>
+      </p:graphicFrame>
     </p:spTree>
   </p:cSld>
   <p:clrMapOvr>
@@ -6369,7 +6386,7 @@
                 </a:solidFill>
                 <a:latin typeface="Calibri"/>
               </a:rPr>
-              <a:t>What I take from this</a:t>
+              <a:t>Why — the diagnostic evidence</a:t>
             </a:r>
           </a:p>
           <a:p>
@@ -6380,7 +6397,7 @@
                 </a:solidFill>
                 <a:latin typeface="Calibri"/>
               </a:rPr>
-              <a:t>the case for continuing, with clear eyes about the difficulty</a:t>
+              <a:t>the difficulty is the evidence available, not the choice of algorithm</a:t>
             </a:r>
           </a:p>
         </p:txBody>
@@ -6462,7 +6479,7 @@
                 </a:solidFill>
                 <a:latin typeface="Calibri"/>
               </a:rPr>
-              <a:t>▸ The question is not "segmentation vs VLM" — both lose to a baseline that never looks at the video.</a:t>
+              <a:t>▸ Fixed overhead camera:  consecutive frames are 0.94 cosine-similar.  Almost nothing changes visually.</a:t>
             </a:r>
           </a:p>
           <a:p>
@@ -6478,7 +6495,23 @@
                 </a:solidFill>
                 <a:latin typeface="Calibri"/>
               </a:rPr>
-              <a:t>▸ The real question:  what evidence could localise a boundary on this dataset at all?</a:t>
+              <a:t>▸ Single-frame semantics are weak:  with the correct action vs the OTHER actions in the same transcript, SigLIP2 picks the right one only 27% of the time.</a:t>
+            </a:r>
+          </a:p>
+          <a:p>
+            <a:pPr lvl="1">
+              <a:spcAft>
+                <a:spcPts val="600"/>
+              </a:spcAft>
+            </a:pPr>
+            <a:r>
+              <a:rPr sz="1500">
+                <a:solidFill>
+                  <a:srgbClr val="5B6470"/>
+                </a:solidFill>
+                <a:latin typeface="Calibri"/>
+              </a:rPr>
+              <a:t>– Beating a *random* action is easy (cut_tomato vs add_dressing → 73%). The hard part is cut_tomato vs cut_cucumber vs cut_cheese — which is exactly what the aligner must do.</a:t>
             </a:r>
           </a:p>
           <a:p>
@@ -6494,7 +6527,7 @@
                 </a:solidFill>
                 <a:latin typeface="Calibri"/>
               </a:rPr>
-              <a:t>▸ Argument for temporal context:  every result so far uses FRAME-level evidence. A fixed camera is precisely the case where single frames should fail and video should help.</a:t>
+              <a:t>▸ Boundary signal is near chance:  frame-similarity at true boundaries scores 0.52 (0.50 = chance); I3D managed 0.67.</a:t>
             </a:r>
           </a:p>
           <a:p>
@@ -6510,7 +6543,7 @@
                 </a:solidFill>
                 <a:latin typeface="Calibri"/>
               </a:rPr>
-              <a:t>▸ → We have not yet fairly tested the VLM direction.  SigLIP2 encodes single frames; VideoLLaMA3 encodes video.  That test has not been run.</a:t>
+              <a:t>▸ The segmentation loop self-confirms:  loss 2.47 → 0.45 while relabelling falls 73% → 8% — the classifier confidently fits its own initial mistakes.</a:t>
             </a:r>
           </a:p>
           <a:p>
@@ -6526,7 +6559,7 @@
                 </a:solidFill>
                 <a:latin typeface="Calibri"/>
               </a:rPr>
-              <a:t>▸ Caveat, stated plainly:  the segmentation probe is a compact reimplementation (no boundary detector, minutes of training).  It is evidence about the paradigm, NOT a reproduction of HAL — which never ran 50Salads.</a:t>
+              <a:t>▸ Adaptive sampling skips 85% of frames, but only 32% of true boundaries fall inside a refined zone — driven by the same weak similarity.</a:t>
             </a:r>
           </a:p>
         </p:txBody>
@@ -6586,7 +6619,7 @@
                 </a:solidFill>
                 <a:latin typeface="Calibri"/>
               </a:rPr>
-              <a:t>What is built and tested</a:t>
+              <a:t>What I take from this</a:t>
             </a:r>
           </a:p>
           <a:p>
@@ -6597,7 +6630,7 @@
                 </a:solidFill>
                 <a:latin typeface="Calibri"/>
               </a:rPr>
-              <a:t>67 unit tests pass.  These verify the code is correct on synthetic data — they do NOT show the method works.</a:t>
+              <a:t>the case for continuing, with clear eyes about the difficulty</a:t>
             </a:r>
           </a:p>
         </p:txBody>
@@ -6645,577 +6678,109 @@
           </a:p>
         </p:txBody>
       </p:sp>
-      <p:graphicFrame>
-        <p:nvGraphicFramePr>
-          <p:cNvPr id="4" name="Table 3"/>
-          <p:cNvGraphicFramePr>
-            <a:graphicFrameLocks noGrp="1"/>
-          </p:cNvGraphicFramePr>
+      <p:sp>
+        <p:nvSpPr>
+          <p:cNvPr id="4" name="TextBox 3"/>
+          <p:cNvSpPr txBox="1"/>
           <p:nvPr/>
-        </p:nvGraphicFramePr>
-        <p:xfrm>
-          <a:off x="548640" y="1645920"/>
-          <a:ext cx="10515600" cy="2926080"/>
-        </p:xfrm>
-        <a:graphic>
-          <a:graphicData uri="http://schemas.openxmlformats.org/drawingml/2006/table">
-            <a:tbl>
-              <a:tblPr firstRow="1" bandRow="1">
-                <a:tableStyleId>{5C22544A-7EE6-4342-B048-85BDC9FD1C3A}</a:tableStyleId>
-              </a:tblPr>
-              <a:tblGrid>
-                <a:gridCol w="2651760"/>
-                <a:gridCol w="5120640"/>
-                <a:gridCol w="2743200"/>
-              </a:tblGrid>
-              <a:tr h="365760">
-                <a:tc>
-                  <a:txBody>
-                    <a:bodyPr/>
-                    <a:lstStyle/>
-                    <a:p>
-                      <a:r>
-                        <a:rPr sz="1050" b="1">
-                          <a:solidFill>
-                            <a:srgbClr val="FFFFFF"/>
-                          </a:solidFill>
-                          <a:latin typeface="Calibri"/>
-                        </a:rPr>
-                        <a:t>Stage</a:t>
-                      </a:r>
-                    </a:p>
-                  </a:txBody>
-                  <a:tcPr>
-                    <a:solidFill>
-                      <a:srgbClr val="1F3A5F"/>
-                    </a:solidFill>
-                  </a:tcPr>
-                </a:tc>
-                <a:tc>
-                  <a:txBody>
-                    <a:bodyPr/>
-                    <a:lstStyle/>
-                    <a:p>
-                      <a:r>
-                        <a:rPr sz="1050" b="1">
-                          <a:solidFill>
-                            <a:srgbClr val="FFFFFF"/>
-                          </a:solidFill>
-                          <a:latin typeface="Calibri"/>
-                        </a:rPr>
-                        <a:t>Module</a:t>
-                      </a:r>
-                    </a:p>
-                  </a:txBody>
-                  <a:tcPr>
-                    <a:solidFill>
-                      <a:srgbClr val="1F3A5F"/>
-                    </a:solidFill>
-                  </a:tcPr>
-                </a:tc>
-                <a:tc>
-                  <a:txBody>
-                    <a:bodyPr/>
-                    <a:lstStyle/>
-                    <a:p>
-                      <a:r>
-                        <a:rPr sz="1050" b="1">
-                          <a:solidFill>
-                            <a:srgbClr val="FFFFFF"/>
-                          </a:solidFill>
-                          <a:latin typeface="Calibri"/>
-                        </a:rPr>
-                        <a:t>Status</a:t>
-                      </a:r>
-                    </a:p>
-                  </a:txBody>
-                  <a:tcPr>
-                    <a:solidFill>
-                      <a:srgbClr val="1F3A5F"/>
-                    </a:solidFill>
-                  </a:tcPr>
-                </a:tc>
-              </a:tr>
-              <a:tr h="365760">
-                <a:tc>
-                  <a:txBody>
-                    <a:bodyPr/>
-                    <a:lstStyle/>
-                    <a:p>
-                      <a:r>
-                        <a:rPr sz="950">
-                          <a:solidFill>
-                            <a:srgbClr val="22262B"/>
-                          </a:solidFill>
-                          <a:latin typeface="Calibri"/>
-                        </a:rPr>
-                        <a:t>0  semantic-guided sampling</a:t>
-                      </a:r>
-                    </a:p>
-                  </a:txBody>
-                  <a:tcPr>
-                    <a:solidFill>
-                      <a:srgbClr val="FFFFFF"/>
-                    </a:solidFill>
-                  </a:tcPr>
-                </a:tc>
-                <a:tc>
-                  <a:txBody>
-                    <a:bodyPr/>
-                    <a:lstStyle/>
-                    <a:p>
-                      <a:r>
-                        <a:rPr sz="950">
-                          <a:solidFill>
-                            <a:srgbClr val="22262B"/>
-                          </a:solidFill>
-                          <a:latin typeface="Calibri"/>
-                        </a:rPr>
-                        <a:t>delta.features.sampling  (+ extract --adaptive)</a:t>
-                      </a:r>
-                    </a:p>
-                  </a:txBody>
-                  <a:tcPr>
-                    <a:solidFill>
-                      <a:srgbClr val="FFFFFF"/>
-                    </a:solidFill>
-                  </a:tcPr>
-                </a:tc>
-                <a:tc>
-                  <a:txBody>
-                    <a:bodyPr/>
-                    <a:lstStyle/>
-                    <a:p>
-                      <a:r>
-                        <a:rPr sz="950">
-                          <a:solidFill>
-                            <a:srgbClr val="22262B"/>
-                          </a:solidFill>
-                          <a:latin typeface="Calibri"/>
-                        </a:rPr>
-                        <a:t>built · 7 tests</a:t>
-                      </a:r>
-                    </a:p>
-                  </a:txBody>
-                  <a:tcPr>
-                    <a:solidFill>
-                      <a:srgbClr val="FFFFFF"/>
-                    </a:solidFill>
-                  </a:tcPr>
-                </a:tc>
-              </a:tr>
-              <a:tr h="365760">
-                <a:tc>
-                  <a:txBody>
-                    <a:bodyPr/>
-                    <a:lstStyle/>
-                    <a:p>
-                      <a:r>
-                        <a:rPr sz="950">
-                          <a:solidFill>
-                            <a:srgbClr val="22262B"/>
-                          </a:solidFill>
-                          <a:latin typeface="Calibri"/>
-                        </a:rPr>
-                        <a:t>1  clip ↔ action similarity</a:t>
-                      </a:r>
-                    </a:p>
-                  </a:txBody>
-                  <a:tcPr>
-                    <a:solidFill>
-                      <a:srgbClr val="ECEEF1"/>
-                    </a:solidFill>
-                  </a:tcPr>
-                </a:tc>
-                <a:tc>
-                  <a:txBody>
-                    <a:bodyPr/>
-                    <a:lstStyle/>
-                    <a:p>
-                      <a:r>
-                        <a:rPr sz="950">
-                          <a:solidFill>
-                            <a:srgbClr val="22262B"/>
-                          </a:solidFill>
-                          <a:latin typeface="Calibri"/>
-                        </a:rPr>
-                        <a:t>delta.align.similarity / cost</a:t>
-                      </a:r>
-                    </a:p>
-                  </a:txBody>
-                  <a:tcPr>
-                    <a:solidFill>
-                      <a:srgbClr val="ECEEF1"/>
-                    </a:solidFill>
-                  </a:tcPr>
-                </a:tc>
-                <a:tc>
-                  <a:txBody>
-                    <a:bodyPr/>
-                    <a:lstStyle/>
-                    <a:p>
-                      <a:r>
-                        <a:rPr sz="950">
-                          <a:solidFill>
-                            <a:srgbClr val="22262B"/>
-                          </a:solidFill>
-                          <a:latin typeface="Calibri"/>
-                        </a:rPr>
-                        <a:t>built</a:t>
-                      </a:r>
-                    </a:p>
-                  </a:txBody>
-                  <a:tcPr>
-                    <a:solidFill>
-                      <a:srgbClr val="ECEEF1"/>
-                    </a:solidFill>
-                  </a:tcPr>
-                </a:tc>
-              </a:tr>
-              <a:tr h="365760">
-                <a:tc>
-                  <a:txBody>
-                    <a:bodyPr/>
-                    <a:lstStyle/>
-                    <a:p>
-                      <a:r>
-                        <a:rPr sz="950">
-                          <a:solidFill>
-                            <a:srgbClr val="22262B"/>
-                          </a:solidFill>
-                          <a:latin typeface="Calibri"/>
-                        </a:rPr>
-                        <a:t>2  coarse ordered decode</a:t>
-                      </a:r>
-                    </a:p>
-                  </a:txBody>
-                  <a:tcPr>
-                    <a:solidFill>
-                      <a:srgbClr val="FFFFFF"/>
-                    </a:solidFill>
-                  </a:tcPr>
-                </a:tc>
-                <a:tc>
-                  <a:txBody>
-                    <a:bodyPr/>
-                    <a:lstStyle/>
-                    <a:p>
-                      <a:r>
-                        <a:rPr sz="950">
-                          <a:solidFill>
-                            <a:srgbClr val="22262B"/>
-                          </a:solidFill>
-                          <a:latin typeface="Calibri"/>
-                        </a:rPr>
-                        <a:t>delta.align.asot  (OT + transcript-order prior)</a:t>
-                      </a:r>
-                    </a:p>
-                  </a:txBody>
-                  <a:tcPr>
-                    <a:solidFill>
-                      <a:srgbClr val="FFFFFF"/>
-                    </a:solidFill>
-                  </a:tcPr>
-                </a:tc>
-                <a:tc>
-                  <a:txBody>
-                    <a:bodyPr/>
-                    <a:lstStyle/>
-                    <a:p>
-                      <a:r>
-                        <a:rPr sz="950">
-                          <a:solidFill>
-                            <a:srgbClr val="22262B"/>
-                          </a:solidFill>
-                          <a:latin typeface="Calibri"/>
-                        </a:rPr>
-                        <a:t>built · 8 tests</a:t>
-                      </a:r>
-                    </a:p>
-                  </a:txBody>
-                  <a:tcPr>
-                    <a:solidFill>
-                      <a:srgbClr val="FFFFFF"/>
-                    </a:solidFill>
-                  </a:tcPr>
-                </a:tc>
-              </a:tr>
-              <a:tr h="365760">
-                <a:tc>
-                  <a:txBody>
-                    <a:bodyPr/>
-                    <a:lstStyle/>
-                    <a:p>
-                      <a:r>
-                        <a:rPr sz="950">
-                          <a:solidFill>
-                            <a:srgbClr val="22262B"/>
-                          </a:solidFill>
-                          <a:latin typeface="Calibri"/>
-                        </a:rPr>
-                        <a:t>3  local boundary search</a:t>
-                      </a:r>
-                    </a:p>
-                  </a:txBody>
-                  <a:tcPr>
-                    <a:solidFill>
-                      <a:srgbClr val="ECEEF1"/>
-                    </a:solidFill>
-                  </a:tcPr>
-                </a:tc>
-                <a:tc>
-                  <a:txBody>
-                    <a:bodyPr/>
-                    <a:lstStyle/>
-                    <a:p>
-                      <a:r>
-                        <a:rPr sz="950">
-                          <a:solidFill>
-                            <a:srgbClr val="22262B"/>
-                          </a:solidFill>
-                          <a:latin typeface="Calibri"/>
-                        </a:rPr>
-                        <a:t>delta.align.refine  — the novel piece</a:t>
-                      </a:r>
-                    </a:p>
-                  </a:txBody>
-                  <a:tcPr>
-                    <a:solidFill>
-                      <a:srgbClr val="ECEEF1"/>
-                    </a:solidFill>
-                  </a:tcPr>
-                </a:tc>
-                <a:tc>
-                  <a:txBody>
-                    <a:bodyPr/>
-                    <a:lstStyle/>
-                    <a:p>
-                      <a:r>
-                        <a:rPr sz="950">
-                          <a:solidFill>
-                            <a:srgbClr val="22262B"/>
-                          </a:solidFill>
-                          <a:latin typeface="Calibri"/>
-                        </a:rPr>
-                        <a:t>built · 6 tests</a:t>
-                      </a:r>
-                    </a:p>
-                  </a:txBody>
-                  <a:tcPr>
-                    <a:solidFill>
-                      <a:srgbClr val="ECEEF1"/>
-                    </a:solidFill>
-                  </a:tcPr>
-                </a:tc>
-              </a:tr>
-              <a:tr h="365760">
-                <a:tc>
-                  <a:txBody>
-                    <a:bodyPr/>
-                    <a:lstStyle/>
-                    <a:p>
-                      <a:r>
-                        <a:rPr sz="950">
-                          <a:solidFill>
-                            <a:srgbClr val="22262B"/>
-                          </a:solidFill>
-                          <a:latin typeface="Calibri"/>
-                        </a:rPr>
-                        <a:t>4  contrastive refinement</a:t>
-                      </a:r>
-                    </a:p>
-                  </a:txBody>
-                  <a:tcPr>
-                    <a:solidFill>
-                      <a:srgbClr val="FFFFFF"/>
-                    </a:solidFill>
-                  </a:tcPr>
-                </a:tc>
-                <a:tc>
-                  <a:txBody>
-                    <a:bodyPr/>
-                    <a:lstStyle/>
-                    <a:p>
-                      <a:r>
-                        <a:rPr sz="950">
-                          <a:solidFill>
-                            <a:srgbClr val="22262B"/>
-                          </a:solidFill>
-                          <a:latin typeface="Calibri"/>
-                        </a:rPr>
-                        <a:t>delta.align.cbd (PBCR) + masra_torch (LRCA/ESTA)</a:t>
-                      </a:r>
-                    </a:p>
-                  </a:txBody>
-                  <a:tcPr>
-                    <a:solidFill>
-                      <a:srgbClr val="FFFFFF"/>
-                    </a:solidFill>
-                  </a:tcPr>
-                </a:tc>
-                <a:tc>
-                  <a:txBody>
-                    <a:bodyPr/>
-                    <a:lstStyle/>
-                    <a:p>
-                      <a:r>
-                        <a:rPr sz="950">
-                          <a:solidFill>
-                            <a:srgbClr val="22262B"/>
-                          </a:solidFill>
-                          <a:latin typeface="Calibri"/>
-                        </a:rPr>
-                        <a:t>built · 15 tests</a:t>
-                      </a:r>
-                    </a:p>
-                  </a:txBody>
-                  <a:tcPr>
-                    <a:solidFill>
-                      <a:srgbClr val="FFFFFF"/>
-                    </a:solidFill>
-                  </a:tcPr>
-                </a:tc>
-              </a:tr>
-              <a:tr h="365760">
-                <a:tc>
-                  <a:txBody>
-                    <a:bodyPr/>
-                    <a:lstStyle/>
-                    <a:p>
-                      <a:r>
-                        <a:rPr sz="950">
-                          <a:solidFill>
-                            <a:srgbClr val="22262B"/>
-                          </a:solidFill>
-                          <a:latin typeface="Calibri"/>
-                        </a:rPr>
-                        <a:t>—  backbone gate</a:t>
-                      </a:r>
-                    </a:p>
-                  </a:txBody>
-                  <a:tcPr>
-                    <a:solidFill>
-                      <a:srgbClr val="ECEEF1"/>
-                    </a:solidFill>
-                  </a:tcPr>
-                </a:tc>
-                <a:tc>
-                  <a:txBody>
-                    <a:bodyPr/>
-                    <a:lstStyle/>
-                    <a:p>
-                      <a:r>
-                        <a:rPr sz="950">
-                          <a:solidFill>
-                            <a:srgbClr val="22262B"/>
-                          </a:solidFill>
-                          <a:latin typeface="Calibri"/>
-                        </a:rPr>
-                        <a:t>scripts/verify_backbone_alignment.py</a:t>
-                      </a:r>
-                    </a:p>
-                  </a:txBody>
-                  <a:tcPr>
-                    <a:solidFill>
-                      <a:srgbClr val="ECEEF1"/>
-                    </a:solidFill>
-                  </a:tcPr>
-                </a:tc>
-                <a:tc>
-                  <a:txBody>
-                    <a:bodyPr/>
-                    <a:lstStyle/>
-                    <a:p>
-                      <a:r>
-                        <a:rPr sz="950">
-                          <a:solidFill>
-                            <a:srgbClr val="22262B"/>
-                          </a:solidFill>
-                          <a:latin typeface="Calibri"/>
-                        </a:rPr>
-                        <a:t>built · catches a weak backbone before GPU spend</a:t>
-                      </a:r>
-                    </a:p>
-                  </a:txBody>
-                  <a:tcPr>
-                    <a:solidFill>
-                      <a:srgbClr val="ECEEF1"/>
-                    </a:solidFill>
-                  </a:tcPr>
-                </a:tc>
-              </a:tr>
-              <a:tr h="365760">
-                <a:tc>
-                  <a:txBody>
-                    <a:bodyPr/>
-                    <a:lstStyle/>
-                    <a:p>
-                      <a:r>
-                        <a:rPr sz="950">
-                          <a:solidFill>
-                            <a:srgbClr val="22262B"/>
-                          </a:solidFill>
-                          <a:latin typeface="Calibri"/>
-                        </a:rPr>
-                        <a:t>—  cluster jobs</a:t>
-                      </a:r>
-                    </a:p>
-                  </a:txBody>
-                  <a:tcPr>
-                    <a:solidFill>
-                      <a:srgbClr val="FFFFFF"/>
-                    </a:solidFill>
-                  </a:tcPr>
-                </a:tc>
-                <a:tc>
-                  <a:txBody>
-                    <a:bodyPr/>
-                    <a:lstStyle/>
-                    <a:p>
-                      <a:r>
-                        <a:rPr sz="950">
-                          <a:solidFill>
-                            <a:srgbClr val="22262B"/>
-                          </a:solidFill>
-                          <a:latin typeface="Calibri"/>
-                        </a:rPr>
-                        <a:t>slurm_extract_videollama3.sh · slurm_delta_baselines.sh</a:t>
-                      </a:r>
-                    </a:p>
-                  </a:txBody>
-                  <a:tcPr>
-                    <a:solidFill>
-                      <a:srgbClr val="FFFFFF"/>
-                    </a:solidFill>
-                  </a:tcPr>
-                </a:tc>
-                <a:tc>
-                  <a:txBody>
-                    <a:bodyPr/>
-                    <a:lstStyle/>
-                    <a:p>
-                      <a:r>
-                        <a:rPr sz="950">
-                          <a:solidFill>
-                            <a:srgbClr val="22262B"/>
-                          </a:solidFill>
-                          <a:latin typeface="Calibri"/>
-                        </a:rPr>
-                        <a:t>ready to submit</a:t>
-                      </a:r>
-                    </a:p>
-                  </a:txBody>
-                  <a:tcPr>
-                    <a:solidFill>
-                      <a:srgbClr val="FFFFFF"/>
-                    </a:solidFill>
-                  </a:tcPr>
-                </a:tc>
-              </a:tr>
-            </a:tbl>
-          </a:graphicData>
-        </a:graphic>
-      </p:graphicFrame>
+        </p:nvSpPr>
+        <p:spPr>
+          <a:xfrm>
+            <a:off x="640080" y="1600200"/>
+            <a:ext cx="10972800" cy="4937760"/>
+          </a:xfrm>
+          <a:prstGeom prst="rect">
+            <a:avLst/>
+          </a:prstGeom>
+          <a:noFill/>
+        </p:spPr>
+        <p:txBody>
+          <a:bodyPr wrap="square">
+            <a:spAutoFit/>
+          </a:bodyPr>
+          <a:lstStyle/>
+          <a:p>
+            <a:pPr>
+              <a:spcAft>
+                <a:spcPts val="600"/>
+              </a:spcAft>
+            </a:pPr>
+            <a:r>
+              <a:rPr sz="1700" b="0">
+                <a:solidFill>
+                  <a:srgbClr val="22262B"/>
+                </a:solidFill>
+                <a:latin typeface="Calibri"/>
+              </a:rPr>
+              <a:t>▸ The question is not "segmentation vs VLM" — both lose to a baseline that never looks at the video.</a:t>
+            </a:r>
+          </a:p>
+          <a:p>
+            <a:pPr>
+              <a:spcAft>
+                <a:spcPts val="600"/>
+              </a:spcAft>
+            </a:pPr>
+            <a:r>
+              <a:rPr sz="1700" b="0">
+                <a:solidFill>
+                  <a:srgbClr val="22262B"/>
+                </a:solidFill>
+                <a:latin typeface="Calibri"/>
+              </a:rPr>
+              <a:t>▸ The real question:  what evidence could localise a boundary on this dataset at all?</a:t>
+            </a:r>
+          </a:p>
+          <a:p>
+            <a:pPr>
+              <a:spcAft>
+                <a:spcPts val="600"/>
+              </a:spcAft>
+            </a:pPr>
+            <a:r>
+              <a:rPr sz="1700" b="0">
+                <a:solidFill>
+                  <a:srgbClr val="22262B"/>
+                </a:solidFill>
+                <a:latin typeface="Calibri"/>
+              </a:rPr>
+              <a:t>▸ Argument for temporal context:  every result so far uses FRAME-level evidence. A fixed camera is precisely the case where single frames should fail and video should help.</a:t>
+            </a:r>
+          </a:p>
+          <a:p>
+            <a:pPr>
+              <a:spcAft>
+                <a:spcPts val="600"/>
+              </a:spcAft>
+            </a:pPr>
+            <a:r>
+              <a:rPr sz="1700" b="0">
+                <a:solidFill>
+                  <a:srgbClr val="22262B"/>
+                </a:solidFill>
+                <a:latin typeface="Calibri"/>
+              </a:rPr>
+              <a:t>▸ → We have not yet fairly tested the VLM direction.  SigLIP2 encodes single frames; VideoLLaMA3 encodes video.  That test has not been run.</a:t>
+            </a:r>
+          </a:p>
+          <a:p>
+            <a:pPr>
+              <a:spcAft>
+                <a:spcPts val="600"/>
+              </a:spcAft>
+            </a:pPr>
+            <a:r>
+              <a:rPr sz="1700" b="0">
+                <a:solidFill>
+                  <a:srgbClr val="22262B"/>
+                </a:solidFill>
+                <a:latin typeface="Calibri"/>
+              </a:rPr>
+              <a:t>▸ Caveat, stated plainly:  the segmentation probe is a compact reimplementation (no boundary detector, minutes of training).  It is evidence about the paradigm, NOT a reproduction of HAL — which never ran 50Salads.</a:t>
+            </a:r>
+          </a:p>
+        </p:txBody>
+      </p:sp>
     </p:spTree>
   </p:cSld>
   <p:clrMapOvr>
@@ -7520,7 +7085,7 @@
                 </a:solidFill>
                 <a:latin typeface="Calibri"/>
               </a:rPr>
-              <a:t>What I need from you</a:t>
+              <a:t>What is built and tested</a:t>
             </a:r>
           </a:p>
           <a:p>
@@ -7531,7 +7096,7 @@
                 </a:solidFill>
                 <a:latin typeface="Calibri"/>
               </a:rPr>
-              <a:t>access first, then the direction call</a:t>
+              <a:t>67 unit tests pass.  These verify the code is correct on synthetic data — they do NOT show the method works.</a:t>
             </a:r>
           </a:p>
         </p:txBody>
@@ -7579,6 +7144,691 @@
           </a:p>
         </p:txBody>
       </p:sp>
+      <p:graphicFrame>
+        <p:nvGraphicFramePr>
+          <p:cNvPr id="4" name="Table 3"/>
+          <p:cNvGraphicFramePr>
+            <a:graphicFrameLocks noGrp="1"/>
+          </p:cNvGraphicFramePr>
+          <p:nvPr/>
+        </p:nvGraphicFramePr>
+        <p:xfrm>
+          <a:off x="548640" y="1645920"/>
+          <a:ext cx="10515600" cy="2926080"/>
+        </p:xfrm>
+        <a:graphic>
+          <a:graphicData uri="http://schemas.openxmlformats.org/drawingml/2006/table">
+            <a:tbl>
+              <a:tblPr firstRow="1" bandRow="1">
+                <a:tableStyleId>{5C22544A-7EE6-4342-B048-85BDC9FD1C3A}</a:tableStyleId>
+              </a:tblPr>
+              <a:tblGrid>
+                <a:gridCol w="2651760"/>
+                <a:gridCol w="5120640"/>
+                <a:gridCol w="2743200"/>
+              </a:tblGrid>
+              <a:tr h="365760">
+                <a:tc>
+                  <a:txBody>
+                    <a:bodyPr/>
+                    <a:lstStyle/>
+                    <a:p>
+                      <a:r>
+                        <a:rPr sz="1050" b="1">
+                          <a:solidFill>
+                            <a:srgbClr val="FFFFFF"/>
+                          </a:solidFill>
+                          <a:latin typeface="Calibri"/>
+                        </a:rPr>
+                        <a:t>Stage</a:t>
+                      </a:r>
+                    </a:p>
+                  </a:txBody>
+                  <a:tcPr>
+                    <a:solidFill>
+                      <a:srgbClr val="1F3A5F"/>
+                    </a:solidFill>
+                  </a:tcPr>
+                </a:tc>
+                <a:tc>
+                  <a:txBody>
+                    <a:bodyPr/>
+                    <a:lstStyle/>
+                    <a:p>
+                      <a:r>
+                        <a:rPr sz="1050" b="1">
+                          <a:solidFill>
+                            <a:srgbClr val="FFFFFF"/>
+                          </a:solidFill>
+                          <a:latin typeface="Calibri"/>
+                        </a:rPr>
+                        <a:t>Module</a:t>
+                      </a:r>
+                    </a:p>
+                  </a:txBody>
+                  <a:tcPr>
+                    <a:solidFill>
+                      <a:srgbClr val="1F3A5F"/>
+                    </a:solidFill>
+                  </a:tcPr>
+                </a:tc>
+                <a:tc>
+                  <a:txBody>
+                    <a:bodyPr/>
+                    <a:lstStyle/>
+                    <a:p>
+                      <a:r>
+                        <a:rPr sz="1050" b="1">
+                          <a:solidFill>
+                            <a:srgbClr val="FFFFFF"/>
+                          </a:solidFill>
+                          <a:latin typeface="Calibri"/>
+                        </a:rPr>
+                        <a:t>Status</a:t>
+                      </a:r>
+                    </a:p>
+                  </a:txBody>
+                  <a:tcPr>
+                    <a:solidFill>
+                      <a:srgbClr val="1F3A5F"/>
+                    </a:solidFill>
+                  </a:tcPr>
+                </a:tc>
+              </a:tr>
+              <a:tr h="365760">
+                <a:tc>
+                  <a:txBody>
+                    <a:bodyPr/>
+                    <a:lstStyle/>
+                    <a:p>
+                      <a:r>
+                        <a:rPr sz="950">
+                          <a:solidFill>
+                            <a:srgbClr val="22262B"/>
+                          </a:solidFill>
+                          <a:latin typeface="Calibri"/>
+                        </a:rPr>
+                        <a:t>0  semantic-guided sampling</a:t>
+                      </a:r>
+                    </a:p>
+                  </a:txBody>
+                  <a:tcPr>
+                    <a:solidFill>
+                      <a:srgbClr val="FFFFFF"/>
+                    </a:solidFill>
+                  </a:tcPr>
+                </a:tc>
+                <a:tc>
+                  <a:txBody>
+                    <a:bodyPr/>
+                    <a:lstStyle/>
+                    <a:p>
+                      <a:r>
+                        <a:rPr sz="950">
+                          <a:solidFill>
+                            <a:srgbClr val="22262B"/>
+                          </a:solidFill>
+                          <a:latin typeface="Calibri"/>
+                        </a:rPr>
+                        <a:t>delta.features.sampling  (+ extract --adaptive)</a:t>
+                      </a:r>
+                    </a:p>
+                  </a:txBody>
+                  <a:tcPr>
+                    <a:solidFill>
+                      <a:srgbClr val="FFFFFF"/>
+                    </a:solidFill>
+                  </a:tcPr>
+                </a:tc>
+                <a:tc>
+                  <a:txBody>
+                    <a:bodyPr/>
+                    <a:lstStyle/>
+                    <a:p>
+                      <a:r>
+                        <a:rPr sz="950">
+                          <a:solidFill>
+                            <a:srgbClr val="22262B"/>
+                          </a:solidFill>
+                          <a:latin typeface="Calibri"/>
+                        </a:rPr>
+                        <a:t>built · 7 tests</a:t>
+                      </a:r>
+                    </a:p>
+                  </a:txBody>
+                  <a:tcPr>
+                    <a:solidFill>
+                      <a:srgbClr val="FFFFFF"/>
+                    </a:solidFill>
+                  </a:tcPr>
+                </a:tc>
+              </a:tr>
+              <a:tr h="365760">
+                <a:tc>
+                  <a:txBody>
+                    <a:bodyPr/>
+                    <a:lstStyle/>
+                    <a:p>
+                      <a:r>
+                        <a:rPr sz="950">
+                          <a:solidFill>
+                            <a:srgbClr val="22262B"/>
+                          </a:solidFill>
+                          <a:latin typeface="Calibri"/>
+                        </a:rPr>
+                        <a:t>1  clip ↔ action similarity</a:t>
+                      </a:r>
+                    </a:p>
+                  </a:txBody>
+                  <a:tcPr>
+                    <a:solidFill>
+                      <a:srgbClr val="ECEEF1"/>
+                    </a:solidFill>
+                  </a:tcPr>
+                </a:tc>
+                <a:tc>
+                  <a:txBody>
+                    <a:bodyPr/>
+                    <a:lstStyle/>
+                    <a:p>
+                      <a:r>
+                        <a:rPr sz="950">
+                          <a:solidFill>
+                            <a:srgbClr val="22262B"/>
+                          </a:solidFill>
+                          <a:latin typeface="Calibri"/>
+                        </a:rPr>
+                        <a:t>delta.align.similarity / cost</a:t>
+                      </a:r>
+                    </a:p>
+                  </a:txBody>
+                  <a:tcPr>
+                    <a:solidFill>
+                      <a:srgbClr val="ECEEF1"/>
+                    </a:solidFill>
+                  </a:tcPr>
+                </a:tc>
+                <a:tc>
+                  <a:txBody>
+                    <a:bodyPr/>
+                    <a:lstStyle/>
+                    <a:p>
+                      <a:r>
+                        <a:rPr sz="950">
+                          <a:solidFill>
+                            <a:srgbClr val="22262B"/>
+                          </a:solidFill>
+                          <a:latin typeface="Calibri"/>
+                        </a:rPr>
+                        <a:t>built</a:t>
+                      </a:r>
+                    </a:p>
+                  </a:txBody>
+                  <a:tcPr>
+                    <a:solidFill>
+                      <a:srgbClr val="ECEEF1"/>
+                    </a:solidFill>
+                  </a:tcPr>
+                </a:tc>
+              </a:tr>
+              <a:tr h="365760">
+                <a:tc>
+                  <a:txBody>
+                    <a:bodyPr/>
+                    <a:lstStyle/>
+                    <a:p>
+                      <a:r>
+                        <a:rPr sz="950">
+                          <a:solidFill>
+                            <a:srgbClr val="22262B"/>
+                          </a:solidFill>
+                          <a:latin typeface="Calibri"/>
+                        </a:rPr>
+                        <a:t>2  coarse ordered decode</a:t>
+                      </a:r>
+                    </a:p>
+                  </a:txBody>
+                  <a:tcPr>
+                    <a:solidFill>
+                      <a:srgbClr val="FFFFFF"/>
+                    </a:solidFill>
+                  </a:tcPr>
+                </a:tc>
+                <a:tc>
+                  <a:txBody>
+                    <a:bodyPr/>
+                    <a:lstStyle/>
+                    <a:p>
+                      <a:r>
+                        <a:rPr sz="950">
+                          <a:solidFill>
+                            <a:srgbClr val="22262B"/>
+                          </a:solidFill>
+                          <a:latin typeface="Calibri"/>
+                        </a:rPr>
+                        <a:t>delta.align.asot  (OT + transcript-order prior)</a:t>
+                      </a:r>
+                    </a:p>
+                  </a:txBody>
+                  <a:tcPr>
+                    <a:solidFill>
+                      <a:srgbClr val="FFFFFF"/>
+                    </a:solidFill>
+                  </a:tcPr>
+                </a:tc>
+                <a:tc>
+                  <a:txBody>
+                    <a:bodyPr/>
+                    <a:lstStyle/>
+                    <a:p>
+                      <a:r>
+                        <a:rPr sz="950">
+                          <a:solidFill>
+                            <a:srgbClr val="22262B"/>
+                          </a:solidFill>
+                          <a:latin typeface="Calibri"/>
+                        </a:rPr>
+                        <a:t>built · 8 tests</a:t>
+                      </a:r>
+                    </a:p>
+                  </a:txBody>
+                  <a:tcPr>
+                    <a:solidFill>
+                      <a:srgbClr val="FFFFFF"/>
+                    </a:solidFill>
+                  </a:tcPr>
+                </a:tc>
+              </a:tr>
+              <a:tr h="365760">
+                <a:tc>
+                  <a:txBody>
+                    <a:bodyPr/>
+                    <a:lstStyle/>
+                    <a:p>
+                      <a:r>
+                        <a:rPr sz="950">
+                          <a:solidFill>
+                            <a:srgbClr val="22262B"/>
+                          </a:solidFill>
+                          <a:latin typeface="Calibri"/>
+                        </a:rPr>
+                        <a:t>3  local boundary search</a:t>
+                      </a:r>
+                    </a:p>
+                  </a:txBody>
+                  <a:tcPr>
+                    <a:solidFill>
+                      <a:srgbClr val="ECEEF1"/>
+                    </a:solidFill>
+                  </a:tcPr>
+                </a:tc>
+                <a:tc>
+                  <a:txBody>
+                    <a:bodyPr/>
+                    <a:lstStyle/>
+                    <a:p>
+                      <a:r>
+                        <a:rPr sz="950">
+                          <a:solidFill>
+                            <a:srgbClr val="22262B"/>
+                          </a:solidFill>
+                          <a:latin typeface="Calibri"/>
+                        </a:rPr>
+                        <a:t>delta.align.refine  — the novel piece</a:t>
+                      </a:r>
+                    </a:p>
+                  </a:txBody>
+                  <a:tcPr>
+                    <a:solidFill>
+                      <a:srgbClr val="ECEEF1"/>
+                    </a:solidFill>
+                  </a:tcPr>
+                </a:tc>
+                <a:tc>
+                  <a:txBody>
+                    <a:bodyPr/>
+                    <a:lstStyle/>
+                    <a:p>
+                      <a:r>
+                        <a:rPr sz="950">
+                          <a:solidFill>
+                            <a:srgbClr val="22262B"/>
+                          </a:solidFill>
+                          <a:latin typeface="Calibri"/>
+                        </a:rPr>
+                        <a:t>built · 6 tests</a:t>
+                      </a:r>
+                    </a:p>
+                  </a:txBody>
+                  <a:tcPr>
+                    <a:solidFill>
+                      <a:srgbClr val="ECEEF1"/>
+                    </a:solidFill>
+                  </a:tcPr>
+                </a:tc>
+              </a:tr>
+              <a:tr h="365760">
+                <a:tc>
+                  <a:txBody>
+                    <a:bodyPr/>
+                    <a:lstStyle/>
+                    <a:p>
+                      <a:r>
+                        <a:rPr sz="950">
+                          <a:solidFill>
+                            <a:srgbClr val="22262B"/>
+                          </a:solidFill>
+                          <a:latin typeface="Calibri"/>
+                        </a:rPr>
+                        <a:t>4  contrastive refinement</a:t>
+                      </a:r>
+                    </a:p>
+                  </a:txBody>
+                  <a:tcPr>
+                    <a:solidFill>
+                      <a:srgbClr val="FFFFFF"/>
+                    </a:solidFill>
+                  </a:tcPr>
+                </a:tc>
+                <a:tc>
+                  <a:txBody>
+                    <a:bodyPr/>
+                    <a:lstStyle/>
+                    <a:p>
+                      <a:r>
+                        <a:rPr sz="950">
+                          <a:solidFill>
+                            <a:srgbClr val="22262B"/>
+                          </a:solidFill>
+                          <a:latin typeface="Calibri"/>
+                        </a:rPr>
+                        <a:t>delta.align.cbd (PBCR) + masra_torch (LRCA/ESTA)</a:t>
+                      </a:r>
+                    </a:p>
+                  </a:txBody>
+                  <a:tcPr>
+                    <a:solidFill>
+                      <a:srgbClr val="FFFFFF"/>
+                    </a:solidFill>
+                  </a:tcPr>
+                </a:tc>
+                <a:tc>
+                  <a:txBody>
+                    <a:bodyPr/>
+                    <a:lstStyle/>
+                    <a:p>
+                      <a:r>
+                        <a:rPr sz="950">
+                          <a:solidFill>
+                            <a:srgbClr val="22262B"/>
+                          </a:solidFill>
+                          <a:latin typeface="Calibri"/>
+                        </a:rPr>
+                        <a:t>built · 15 tests</a:t>
+                      </a:r>
+                    </a:p>
+                  </a:txBody>
+                  <a:tcPr>
+                    <a:solidFill>
+                      <a:srgbClr val="FFFFFF"/>
+                    </a:solidFill>
+                  </a:tcPr>
+                </a:tc>
+              </a:tr>
+              <a:tr h="365760">
+                <a:tc>
+                  <a:txBody>
+                    <a:bodyPr/>
+                    <a:lstStyle/>
+                    <a:p>
+                      <a:r>
+                        <a:rPr sz="950">
+                          <a:solidFill>
+                            <a:srgbClr val="22262B"/>
+                          </a:solidFill>
+                          <a:latin typeface="Calibri"/>
+                        </a:rPr>
+                        <a:t>—  backbone gate</a:t>
+                      </a:r>
+                    </a:p>
+                  </a:txBody>
+                  <a:tcPr>
+                    <a:solidFill>
+                      <a:srgbClr val="ECEEF1"/>
+                    </a:solidFill>
+                  </a:tcPr>
+                </a:tc>
+                <a:tc>
+                  <a:txBody>
+                    <a:bodyPr/>
+                    <a:lstStyle/>
+                    <a:p>
+                      <a:r>
+                        <a:rPr sz="950">
+                          <a:solidFill>
+                            <a:srgbClr val="22262B"/>
+                          </a:solidFill>
+                          <a:latin typeface="Calibri"/>
+                        </a:rPr>
+                        <a:t>scripts/verify_backbone_alignment.py</a:t>
+                      </a:r>
+                    </a:p>
+                  </a:txBody>
+                  <a:tcPr>
+                    <a:solidFill>
+                      <a:srgbClr val="ECEEF1"/>
+                    </a:solidFill>
+                  </a:tcPr>
+                </a:tc>
+                <a:tc>
+                  <a:txBody>
+                    <a:bodyPr/>
+                    <a:lstStyle/>
+                    <a:p>
+                      <a:r>
+                        <a:rPr sz="950">
+                          <a:solidFill>
+                            <a:srgbClr val="22262B"/>
+                          </a:solidFill>
+                          <a:latin typeface="Calibri"/>
+                        </a:rPr>
+                        <a:t>built · catches a weak backbone before GPU spend</a:t>
+                      </a:r>
+                    </a:p>
+                  </a:txBody>
+                  <a:tcPr>
+                    <a:solidFill>
+                      <a:srgbClr val="ECEEF1"/>
+                    </a:solidFill>
+                  </a:tcPr>
+                </a:tc>
+              </a:tr>
+              <a:tr h="365760">
+                <a:tc>
+                  <a:txBody>
+                    <a:bodyPr/>
+                    <a:lstStyle/>
+                    <a:p>
+                      <a:r>
+                        <a:rPr sz="950">
+                          <a:solidFill>
+                            <a:srgbClr val="22262B"/>
+                          </a:solidFill>
+                          <a:latin typeface="Calibri"/>
+                        </a:rPr>
+                        <a:t>—  cluster jobs</a:t>
+                      </a:r>
+                    </a:p>
+                  </a:txBody>
+                  <a:tcPr>
+                    <a:solidFill>
+                      <a:srgbClr val="FFFFFF"/>
+                    </a:solidFill>
+                  </a:tcPr>
+                </a:tc>
+                <a:tc>
+                  <a:txBody>
+                    <a:bodyPr/>
+                    <a:lstStyle/>
+                    <a:p>
+                      <a:r>
+                        <a:rPr sz="950">
+                          <a:solidFill>
+                            <a:srgbClr val="22262B"/>
+                          </a:solidFill>
+                          <a:latin typeface="Calibri"/>
+                        </a:rPr>
+                        <a:t>slurm_extract_videollama3.sh · slurm_delta_baselines.sh</a:t>
+                      </a:r>
+                    </a:p>
+                  </a:txBody>
+                  <a:tcPr>
+                    <a:solidFill>
+                      <a:srgbClr val="FFFFFF"/>
+                    </a:solidFill>
+                  </a:tcPr>
+                </a:tc>
+                <a:tc>
+                  <a:txBody>
+                    <a:bodyPr/>
+                    <a:lstStyle/>
+                    <a:p>
+                      <a:r>
+                        <a:rPr sz="950">
+                          <a:solidFill>
+                            <a:srgbClr val="22262B"/>
+                          </a:solidFill>
+                          <a:latin typeface="Calibri"/>
+                        </a:rPr>
+                        <a:t>ready to submit</a:t>
+                      </a:r>
+                    </a:p>
+                  </a:txBody>
+                  <a:tcPr>
+                    <a:solidFill>
+                      <a:srgbClr val="FFFFFF"/>
+                    </a:solidFill>
+                  </a:tcPr>
+                </a:tc>
+              </a:tr>
+            </a:tbl>
+          </a:graphicData>
+        </a:graphic>
+      </p:graphicFrame>
+    </p:spTree>
+  </p:cSld>
+  <p:clrMapOvr>
+    <a:masterClrMapping/>
+  </p:clrMapOvr>
+</p:sld>
+</file>
+
+<file path=ppt/slides/slide21.xml><?xml version="1.0" encoding="utf-8"?>
+<p:sld xmlns:a="http://schemas.openxmlformats.org/drawingml/2006/main" xmlns:p="http://schemas.openxmlformats.org/presentationml/2006/main" xmlns:r="http://schemas.openxmlformats.org/officeDocument/2006/relationships">
+  <p:cSld>
+    <p:bg>
+      <p:bgPr>
+        <a:solidFill>
+          <a:srgbClr val="FFFFFF"/>
+        </a:solidFill>
+        <a:effectLst/>
+      </p:bgPr>
+    </p:bg>
+    <p:spTree>
+      <p:nvGrpSpPr>
+        <p:cNvPr id="1" name=""/>
+        <p:cNvGrpSpPr/>
+        <p:nvPr/>
+      </p:nvGrpSpPr>
+      <p:grpSpPr/>
+      <p:sp>
+        <p:nvSpPr>
+          <p:cNvPr id="2" name="TextBox 1"/>
+          <p:cNvSpPr txBox="1"/>
+          <p:nvPr/>
+        </p:nvSpPr>
+        <p:spPr>
+          <a:xfrm>
+            <a:off x="502920" y="320040"/>
+            <a:ext cx="11155680" cy="868680"/>
+          </a:xfrm>
+          <a:prstGeom prst="rect">
+            <a:avLst/>
+          </a:prstGeom>
+          <a:noFill/>
+        </p:spPr>
+        <p:txBody>
+          <a:bodyPr wrap="square">
+            <a:spAutoFit/>
+          </a:bodyPr>
+          <a:lstStyle/>
+          <a:p>
+            <a:r>
+              <a:rPr sz="3000" b="1">
+                <a:solidFill>
+                  <a:srgbClr val="1F3A5F"/>
+                </a:solidFill>
+                <a:latin typeface="Calibri"/>
+              </a:rPr>
+              <a:t>What I need from you</a:t>
+            </a:r>
+          </a:p>
+          <a:p>
+            <a:r>
+              <a:rPr sz="1400">
+                <a:solidFill>
+                  <a:srgbClr val="5B6470"/>
+                </a:solidFill>
+                <a:latin typeface="Calibri"/>
+              </a:rPr>
+              <a:t>access first, then the direction call</a:t>
+            </a:r>
+          </a:p>
+        </p:txBody>
+      </p:sp>
+      <p:sp>
+        <p:nvSpPr>
+          <p:cNvPr id="3" name="Rectangle 2"/>
+          <p:cNvSpPr/>
+          <p:nvPr/>
+        </p:nvSpPr>
+        <p:spPr>
+          <a:xfrm>
+            <a:off x="502920" y="1325880"/>
+            <a:ext cx="11155680" cy="25400"/>
+          </a:xfrm>
+          <a:prstGeom prst="rect">
+            <a:avLst/>
+          </a:prstGeom>
+          <a:solidFill>
+            <a:srgbClr val="1F6F4D"/>
+          </a:solidFill>
+          <a:ln>
+            <a:noFill/>
+          </a:ln>
+        </p:spPr>
+        <p:style>
+          <a:lnRef idx="1">
+            <a:schemeClr val="accent1"/>
+          </a:lnRef>
+          <a:fillRef idx="3">
+            <a:schemeClr val="accent1"/>
+          </a:fillRef>
+          <a:effectRef idx="2">
+            <a:schemeClr val="accent1"/>
+          </a:effectRef>
+          <a:fontRef idx="minor">
+            <a:schemeClr val="lt1"/>
+          </a:fontRef>
+        </p:style>
+        <p:txBody>
+          <a:bodyPr rtlCol="0" anchor="ctr"/>
+          <a:lstStyle/>
+          <a:p>
+            <a:pPr algn="ctr"/>
+          </a:p>
+        </p:txBody>
+      </p:sp>
       <p:sp>
         <p:nvSpPr>
           <p:cNvPr id="4" name="TextBox 3"/>
@@ -7722,7 +7972,7 @@
 </p:sld>
 </file>
 
-<file path=ppt/slides/slide21.xml><?xml version="1.0" encoding="utf-8"?>
+<file path=ppt/slides/slide22.xml><?xml version="1.0" encoding="utf-8"?>
 <p:sld xmlns:a="http://schemas.openxmlformats.org/drawingml/2006/main" xmlns:p="http://schemas.openxmlformats.org/presentationml/2006/main" xmlns:r="http://schemas.openxmlformats.org/officeDocument/2006/relationships">
   <p:cSld>
     <p:bg>
@@ -8356,7 +8606,7 @@
                 </a:solidFill>
                 <a:latin typeface="Calibri"/>
               </a:rPr>
-              <a:t>What's built — the repository</a:t>
+              <a:t>Architecture — the hybrid pipeline</a:t>
             </a:r>
           </a:p>
           <a:p>
@@ -8367,7 +8617,7 @@
                 </a:solidFill>
                 <a:latin typeface="Calibri"/>
               </a:rPr>
-              <a:t>github.com/epayaslii/DELTA  ·  Python 3.11 / uv</a:t>
+              <a:t>each stage's paper source is named underneath it; dashed = optional fallback</a:t>
             </a:r>
           </a:p>
         </p:txBody>
@@ -8415,509 +8665,1065 @@
           </a:p>
         </p:txBody>
       </p:sp>
-      <p:graphicFrame>
-        <p:nvGraphicFramePr>
-          <p:cNvPr id="4" name="Table 3"/>
-          <p:cNvGraphicFramePr>
-            <a:graphicFrameLocks noGrp="1"/>
-          </p:cNvGraphicFramePr>
+      <p:sp>
+        <p:nvSpPr>
+          <p:cNvPr id="4" name="Rounded Rectangle 3"/>
+          <p:cNvSpPr/>
           <p:nvPr/>
-        </p:nvGraphicFramePr>
-        <p:xfrm>
-          <a:off x="548640" y="1645920"/>
-          <a:ext cx="11064240" cy="2560320"/>
-        </p:xfrm>
-        <a:graphic>
-          <a:graphicData uri="http://schemas.openxmlformats.org/drawingml/2006/table">
-            <a:tbl>
-              <a:tblPr firstRow="1" bandRow="1">
-                <a:tableStyleId>{5C22544A-7EE6-4342-B048-85BDC9FD1C3A}</a:tableStyleId>
-              </a:tblPr>
-              <a:tblGrid>
-                <a:gridCol w="1920240"/>
-                <a:gridCol w="7315200"/>
-                <a:gridCol w="1828800"/>
-              </a:tblGrid>
-              <a:tr h="365760">
-                <a:tc>
-                  <a:txBody>
-                    <a:bodyPr/>
-                    <a:lstStyle/>
-                    <a:p>
-                      <a:r>
-                        <a:rPr sz="1200" b="1">
-                          <a:solidFill>
-                            <a:srgbClr val="FFFFFF"/>
-                          </a:solidFill>
-                          <a:latin typeface="Calibri"/>
-                        </a:rPr>
-                        <a:t>Module</a:t>
-                      </a:r>
-                    </a:p>
-                  </a:txBody>
-                  <a:tcPr>
-                    <a:solidFill>
-                      <a:srgbClr val="1F3A5F"/>
-                    </a:solidFill>
-                  </a:tcPr>
-                </a:tc>
-                <a:tc>
-                  <a:txBody>
-                    <a:bodyPr/>
-                    <a:lstStyle/>
-                    <a:p>
-                      <a:r>
-                        <a:rPr sz="1200" b="1">
-                          <a:solidFill>
-                            <a:srgbClr val="FFFFFF"/>
-                          </a:solidFill>
-                          <a:latin typeface="Calibri"/>
-                        </a:rPr>
-                        <a:t>What it does</a:t>
-                      </a:r>
-                    </a:p>
-                  </a:txBody>
-                  <a:tcPr>
-                    <a:solidFill>
-                      <a:srgbClr val="1F3A5F"/>
-                    </a:solidFill>
-                  </a:tcPr>
-                </a:tc>
-                <a:tc>
-                  <a:txBody>
-                    <a:bodyPr/>
-                    <a:lstStyle/>
-                    <a:p>
-                      <a:r>
-                        <a:rPr sz="1200" b="1">
-                          <a:solidFill>
-                            <a:srgbClr val="FFFFFF"/>
-                          </a:solidFill>
-                          <a:latin typeface="Calibri"/>
-                        </a:rPr>
-                        <a:t>Status</a:t>
-                      </a:r>
-                    </a:p>
-                  </a:txBody>
-                  <a:tcPr>
-                    <a:solidFill>
-                      <a:srgbClr val="1F3A5F"/>
-                    </a:solidFill>
-                  </a:tcPr>
-                </a:tc>
-              </a:tr>
-              <a:tr h="365760">
-                <a:tc>
-                  <a:txBody>
-                    <a:bodyPr/>
-                    <a:lstStyle/>
-                    <a:p>
-                      <a:r>
-                        <a:rPr sz="1100">
-                          <a:solidFill>
-                            <a:srgbClr val="22262B"/>
-                          </a:solidFill>
-                          <a:latin typeface="Calibri"/>
-                        </a:rPr>
-                        <a:t>delta.data</a:t>
-                      </a:r>
-                    </a:p>
-                  </a:txBody>
-                  <a:tcPr>
-                    <a:solidFill>
-                      <a:srgbClr val="FFFFFF"/>
-                    </a:solidFill>
-                  </a:tcPr>
-                </a:tc>
-                <a:tc>
-                  <a:txBody>
-                    <a:bodyPr/>
-                    <a:lstStyle/>
-                    <a:p>
-                      <a:r>
-                        <a:rPr sz="1100">
-                          <a:solidFill>
-                            <a:srgbClr val="22262B"/>
-                          </a:solidFill>
-                          <a:latin typeface="Calibri"/>
-                        </a:rPr>
-                        <a:t>50Salads / Breakfast conventions, transcripts, splits, dataset stats</a:t>
-                      </a:r>
-                    </a:p>
-                  </a:txBody>
-                  <a:tcPr>
-                    <a:solidFill>
-                      <a:srgbClr val="FFFFFF"/>
-                    </a:solidFill>
-                  </a:tcPr>
-                </a:tc>
-                <a:tc>
-                  <a:txBody>
-                    <a:bodyPr/>
-                    <a:lstStyle/>
-                    <a:p>
-                      <a:r>
-                        <a:rPr sz="1100">
-                          <a:solidFill>
-                            <a:srgbClr val="22262B"/>
-                          </a:solidFill>
-                          <a:latin typeface="Calibri"/>
-                        </a:rPr>
-                        <a:t>done + tests</a:t>
-                      </a:r>
-                    </a:p>
-                  </a:txBody>
-                  <a:tcPr>
-                    <a:solidFill>
-                      <a:srgbClr val="FFFFFF"/>
-                    </a:solidFill>
-                  </a:tcPr>
-                </a:tc>
-              </a:tr>
-              <a:tr h="365760">
-                <a:tc>
-                  <a:txBody>
-                    <a:bodyPr/>
-                    <a:lstStyle/>
-                    <a:p>
-                      <a:r>
-                        <a:rPr sz="1100">
-                          <a:solidFill>
-                            <a:srgbClr val="22262B"/>
-                          </a:solidFill>
-                          <a:latin typeface="Calibri"/>
-                        </a:rPr>
-                        <a:t>delta.features</a:t>
-                      </a:r>
-                    </a:p>
-                  </a:txBody>
-                  <a:tcPr>
-                    <a:solidFill>
-                      <a:srgbClr val="ECEEF1"/>
-                    </a:solidFill>
-                  </a:tcPr>
-                </a:tc>
-                <a:tc>
-                  <a:txBody>
-                    <a:bodyPr/>
-                    <a:lstStyle/>
-                    <a:p>
-                      <a:r>
-                        <a:rPr sz="1100">
-                          <a:solidFill>
-                            <a:srgbClr val="22262B"/>
-                          </a:solidFill>
-                          <a:latin typeface="Calibri"/>
-                        </a:rPr>
-                        <a:t>Frozen VLM feature extraction — VideoLLaMA3 / SigLIP2 / DINOv2 backbones, text encoder, extraction CLI</a:t>
-                      </a:r>
-                    </a:p>
-                  </a:txBody>
-                  <a:tcPr>
-                    <a:solidFill>
-                      <a:srgbClr val="ECEEF1"/>
-                    </a:solidFill>
-                  </a:tcPr>
-                </a:tc>
-                <a:tc>
-                  <a:txBody>
-                    <a:bodyPr/>
-                    <a:lstStyle/>
-                    <a:p>
-                      <a:r>
-                        <a:rPr sz="1100">
-                          <a:solidFill>
-                            <a:srgbClr val="22262B"/>
-                          </a:solidFill>
-                          <a:latin typeface="Calibri"/>
-                        </a:rPr>
-                        <a:t>done (untested on video)</a:t>
-                      </a:r>
-                    </a:p>
-                  </a:txBody>
-                  <a:tcPr>
-                    <a:solidFill>
-                      <a:srgbClr val="ECEEF1"/>
-                    </a:solidFill>
-                  </a:tcPr>
-                </a:tc>
-              </a:tr>
-              <a:tr h="365760">
-                <a:tc>
-                  <a:txBody>
-                    <a:bodyPr/>
-                    <a:lstStyle/>
-                    <a:p>
-                      <a:r>
-                        <a:rPr sz="1100">
-                          <a:solidFill>
-                            <a:srgbClr val="22262B"/>
-                          </a:solidFill>
-                          <a:latin typeface="Calibri"/>
-                        </a:rPr>
-                        <a:t>delta.align</a:t>
-                      </a:r>
-                    </a:p>
-                  </a:txBody>
-                  <a:tcPr>
-                    <a:solidFill>
-                      <a:srgbClr val="FFFFFF"/>
-                    </a:solidFill>
-                  </a:tcPr>
-                </a:tc>
-                <a:tc>
-                  <a:txBody>
-                    <a:bodyPr/>
-                    <a:lstStyle/>
-                    <a:p>
-                      <a:r>
-                        <a:rPr sz="1100">
-                          <a:solidFill>
-                            <a:srgbClr val="22262B"/>
-                          </a:solidFill>
-                          <a:latin typeface="Calibri"/>
-                        </a:rPr>
-                        <a:t>similarity matrix · order-preserving DP + soft alignment · segmentation/alignment metrics</a:t>
-                      </a:r>
-                    </a:p>
-                  </a:txBody>
-                  <a:tcPr>
-                    <a:solidFill>
-                      <a:srgbClr val="FFFFFF"/>
-                    </a:solidFill>
-                  </a:tcPr>
-                </a:tc>
-                <a:tc>
-                  <a:txBody>
-                    <a:bodyPr/>
-                    <a:lstStyle/>
-                    <a:p>
-                      <a:r>
-                        <a:rPr sz="1100">
-                          <a:solidFill>
-                            <a:srgbClr val="22262B"/>
-                          </a:solidFill>
-                          <a:latin typeface="Calibri"/>
-                        </a:rPr>
-                        <a:t>done + tests</a:t>
-                      </a:r>
-                    </a:p>
-                  </a:txBody>
-                  <a:tcPr>
-                    <a:solidFill>
-                      <a:srgbClr val="FFFFFF"/>
-                    </a:solidFill>
-                  </a:tcPr>
-                </a:tc>
-              </a:tr>
-              <a:tr h="365760">
-                <a:tc>
-                  <a:txBody>
-                    <a:bodyPr/>
-                    <a:lstStyle/>
-                    <a:p>
-                      <a:r>
-                        <a:rPr sz="1100">
-                          <a:solidFill>
-                            <a:srgbClr val="22262B"/>
-                          </a:solidFill>
-                          <a:latin typeface="Calibri"/>
-                        </a:rPr>
-                        <a:t>delta.viz</a:t>
-                      </a:r>
-                    </a:p>
-                  </a:txBody>
-                  <a:tcPr>
-                    <a:solidFill>
-                      <a:srgbClr val="ECEEF1"/>
-                    </a:solidFill>
-                  </a:tcPr>
-                </a:tc>
-                <a:tc>
-                  <a:txBody>
-                    <a:bodyPr/>
-                    <a:lstStyle/>
-                    <a:p>
-                      <a:r>
-                        <a:rPr sz="1100">
-                          <a:solidFill>
-                            <a:srgbClr val="22262B"/>
-                          </a:solidFill>
-                          <a:latin typeface="Calibri"/>
-                        </a:rPr>
-                        <a:t>segmentation-timeline plotting (GT vs pseudo-labels vs prediction)</a:t>
-                      </a:r>
-                    </a:p>
-                  </a:txBody>
-                  <a:tcPr>
-                    <a:solidFill>
-                      <a:srgbClr val="ECEEF1"/>
-                    </a:solidFill>
-                  </a:tcPr>
-                </a:tc>
-                <a:tc>
-                  <a:txBody>
-                    <a:bodyPr/>
-                    <a:lstStyle/>
-                    <a:p>
-                      <a:r>
-                        <a:rPr sz="1100">
-                          <a:solidFill>
-                            <a:srgbClr val="22262B"/>
-                          </a:solidFill>
-                          <a:latin typeface="Calibri"/>
-                        </a:rPr>
-                        <a:t>done</a:t>
-                      </a:r>
-                    </a:p>
-                  </a:txBody>
-                  <a:tcPr>
-                    <a:solidFill>
-                      <a:srgbClr val="ECEEF1"/>
-                    </a:solidFill>
-                  </a:tcPr>
-                </a:tc>
-              </a:tr>
-              <a:tr h="365760">
-                <a:tc>
-                  <a:txBody>
-                    <a:bodyPr/>
-                    <a:lstStyle/>
-                    <a:p>
-                      <a:r>
-                        <a:rPr sz="1100">
-                          <a:solidFill>
-                            <a:srgbClr val="22262B"/>
-                          </a:solidFill>
-                          <a:latin typeface="Calibri"/>
-                        </a:rPr>
-                        <a:t>docs/</a:t>
-                      </a:r>
-                    </a:p>
-                  </a:txBody>
-                  <a:tcPr>
-                    <a:solidFill>
-                      <a:srgbClr val="FFFFFF"/>
-                    </a:solidFill>
-                  </a:tcPr>
-                </a:tc>
-                <a:tc>
-                  <a:txBody>
-                    <a:bodyPr/>
-                    <a:lstStyle/>
-                    <a:p>
-                      <a:r>
-                        <a:rPr sz="1100">
-                          <a:solidFill>
-                            <a:srgbClr val="22262B"/>
-                          </a:solidFill>
-                          <a:latin typeface="Calibri"/>
-                        </a:rPr>
-                        <a:t>TA reference · 50Salads analysis · DELTA-code deep-read (loss assembly, VLM plug-in points) · HAL &amp; CVA baselines · approach + lit review</a:t>
-                      </a:r>
-                    </a:p>
-                  </a:txBody>
-                  <a:tcPr>
-                    <a:solidFill>
-                      <a:srgbClr val="FFFFFF"/>
-                    </a:solidFill>
-                  </a:tcPr>
-                </a:tc>
-                <a:tc>
-                  <a:txBody>
-                    <a:bodyPr/>
-                    <a:lstStyle/>
-                    <a:p>
-                      <a:r>
-                        <a:rPr sz="1100">
-                          <a:solidFill>
-                            <a:srgbClr val="22262B"/>
-                          </a:solidFill>
-                          <a:latin typeface="Calibri"/>
-                        </a:rPr>
-                        <a:t>8 documents</a:t>
-                      </a:r>
-                    </a:p>
-                  </a:txBody>
-                  <a:tcPr>
-                    <a:solidFill>
-                      <a:srgbClr val="FFFFFF"/>
-                    </a:solidFill>
-                  </a:tcPr>
-                </a:tc>
-              </a:tr>
-              <a:tr h="365760">
-                <a:tc>
-                  <a:txBody>
-                    <a:bodyPr/>
-                    <a:lstStyle/>
-                    <a:p>
-                      <a:r>
-                        <a:rPr sz="1100">
-                          <a:solidFill>
-                            <a:srgbClr val="22262B"/>
-                          </a:solidFill>
-                          <a:latin typeface="Calibri"/>
-                        </a:rPr>
-                        <a:t>tests/</a:t>
-                      </a:r>
-                    </a:p>
-                  </a:txBody>
-                  <a:tcPr>
-                    <a:solidFill>
-                      <a:srgbClr val="ECEEF1"/>
-                    </a:solidFill>
-                  </a:tcPr>
-                </a:tc>
-                <a:tc>
-                  <a:txBody>
-                    <a:bodyPr/>
-                    <a:lstStyle/>
-                    <a:p>
-                      <a:r>
-                        <a:rPr sz="1100">
-                          <a:solidFill>
-                            <a:srgbClr val="22262B"/>
-                          </a:solidFill>
-                          <a:latin typeface="Calibri"/>
-                        </a:rPr>
-                        <a:t>CPU-only unit tests — synthetic + real-transcript validation</a:t>
-                      </a:r>
-                    </a:p>
-                  </a:txBody>
-                  <a:tcPr>
-                    <a:solidFill>
-                      <a:srgbClr val="ECEEF1"/>
-                    </a:solidFill>
-                  </a:tcPr>
-                </a:tc>
-                <a:tc>
-                  <a:txBody>
-                    <a:bodyPr/>
-                    <a:lstStyle/>
-                    <a:p>
-                      <a:r>
-                        <a:rPr sz="1100">
-                          <a:solidFill>
-                            <a:srgbClr val="22262B"/>
-                          </a:solidFill>
-                          <a:latin typeface="Calibri"/>
-                        </a:rPr>
-                        <a:t>21 passing</a:t>
-                      </a:r>
-                    </a:p>
-                  </a:txBody>
-                  <a:tcPr>
-                    <a:solidFill>
-                      <a:srgbClr val="ECEEF1"/>
-                    </a:solidFill>
-                  </a:tcPr>
-                </a:tc>
-              </a:tr>
-            </a:tbl>
-          </a:graphicData>
-        </a:graphic>
-      </p:graphicFrame>
+        </p:nvSpPr>
+        <p:spPr>
+          <a:xfrm>
+            <a:off x="502920" y="1508760"/>
+            <a:ext cx="5989320" cy="585216"/>
+          </a:xfrm>
+          <a:prstGeom prst="roundRect">
+            <a:avLst/>
+          </a:prstGeom>
+          <a:solidFill>
+            <a:srgbClr val="1F6F4D"/>
+          </a:solidFill>
+          <a:ln>
+            <a:noFill/>
+          </a:ln>
+          <a:effectLst/>
+        </p:spPr>
+        <p:style>
+          <a:lnRef idx="1">
+            <a:schemeClr val="accent1"/>
+          </a:lnRef>
+          <a:fillRef idx="3">
+            <a:schemeClr val="accent1"/>
+          </a:fillRef>
+          <a:effectRef idx="2">
+            <a:schemeClr val="accent1"/>
+          </a:effectRef>
+          <a:fontRef idx="minor">
+            <a:schemeClr val="lt1"/>
+          </a:fontRef>
+        </p:style>
+        <p:txBody>
+          <a:bodyPr rtlCol="0" anchor="ctr" wrap="square" lIns="63500" rIns="63500" tIns="25400" bIns="25400"/>
+          <a:lstStyle/>
+          <a:p>
+            <a:pPr algn="ctr"/>
+            <a:r>
+              <a:rPr sz="1250" b="1">
+                <a:solidFill>
+                  <a:srgbClr val="FFFFFF"/>
+                </a:solidFill>
+                <a:latin typeface="Calibri"/>
+              </a:rPr>
+              <a:t>Input</a:t>
+            </a:r>
+          </a:p>
+          <a:p>
+            <a:pPr algn="ctr"/>
+            <a:r>
+              <a:rPr sz="950" i="1">
+                <a:solidFill>
+                  <a:srgbClr val="FFFFFF"/>
+                </a:solidFill>
+                <a:latin typeface="Calibri"/>
+              </a:rPr>
+              <a:t>raw video + ordered transcript, no timestamps  ·  DELTA</a:t>
+            </a:r>
+          </a:p>
+        </p:txBody>
+      </p:sp>
+      <p:sp>
+        <p:nvSpPr>
+          <p:cNvPr id="5" name="Rounded Rectangle 4"/>
+          <p:cNvSpPr/>
+          <p:nvPr/>
+        </p:nvSpPr>
+        <p:spPr>
+          <a:xfrm>
+            <a:off x="502920" y="2235708"/>
+            <a:ext cx="5989320" cy="585216"/>
+          </a:xfrm>
+          <a:prstGeom prst="roundRect">
+            <a:avLst/>
+          </a:prstGeom>
+          <a:solidFill>
+            <a:srgbClr val="1F3A5F"/>
+          </a:solidFill>
+          <a:ln>
+            <a:noFill/>
+          </a:ln>
+          <a:effectLst/>
+        </p:spPr>
+        <p:style>
+          <a:lnRef idx="1">
+            <a:schemeClr val="accent1"/>
+          </a:lnRef>
+          <a:fillRef idx="3">
+            <a:schemeClr val="accent1"/>
+          </a:fillRef>
+          <a:effectRef idx="2">
+            <a:schemeClr val="accent1"/>
+          </a:effectRef>
+          <a:fontRef idx="minor">
+            <a:schemeClr val="lt1"/>
+          </a:fontRef>
+        </p:style>
+        <p:txBody>
+          <a:bodyPr rtlCol="0" anchor="ctr" wrap="square" lIns="63500" rIns="63500" tIns="25400" bIns="25400"/>
+          <a:lstStyle/>
+          <a:p>
+            <a:pPr algn="ctr"/>
+            <a:r>
+              <a:rPr sz="1250" b="1">
+                <a:solidFill>
+                  <a:srgbClr val="FFFFFF"/>
+                </a:solidFill>
+                <a:latin typeface="Calibri"/>
+              </a:rPr>
+              <a:t>Stage 0 — semantic-guided sampling</a:t>
+            </a:r>
+          </a:p>
+          <a:p>
+            <a:pPr algn="ctr"/>
+            <a:r>
+              <a:rPr sz="950" i="1">
+                <a:solidFill>
+                  <a:srgbClr val="FFFFFF"/>
+                </a:solidFill>
+                <a:latin typeface="Calibri"/>
+              </a:rPr>
+              <a:t>spend VLM compute near likely transitions  ·  LGTTP</a:t>
+            </a:r>
+          </a:p>
+        </p:txBody>
+      </p:sp>
+      <p:sp>
+        <p:nvSpPr>
+          <p:cNvPr id="6" name="Rounded Rectangle 5"/>
+          <p:cNvSpPr/>
+          <p:nvPr/>
+        </p:nvSpPr>
+        <p:spPr>
+          <a:xfrm>
+            <a:off x="502920" y="2962656"/>
+            <a:ext cx="5989320" cy="585216"/>
+          </a:xfrm>
+          <a:prstGeom prst="roundRect">
+            <a:avLst/>
+          </a:prstGeom>
+          <a:solidFill>
+            <a:srgbClr val="1F3A5F"/>
+          </a:solidFill>
+          <a:ln>
+            <a:noFill/>
+          </a:ln>
+          <a:effectLst/>
+        </p:spPr>
+        <p:style>
+          <a:lnRef idx="1">
+            <a:schemeClr val="accent1"/>
+          </a:lnRef>
+          <a:fillRef idx="3">
+            <a:schemeClr val="accent1"/>
+          </a:fillRef>
+          <a:effectRef idx="2">
+            <a:schemeClr val="accent1"/>
+          </a:effectRef>
+          <a:fontRef idx="minor">
+            <a:schemeClr val="lt1"/>
+          </a:fontRef>
+        </p:style>
+        <p:txBody>
+          <a:bodyPr rtlCol="0" anchor="ctr" wrap="square" lIns="63500" rIns="63500" tIns="25400" bIns="25400"/>
+          <a:lstStyle/>
+          <a:p>
+            <a:pPr algn="ctr"/>
+            <a:r>
+              <a:rPr sz="1250" b="1">
+                <a:solidFill>
+                  <a:srgbClr val="FFFFFF"/>
+                </a:solidFill>
+                <a:latin typeface="Calibri"/>
+              </a:rPr>
+              <a:t>Semantic front-end</a:t>
+            </a:r>
+          </a:p>
+          <a:p>
+            <a:pPr algn="ctr"/>
+            <a:r>
+              <a:rPr sz="950" i="1">
+                <a:solidFill>
+                  <a:srgbClr val="FFFFFF"/>
+                </a:solidFill>
+                <a:latin typeface="Calibri"/>
+              </a:rPr>
+              <a:t>clip ↔ action cosine similarity  ·  OVTAS</a:t>
+            </a:r>
+          </a:p>
+        </p:txBody>
+      </p:sp>
+      <p:sp>
+        <p:nvSpPr>
+          <p:cNvPr id="7" name="Rounded Rectangle 6"/>
+          <p:cNvSpPr/>
+          <p:nvPr/>
+        </p:nvSpPr>
+        <p:spPr>
+          <a:xfrm>
+            <a:off x="502920" y="3689604"/>
+            <a:ext cx="5989320" cy="585216"/>
+          </a:xfrm>
+          <a:prstGeom prst="roundRect">
+            <a:avLst/>
+          </a:prstGeom>
+          <a:solidFill>
+            <a:srgbClr val="1F3A5F"/>
+          </a:solidFill>
+          <a:ln>
+            <a:noFill/>
+          </a:ln>
+          <a:effectLst/>
+        </p:spPr>
+        <p:style>
+          <a:lnRef idx="1">
+            <a:schemeClr val="accent1"/>
+          </a:lnRef>
+          <a:fillRef idx="3">
+            <a:schemeClr val="accent1"/>
+          </a:fillRef>
+          <a:effectRef idx="2">
+            <a:schemeClr val="accent1"/>
+          </a:effectRef>
+          <a:fontRef idx="minor">
+            <a:schemeClr val="lt1"/>
+          </a:fontRef>
+        </p:style>
+        <p:txBody>
+          <a:bodyPr rtlCol="0" anchor="ctr" wrap="square" lIns="63500" rIns="63500" tIns="25400" bIns="25400"/>
+          <a:lstStyle/>
+          <a:p>
+            <a:pPr algn="ctr"/>
+            <a:r>
+              <a:rPr sz="1250" b="1">
+                <a:solidFill>
+                  <a:srgbClr val="FFFFFF"/>
+                </a:solidFill>
+                <a:latin typeface="Calibri"/>
+              </a:rPr>
+              <a:t>Stage A — coarse ordered alignment</a:t>
+            </a:r>
+          </a:p>
+          <a:p>
+            <a:pPr algn="ctr"/>
+            <a:r>
+              <a:rPr sz="950" i="1">
+                <a:solidFill>
+                  <a:srgbClr val="FFFFFF"/>
+                </a:solidFill>
+                <a:latin typeface="Calibri"/>
+              </a:rPr>
+              <a:t>fused-GW OT + monotonic decode  ·  ASOT / CLOT + HiERO-StepG</a:t>
+            </a:r>
+          </a:p>
+        </p:txBody>
+      </p:sp>
+      <p:sp>
+        <p:nvSpPr>
+          <p:cNvPr id="8" name="Rounded Rectangle 7"/>
+          <p:cNvSpPr/>
+          <p:nvPr/>
+        </p:nvSpPr>
+        <p:spPr>
+          <a:xfrm>
+            <a:off x="502920" y="4416552"/>
+            <a:ext cx="5989320" cy="585216"/>
+          </a:xfrm>
+          <a:prstGeom prst="roundRect">
+            <a:avLst/>
+          </a:prstGeom>
+          <a:solidFill>
+            <a:srgbClr val="B45309"/>
+          </a:solidFill>
+          <a:ln>
+            <a:noFill/>
+          </a:ln>
+          <a:effectLst/>
+        </p:spPr>
+        <p:style>
+          <a:lnRef idx="1">
+            <a:schemeClr val="accent1"/>
+          </a:lnRef>
+          <a:fillRef idx="3">
+            <a:schemeClr val="accent1"/>
+          </a:fillRef>
+          <a:effectRef idx="2">
+            <a:schemeClr val="accent1"/>
+          </a:effectRef>
+          <a:fontRef idx="minor">
+            <a:schemeClr val="lt1"/>
+          </a:fontRef>
+        </p:style>
+        <p:txBody>
+          <a:bodyPr rtlCol="0" anchor="ctr" wrap="square" lIns="63500" rIns="63500" tIns="25400" bIns="25400"/>
+          <a:lstStyle/>
+          <a:p>
+            <a:pPr algn="ctr"/>
+            <a:r>
+              <a:rPr sz="1250" b="1">
+                <a:solidFill>
+                  <a:srgbClr val="FFFFFF"/>
+                </a:solidFill>
+                <a:latin typeface="Calibri"/>
+              </a:rPr>
+              <a:t>Stage B1 — local boundary search</a:t>
+            </a:r>
+          </a:p>
+          <a:p>
+            <a:pPr algn="ctr"/>
+            <a:r>
+              <a:rPr sz="950" i="1">
+                <a:solidFill>
+                  <a:srgbClr val="FFFFFF"/>
+                </a:solidFill>
+                <a:latin typeface="Calibri"/>
+              </a:rPr>
+              <a:t>±window crossover search + confidence  ·  our design</a:t>
+            </a:r>
+          </a:p>
+        </p:txBody>
+      </p:sp>
+      <p:sp>
+        <p:nvSpPr>
+          <p:cNvPr id="9" name="Rounded Rectangle 8"/>
+          <p:cNvSpPr/>
+          <p:nvPr/>
+        </p:nvSpPr>
+        <p:spPr>
+          <a:xfrm>
+            <a:off x="502920" y="5143500"/>
+            <a:ext cx="5989320" cy="585216"/>
+          </a:xfrm>
+          <a:prstGeom prst="roundRect">
+            <a:avLst/>
+          </a:prstGeom>
+          <a:solidFill>
+            <a:srgbClr val="1F3A5F"/>
+          </a:solidFill>
+          <a:ln>
+            <a:noFill/>
+          </a:ln>
+          <a:effectLst/>
+        </p:spPr>
+        <p:style>
+          <a:lnRef idx="1">
+            <a:schemeClr val="accent1"/>
+          </a:lnRef>
+          <a:fillRef idx="3">
+            <a:schemeClr val="accent1"/>
+          </a:fillRef>
+          <a:effectRef idx="2">
+            <a:schemeClr val="accent1"/>
+          </a:effectRef>
+          <a:fontRef idx="minor">
+            <a:schemeClr val="lt1"/>
+          </a:fontRef>
+        </p:style>
+        <p:txBody>
+          <a:bodyPr rtlCol="0" anchor="ctr" wrap="square" lIns="63500" rIns="63500" tIns="25400" bIns="25400"/>
+          <a:lstStyle/>
+          <a:p>
+            <a:pPr algn="ctr"/>
+            <a:r>
+              <a:rPr sz="1250" b="1">
+                <a:solidFill>
+                  <a:srgbClr val="FFFFFF"/>
+                </a:solidFill>
+                <a:latin typeface="Calibri"/>
+              </a:rPr>
+              <a:t>Stage B2 — contrastive + relational refinement</a:t>
+            </a:r>
+          </a:p>
+          <a:p>
+            <a:pPr algn="ctr"/>
+            <a:r>
+              <a:rPr sz="950" i="1">
+                <a:solidFill>
+                  <a:srgbClr val="FFFFFF"/>
+                </a:solidFill>
+                <a:latin typeface="Calibri"/>
+              </a:rPr>
+              <a:t>confidence-gated  ·  CVA principle → PBCR + MASRA LRCA/ESTA</a:t>
+            </a:r>
+          </a:p>
+        </p:txBody>
+      </p:sp>
+      <p:sp>
+        <p:nvSpPr>
+          <p:cNvPr id="10" name="Rounded Rectangle 9"/>
+          <p:cNvSpPr/>
+          <p:nvPr/>
+        </p:nvSpPr>
+        <p:spPr>
+          <a:xfrm>
+            <a:off x="502920" y="5870448"/>
+            <a:ext cx="5989320" cy="585216"/>
+          </a:xfrm>
+          <a:prstGeom prst="roundRect">
+            <a:avLst/>
+          </a:prstGeom>
+          <a:solidFill>
+            <a:srgbClr val="1F6F4D"/>
+          </a:solidFill>
+          <a:ln>
+            <a:noFill/>
+          </a:ln>
+          <a:effectLst/>
+        </p:spPr>
+        <p:style>
+          <a:lnRef idx="1">
+            <a:schemeClr val="accent1"/>
+          </a:lnRef>
+          <a:fillRef idx="3">
+            <a:schemeClr val="accent1"/>
+          </a:fillRef>
+          <a:effectRef idx="2">
+            <a:schemeClr val="accent1"/>
+          </a:effectRef>
+          <a:fontRef idx="minor">
+            <a:schemeClr val="lt1"/>
+          </a:fontRef>
+        </p:style>
+        <p:txBody>
+          <a:bodyPr rtlCol="0" anchor="ctr" wrap="square" lIns="63500" rIns="63500" tIns="25400" bIns="25400"/>
+          <a:lstStyle/>
+          <a:p>
+            <a:pPr algn="ctr"/>
+            <a:r>
+              <a:rPr sz="1250" b="1">
+                <a:solidFill>
+                  <a:srgbClr val="FFFFFF"/>
+                </a:solidFill>
+                <a:latin typeface="Calibri"/>
+              </a:rPr>
+              <a:t>Output</a:t>
+            </a:r>
+          </a:p>
+          <a:p>
+            <a:pPr algn="ctr"/>
+            <a:r>
+              <a:rPr sz="950" i="1">
+                <a:solidFill>
+                  <a:srgbClr val="FFFFFF"/>
+                </a:solidFill>
+                <a:latin typeface="Calibri"/>
+              </a:rPr>
+              <a:t>dense Y*  →  unchanged DELTA decoder</a:t>
+            </a:r>
+          </a:p>
+        </p:txBody>
+      </p:sp>
+      <p:cxnSp>
+        <p:nvCxnSpPr>
+          <p:cNvPr id="11" name="Connector 10"/>
+          <p:cNvCxnSpPr/>
+          <p:nvPr/>
+        </p:nvCxnSpPr>
+        <p:spPr>
+          <a:xfrm>
+            <a:off x="3497580" y="2093976"/>
+            <a:ext cx="0" cy="141732"/>
+          </a:xfrm>
+          <a:prstGeom prst="line">
+            <a:avLst/>
+          </a:prstGeom>
+          <a:ln w="19050">
+            <a:solidFill>
+              <a:srgbClr val="5B6470"/>
+            </a:solidFill>
+            <a:tailEnd type="triangle" w="med" len="med"/>
+          </a:ln>
+        </p:spPr>
+        <p:style>
+          <a:lnRef idx="2">
+            <a:schemeClr val="accent1"/>
+          </a:lnRef>
+          <a:fillRef idx="0">
+            <a:schemeClr val="accent1"/>
+          </a:fillRef>
+          <a:effectRef idx="1">
+            <a:schemeClr val="accent1"/>
+          </a:effectRef>
+          <a:fontRef idx="minor">
+            <a:schemeClr val="tx1"/>
+          </a:fontRef>
+        </p:style>
+      </p:cxnSp>
+      <p:cxnSp>
+        <p:nvCxnSpPr>
+          <p:cNvPr id="12" name="Connector 11"/>
+          <p:cNvCxnSpPr/>
+          <p:nvPr/>
+        </p:nvCxnSpPr>
+        <p:spPr>
+          <a:xfrm>
+            <a:off x="3497580" y="2820923"/>
+            <a:ext cx="0" cy="141733"/>
+          </a:xfrm>
+          <a:prstGeom prst="line">
+            <a:avLst/>
+          </a:prstGeom>
+          <a:ln w="19050">
+            <a:solidFill>
+              <a:srgbClr val="5B6470"/>
+            </a:solidFill>
+            <a:tailEnd type="triangle" w="med" len="med"/>
+          </a:ln>
+        </p:spPr>
+        <p:style>
+          <a:lnRef idx="2">
+            <a:schemeClr val="accent1"/>
+          </a:lnRef>
+          <a:fillRef idx="0">
+            <a:schemeClr val="accent1"/>
+          </a:fillRef>
+          <a:effectRef idx="1">
+            <a:schemeClr val="accent1"/>
+          </a:effectRef>
+          <a:fontRef idx="minor">
+            <a:schemeClr val="tx1"/>
+          </a:fontRef>
+        </p:style>
+      </p:cxnSp>
+      <p:cxnSp>
+        <p:nvCxnSpPr>
+          <p:cNvPr id="13" name="Connector 12"/>
+          <p:cNvCxnSpPr/>
+          <p:nvPr/>
+        </p:nvCxnSpPr>
+        <p:spPr>
+          <a:xfrm>
+            <a:off x="3497580" y="3547871"/>
+            <a:ext cx="0" cy="141733"/>
+          </a:xfrm>
+          <a:prstGeom prst="line">
+            <a:avLst/>
+          </a:prstGeom>
+          <a:ln w="19050">
+            <a:solidFill>
+              <a:srgbClr val="5B6470"/>
+            </a:solidFill>
+            <a:tailEnd type="triangle" w="med" len="med"/>
+          </a:ln>
+        </p:spPr>
+        <p:style>
+          <a:lnRef idx="2">
+            <a:schemeClr val="accent1"/>
+          </a:lnRef>
+          <a:fillRef idx="0">
+            <a:schemeClr val="accent1"/>
+          </a:fillRef>
+          <a:effectRef idx="1">
+            <a:schemeClr val="accent1"/>
+          </a:effectRef>
+          <a:fontRef idx="minor">
+            <a:schemeClr val="tx1"/>
+          </a:fontRef>
+        </p:style>
+      </p:cxnSp>
+      <p:cxnSp>
+        <p:nvCxnSpPr>
+          <p:cNvPr id="14" name="Connector 13"/>
+          <p:cNvCxnSpPr/>
+          <p:nvPr/>
+        </p:nvCxnSpPr>
+        <p:spPr>
+          <a:xfrm>
+            <a:off x="3497580" y="4274820"/>
+            <a:ext cx="0" cy="141732"/>
+          </a:xfrm>
+          <a:prstGeom prst="line">
+            <a:avLst/>
+          </a:prstGeom>
+          <a:ln w="19050">
+            <a:solidFill>
+              <a:srgbClr val="5B6470"/>
+            </a:solidFill>
+            <a:tailEnd type="triangle" w="med" len="med"/>
+          </a:ln>
+        </p:spPr>
+        <p:style>
+          <a:lnRef idx="2">
+            <a:schemeClr val="accent1"/>
+          </a:lnRef>
+          <a:fillRef idx="0">
+            <a:schemeClr val="accent1"/>
+          </a:fillRef>
+          <a:effectRef idx="1">
+            <a:schemeClr val="accent1"/>
+          </a:effectRef>
+          <a:fontRef idx="minor">
+            <a:schemeClr val="tx1"/>
+          </a:fontRef>
+        </p:style>
+      </p:cxnSp>
+      <p:cxnSp>
+        <p:nvCxnSpPr>
+          <p:cNvPr id="15" name="Connector 14"/>
+          <p:cNvCxnSpPr/>
+          <p:nvPr/>
+        </p:nvCxnSpPr>
+        <p:spPr>
+          <a:xfrm>
+            <a:off x="3497580" y="5001768"/>
+            <a:ext cx="0" cy="141732"/>
+          </a:xfrm>
+          <a:prstGeom prst="line">
+            <a:avLst/>
+          </a:prstGeom>
+          <a:ln w="19050">
+            <a:solidFill>
+              <a:srgbClr val="5B6470"/>
+            </a:solidFill>
+            <a:tailEnd type="triangle" w="med" len="med"/>
+          </a:ln>
+        </p:spPr>
+        <p:style>
+          <a:lnRef idx="2">
+            <a:schemeClr val="accent1"/>
+          </a:lnRef>
+          <a:fillRef idx="0">
+            <a:schemeClr val="accent1"/>
+          </a:fillRef>
+          <a:effectRef idx="1">
+            <a:schemeClr val="accent1"/>
+          </a:effectRef>
+          <a:fontRef idx="minor">
+            <a:schemeClr val="tx1"/>
+          </a:fontRef>
+        </p:style>
+      </p:cxnSp>
+      <p:cxnSp>
+        <p:nvCxnSpPr>
+          <p:cNvPr id="16" name="Connector 15"/>
+          <p:cNvCxnSpPr/>
+          <p:nvPr/>
+        </p:nvCxnSpPr>
+        <p:spPr>
+          <a:xfrm>
+            <a:off x="3497580" y="5728716"/>
+            <a:ext cx="0" cy="141732"/>
+          </a:xfrm>
+          <a:prstGeom prst="line">
+            <a:avLst/>
+          </a:prstGeom>
+          <a:ln w="19050">
+            <a:solidFill>
+              <a:srgbClr val="5B6470"/>
+            </a:solidFill>
+            <a:tailEnd type="triangle" w="med" len="med"/>
+          </a:ln>
+        </p:spPr>
+        <p:style>
+          <a:lnRef idx="2">
+            <a:schemeClr val="accent1"/>
+          </a:lnRef>
+          <a:fillRef idx="0">
+            <a:schemeClr val="accent1"/>
+          </a:fillRef>
+          <a:effectRef idx="1">
+            <a:schemeClr val="accent1"/>
+          </a:effectRef>
+          <a:fontRef idx="minor">
+            <a:schemeClr val="tx1"/>
+          </a:fontRef>
+        </p:style>
+      </p:cxnSp>
+      <p:sp>
+        <p:nvSpPr>
+          <p:cNvPr id="17" name="Rounded Rectangle 16"/>
+          <p:cNvSpPr/>
+          <p:nvPr/>
+        </p:nvSpPr>
+        <p:spPr>
+          <a:xfrm>
+            <a:off x="7818120" y="3063240"/>
+            <a:ext cx="2331720" cy="1234440"/>
+          </a:xfrm>
+          <a:prstGeom prst="roundRect">
+            <a:avLst/>
+          </a:prstGeom>
+          <a:solidFill>
+            <a:srgbClr val="1F6F4D"/>
+          </a:solidFill>
+          <a:ln>
+            <a:noFill/>
+          </a:ln>
+          <a:effectLst/>
+        </p:spPr>
+        <p:style>
+          <a:lnRef idx="1">
+            <a:schemeClr val="accent1"/>
+          </a:lnRef>
+          <a:fillRef idx="3">
+            <a:schemeClr val="accent1"/>
+          </a:fillRef>
+          <a:effectRef idx="2">
+            <a:schemeClr val="accent1"/>
+          </a:effectRef>
+          <a:fontRef idx="minor">
+            <a:schemeClr val="lt1"/>
+          </a:fontRef>
+        </p:style>
+        <p:txBody>
+          <a:bodyPr rtlCol="0" anchor="ctr" wrap="square" lIns="63500" rIns="63500" tIns="25400" bIns="25400"/>
+          <a:lstStyle/>
+          <a:p>
+            <a:pPr algn="ctr"/>
+            <a:r>
+              <a:rPr sz="1300" b="1">
+                <a:solidFill>
+                  <a:srgbClr val="FFFFFF"/>
+                </a:solidFill>
+                <a:latin typeface="Calibri"/>
+              </a:rPr>
+              <a:t>VideoLLaMA3</a:t>
+            </a:r>
+          </a:p>
+          <a:p>
+            <a:pPr algn="ctr"/>
+            <a:r>
+              <a:rPr sz="950" i="1">
+                <a:solidFill>
+                  <a:srgbClr val="FFFFFF"/>
+                </a:solidFill>
+                <a:latin typeface="Calibri"/>
+              </a:rPr>
+              <a:t>vision tower (similarity) + chat model
+(captions, hard-case reasoning)
+backbone for every stage</a:t>
+            </a:r>
+          </a:p>
+        </p:txBody>
+      </p:sp>
+      <p:cxnSp>
+        <p:nvCxnSpPr>
+          <p:cNvPr id="18" name="Connector 17"/>
+          <p:cNvCxnSpPr/>
+          <p:nvPr/>
+        </p:nvCxnSpPr>
+        <p:spPr>
+          <a:xfrm flipH="1" flipV="1">
+            <a:off x="6492240" y="2528315"/>
+            <a:ext cx="1325880" cy="1152145"/>
+          </a:xfrm>
+          <a:prstGeom prst="line">
+            <a:avLst/>
+          </a:prstGeom>
+          <a:ln w="15875">
+            <a:solidFill>
+              <a:srgbClr val="1F6F4D"/>
+            </a:solidFill>
+            <a:prstDash val="dash"/>
+            <a:tailEnd type="triangle" w="med" len="med"/>
+          </a:ln>
+        </p:spPr>
+        <p:style>
+          <a:lnRef idx="2">
+            <a:schemeClr val="accent1"/>
+          </a:lnRef>
+          <a:fillRef idx="0">
+            <a:schemeClr val="accent1"/>
+          </a:fillRef>
+          <a:effectRef idx="1">
+            <a:schemeClr val="accent1"/>
+          </a:effectRef>
+          <a:fontRef idx="minor">
+            <a:schemeClr val="tx1"/>
+          </a:fontRef>
+        </p:style>
+      </p:cxnSp>
+      <p:cxnSp>
+        <p:nvCxnSpPr>
+          <p:cNvPr id="19" name="Connector 18"/>
+          <p:cNvCxnSpPr/>
+          <p:nvPr/>
+        </p:nvCxnSpPr>
+        <p:spPr>
+          <a:xfrm flipH="1" flipV="1">
+            <a:off x="6492240" y="3255263"/>
+            <a:ext cx="1325880" cy="425197"/>
+          </a:xfrm>
+          <a:prstGeom prst="line">
+            <a:avLst/>
+          </a:prstGeom>
+          <a:ln w="15875">
+            <a:solidFill>
+              <a:srgbClr val="1F6F4D"/>
+            </a:solidFill>
+            <a:prstDash val="dash"/>
+            <a:tailEnd type="triangle" w="med" len="med"/>
+          </a:ln>
+        </p:spPr>
+        <p:style>
+          <a:lnRef idx="2">
+            <a:schemeClr val="accent1"/>
+          </a:lnRef>
+          <a:fillRef idx="0">
+            <a:schemeClr val="accent1"/>
+          </a:fillRef>
+          <a:effectRef idx="1">
+            <a:schemeClr val="accent1"/>
+          </a:effectRef>
+          <a:fontRef idx="minor">
+            <a:schemeClr val="tx1"/>
+          </a:fontRef>
+        </p:style>
+      </p:cxnSp>
+      <p:cxnSp>
+        <p:nvCxnSpPr>
+          <p:cNvPr id="20" name="Connector 19"/>
+          <p:cNvCxnSpPr/>
+          <p:nvPr/>
+        </p:nvCxnSpPr>
+        <p:spPr>
+          <a:xfrm flipH="1">
+            <a:off x="6492240" y="3680460"/>
+            <a:ext cx="1325880" cy="1755648"/>
+          </a:xfrm>
+          <a:prstGeom prst="line">
+            <a:avLst/>
+          </a:prstGeom>
+          <a:ln w="15875">
+            <a:solidFill>
+              <a:srgbClr val="1F6F4D"/>
+            </a:solidFill>
+            <a:prstDash val="dash"/>
+            <a:tailEnd type="triangle" w="med" len="med"/>
+          </a:ln>
+        </p:spPr>
+        <p:style>
+          <a:lnRef idx="2">
+            <a:schemeClr val="accent1"/>
+          </a:lnRef>
+          <a:fillRef idx="0">
+            <a:schemeClr val="accent1"/>
+          </a:fillRef>
+          <a:effectRef idx="1">
+            <a:schemeClr val="accent1"/>
+          </a:effectRef>
+          <a:fontRef idx="minor">
+            <a:schemeClr val="tx1"/>
+          </a:fontRef>
+        </p:style>
+      </p:cxnSp>
+      <p:sp>
+        <p:nvSpPr>
+          <p:cNvPr id="21" name="Rounded Rectangle 20"/>
+          <p:cNvSpPr/>
+          <p:nvPr/>
+        </p:nvSpPr>
+        <p:spPr>
+          <a:xfrm>
+            <a:off x="7818120" y="4892040"/>
+            <a:ext cx="3429000" cy="566928"/>
+          </a:xfrm>
+          <a:prstGeom prst="roundRect">
+            <a:avLst/>
+          </a:prstGeom>
+          <a:solidFill>
+            <a:srgbClr val="ECEEF1"/>
+          </a:solidFill>
+          <a:ln w="15875">
+            <a:solidFill>
+              <a:srgbClr val="ECEEF1"/>
+            </a:solidFill>
+            <a:prstDash val="dash"/>
+          </a:ln>
+          <a:effectLst/>
+        </p:spPr>
+        <p:style>
+          <a:lnRef idx="1">
+            <a:schemeClr val="accent1"/>
+          </a:lnRef>
+          <a:fillRef idx="3">
+            <a:schemeClr val="accent1"/>
+          </a:fillRef>
+          <a:effectRef idx="2">
+            <a:schemeClr val="accent1"/>
+          </a:effectRef>
+          <a:fontRef idx="minor">
+            <a:schemeClr val="lt1"/>
+          </a:fontRef>
+        </p:style>
+        <p:txBody>
+          <a:bodyPr rtlCol="0" anchor="ctr" wrap="square" lIns="63500" rIns="63500" tIns="25400" bIns="25400"/>
+          <a:lstStyle/>
+          <a:p>
+            <a:pPr algn="ctr"/>
+            <a:r>
+              <a:rPr sz="1050" b="1">
+                <a:solidFill>
+                  <a:srgbClr val="22262B"/>
+                </a:solidFill>
+                <a:latin typeface="Calibri"/>
+              </a:rPr>
+              <a:t>Optional Stage C</a:t>
+            </a:r>
+          </a:p>
+          <a:p>
+            <a:pPr algn="ctr"/>
+            <a:r>
+              <a:rPr sz="950" i="1">
+                <a:solidFill>
+                  <a:srgbClr val="22262B"/>
+                </a:solidFill>
+                <a:latin typeface="Calibri"/>
+              </a:rPr>
+              <a:t>iterative refinement if boundaries stay noisy  ·  CLOT / D-CLOT</a:t>
+            </a:r>
+          </a:p>
+        </p:txBody>
+      </p:sp>
+      <p:cxnSp>
+        <p:nvCxnSpPr>
+          <p:cNvPr id="22" name="Connector 21"/>
+          <p:cNvCxnSpPr/>
+          <p:nvPr/>
+        </p:nvCxnSpPr>
+        <p:spPr>
+          <a:xfrm flipV="1">
+            <a:off x="6492240" y="5175503"/>
+            <a:ext cx="1325880" cy="260605"/>
+          </a:xfrm>
+          <a:prstGeom prst="line">
+            <a:avLst/>
+          </a:prstGeom>
+          <a:ln w="13970">
+            <a:solidFill>
+              <a:srgbClr val="5B6470"/>
+            </a:solidFill>
+            <a:prstDash val="dash"/>
+            <a:tailEnd type="triangle" w="med" len="med"/>
+          </a:ln>
+        </p:spPr>
+        <p:style>
+          <a:lnRef idx="2">
+            <a:schemeClr val="accent1"/>
+          </a:lnRef>
+          <a:fillRef idx="0">
+            <a:schemeClr val="accent1"/>
+          </a:fillRef>
+          <a:effectRef idx="1">
+            <a:schemeClr val="accent1"/>
+          </a:effectRef>
+          <a:fontRef idx="minor">
+            <a:schemeClr val="tx1"/>
+          </a:fontRef>
+        </p:style>
+      </p:cxnSp>
+      <p:sp>
+        <p:nvSpPr>
+          <p:cNvPr id="23" name="Rounded Rectangle 22"/>
+          <p:cNvSpPr/>
+          <p:nvPr/>
+        </p:nvSpPr>
+        <p:spPr>
+          <a:xfrm>
+            <a:off x="7818120" y="5623560"/>
+            <a:ext cx="3429000" cy="566928"/>
+          </a:xfrm>
+          <a:prstGeom prst="roundRect">
+            <a:avLst/>
+          </a:prstGeom>
+          <a:solidFill>
+            <a:srgbClr val="ECEEF1"/>
+          </a:solidFill>
+          <a:ln w="15875">
+            <a:solidFill>
+              <a:srgbClr val="ECEEF1"/>
+            </a:solidFill>
+            <a:prstDash val="dash"/>
+          </a:ln>
+          <a:effectLst/>
+        </p:spPr>
+        <p:style>
+          <a:lnRef idx="1">
+            <a:schemeClr val="accent1"/>
+          </a:lnRef>
+          <a:fillRef idx="3">
+            <a:schemeClr val="accent1"/>
+          </a:fillRef>
+          <a:effectRef idx="2">
+            <a:schemeClr val="accent1"/>
+          </a:effectRef>
+          <a:fontRef idx="minor">
+            <a:schemeClr val="lt1"/>
+          </a:fontRef>
+        </p:style>
+        <p:txBody>
+          <a:bodyPr rtlCol="0" anchor="ctr" wrap="square" lIns="63500" rIns="63500" tIns="25400" bIns="25400"/>
+          <a:lstStyle/>
+          <a:p>
+            <a:pPr algn="ctr"/>
+            <a:r>
+              <a:rPr sz="1050" b="1">
+                <a:solidFill>
+                  <a:srgbClr val="22262B"/>
+                </a:solidFill>
+                <a:latin typeface="Calibri"/>
+              </a:rPr>
+              <a:t>Optional Stage D</a:t>
+            </a:r>
+          </a:p>
+          <a:p>
+            <a:pPr algn="ctr"/>
+            <a:r>
+              <a:rPr sz="950" i="1">
+                <a:solidFill>
+                  <a:srgbClr val="22262B"/>
+                </a:solidFill>
+                <a:latin typeface="Calibri"/>
+              </a:rPr>
+              <a:t>expensive VLM reasoning, hardest boundaries only  ·  TOGA</a:t>
+            </a:r>
+          </a:p>
+        </p:txBody>
+      </p:sp>
+      <p:cxnSp>
+        <p:nvCxnSpPr>
+          <p:cNvPr id="24" name="Connector 23"/>
+          <p:cNvCxnSpPr/>
+          <p:nvPr/>
+        </p:nvCxnSpPr>
+        <p:spPr>
+          <a:xfrm>
+            <a:off x="6492240" y="5436108"/>
+            <a:ext cx="1325880" cy="470916"/>
+          </a:xfrm>
+          <a:prstGeom prst="line">
+            <a:avLst/>
+          </a:prstGeom>
+          <a:ln w="13970">
+            <a:solidFill>
+              <a:srgbClr val="5B6470"/>
+            </a:solidFill>
+            <a:prstDash val="dash"/>
+            <a:tailEnd type="triangle" w="med" len="med"/>
+          </a:ln>
+        </p:spPr>
+        <p:style>
+          <a:lnRef idx="2">
+            <a:schemeClr val="accent1"/>
+          </a:lnRef>
+          <a:fillRef idx="0">
+            <a:schemeClr val="accent1"/>
+          </a:fillRef>
+          <a:effectRef idx="1">
+            <a:schemeClr val="accent1"/>
+          </a:effectRef>
+          <a:fontRef idx="minor">
+            <a:schemeClr val="tx1"/>
+          </a:fontRef>
+        </p:style>
+      </p:cxnSp>
     </p:spTree>
   </p:cSld>
   <p:clrMapOvr>
@@ -8973,7 +9779,7 @@
                 </a:solidFill>
                 <a:latin typeface="Calibri"/>
               </a:rPr>
-              <a:t>Progress 1 — infrastructure &amp; data</a:t>
+              <a:t>What's built — the repository</a:t>
             </a:r>
           </a:p>
           <a:p>
@@ -8984,7 +9790,7 @@
                 </a:solidFill>
                 <a:latin typeface="Calibri"/>
               </a:rPr>
-              <a:t>pipeline · dataset · the video blocker</a:t>
+              <a:t>github.com/epayaslii/DELTA  ·  Python 3.11 / uv</a:t>
             </a:r>
           </a:p>
         </p:txBody>
@@ -9032,125 +9838,509 @@
           </a:p>
         </p:txBody>
       </p:sp>
-      <p:sp>
-        <p:nvSpPr>
-          <p:cNvPr id="4" name="TextBox 3"/>
-          <p:cNvSpPr txBox="1"/>
+      <p:graphicFrame>
+        <p:nvGraphicFramePr>
+          <p:cNvPr id="4" name="Table 3"/>
+          <p:cNvGraphicFramePr>
+            <a:graphicFrameLocks noGrp="1"/>
+          </p:cNvGraphicFramePr>
           <p:nvPr/>
-        </p:nvSpPr>
-        <p:spPr>
-          <a:xfrm>
-            <a:off x="640080" y="1600200"/>
-            <a:ext cx="10972800" cy="4937760"/>
-          </a:xfrm>
-          <a:prstGeom prst="rect">
-            <a:avLst/>
-          </a:prstGeom>
-          <a:noFill/>
-        </p:spPr>
-        <p:txBody>
-          <a:bodyPr wrap="square">
-            <a:spAutoFit/>
-          </a:bodyPr>
-          <a:lstStyle/>
-          <a:p>
-            <a:pPr>
-              <a:spcAft>
-                <a:spcPts val="600"/>
-              </a:spcAft>
-            </a:pPr>
-            <a:r>
-              <a:rPr sz="1700" b="0">
-                <a:solidFill>
-                  <a:srgbClr val="22262B"/>
-                </a:solidFill>
-                <a:latin typeface="Calibri"/>
-              </a:rPr>
-              <a:t>▸ Feature-extraction pipeline: pluggable frozen backbones (VL3-SigLIP = VideoLLaMA3 vision tower, SigLIP2, DINOv2), outputs (D,T) features aligned to the ground-truth frame grid — drop-in for I3D.</a:t>
-            </a:r>
-          </a:p>
-          <a:p>
-            <a:pPr>
-              <a:spcAft>
-                <a:spcPts val="600"/>
-              </a:spcAft>
-            </a:pPr>
-            <a:r>
-              <a:rPr sz="1700" b="0">
-                <a:solidFill>
-                  <a:srgbClr val="22262B"/>
-                </a:solidFill>
-                <a:latin typeface="Calibri"/>
-              </a:rPr>
-              <a:t>▸ 50Salads benchmark bundle downloaded &amp; verified (HuggingFace dinggd/50salads):</a:t>
-            </a:r>
-          </a:p>
-          <a:p>
-            <a:pPr lvl="1">
-              <a:spcAft>
-                <a:spcPts val="600"/>
-              </a:spcAft>
-            </a:pPr>
-            <a:r>
-              <a:rPr sz="1500">
-                <a:solidFill>
-                  <a:srgbClr val="5B6470"/>
-                </a:solidFill>
-                <a:latin typeface="Calibri"/>
-              </a:rPr>
-              <a:t>– 50 videos, 19 classes (17 actions + start/end), I3D 2048-d, confirmed 30 fps, ~20 segments/video.</a:t>
-            </a:r>
-          </a:p>
-          <a:p>
-            <a:pPr>
-              <a:spcAft>
-                <a:spcPts val="600"/>
-              </a:spcAft>
-            </a:pPr>
-            <a:r>
-              <a:rPr sz="1700" b="0">
-                <a:solidFill>
-                  <a:srgbClr val="22262B"/>
-                </a:solidFill>
-                <a:latin typeface="Calibri"/>
-              </a:rPr>
-              <a:t>▸ Raw 50Salads videos: the official host (Dundee) is DOWN (NXDOMAIN everywhere); no public mirror.</a:t>
-            </a:r>
-          </a:p>
-          <a:p>
-            <a:pPr lvl="1">
-              <a:spcAft>
-                <a:spcPts val="600"/>
-              </a:spcAft>
-            </a:pPr>
-            <a:r>
-              <a:rPr sz="1500">
-                <a:solidFill>
-                  <a:srgbClr val="5B6470"/>
-                </a:solidFill>
-                <a:latin typeface="Calibri"/>
-              </a:rPr>
-              <a:t>– Blocks VLM feature extraction. Need a copy from the lab — see questions at the end.</a:t>
-            </a:r>
-          </a:p>
-          <a:p>
-            <a:pPr>
-              <a:spcAft>
-                <a:spcPts val="600"/>
-              </a:spcAft>
-            </a:pPr>
-            <a:r>
-              <a:rPr sz="1700" b="0">
-                <a:solidFill>
-                  <a:srgbClr val="22262B"/>
-                </a:solidFill>
-                <a:latin typeface="Calibri"/>
-              </a:rPr>
-              <a:t>▸ Environment: local Mac has no GPU/torch → model runs go to the UPC cluster.</a:t>
-            </a:r>
-          </a:p>
-        </p:txBody>
-      </p:sp>
+        </p:nvGraphicFramePr>
+        <p:xfrm>
+          <a:off x="548640" y="1645920"/>
+          <a:ext cx="11064240" cy="2560320"/>
+        </p:xfrm>
+        <a:graphic>
+          <a:graphicData uri="http://schemas.openxmlformats.org/drawingml/2006/table">
+            <a:tbl>
+              <a:tblPr firstRow="1" bandRow="1">
+                <a:tableStyleId>{5C22544A-7EE6-4342-B048-85BDC9FD1C3A}</a:tableStyleId>
+              </a:tblPr>
+              <a:tblGrid>
+                <a:gridCol w="1920240"/>
+                <a:gridCol w="7315200"/>
+                <a:gridCol w="1828800"/>
+              </a:tblGrid>
+              <a:tr h="365760">
+                <a:tc>
+                  <a:txBody>
+                    <a:bodyPr/>
+                    <a:lstStyle/>
+                    <a:p>
+                      <a:r>
+                        <a:rPr sz="1200" b="1">
+                          <a:solidFill>
+                            <a:srgbClr val="FFFFFF"/>
+                          </a:solidFill>
+                          <a:latin typeface="Calibri"/>
+                        </a:rPr>
+                        <a:t>Module</a:t>
+                      </a:r>
+                    </a:p>
+                  </a:txBody>
+                  <a:tcPr>
+                    <a:solidFill>
+                      <a:srgbClr val="1F3A5F"/>
+                    </a:solidFill>
+                  </a:tcPr>
+                </a:tc>
+                <a:tc>
+                  <a:txBody>
+                    <a:bodyPr/>
+                    <a:lstStyle/>
+                    <a:p>
+                      <a:r>
+                        <a:rPr sz="1200" b="1">
+                          <a:solidFill>
+                            <a:srgbClr val="FFFFFF"/>
+                          </a:solidFill>
+                          <a:latin typeface="Calibri"/>
+                        </a:rPr>
+                        <a:t>What it does</a:t>
+                      </a:r>
+                    </a:p>
+                  </a:txBody>
+                  <a:tcPr>
+                    <a:solidFill>
+                      <a:srgbClr val="1F3A5F"/>
+                    </a:solidFill>
+                  </a:tcPr>
+                </a:tc>
+                <a:tc>
+                  <a:txBody>
+                    <a:bodyPr/>
+                    <a:lstStyle/>
+                    <a:p>
+                      <a:r>
+                        <a:rPr sz="1200" b="1">
+                          <a:solidFill>
+                            <a:srgbClr val="FFFFFF"/>
+                          </a:solidFill>
+                          <a:latin typeface="Calibri"/>
+                        </a:rPr>
+                        <a:t>Status</a:t>
+                      </a:r>
+                    </a:p>
+                  </a:txBody>
+                  <a:tcPr>
+                    <a:solidFill>
+                      <a:srgbClr val="1F3A5F"/>
+                    </a:solidFill>
+                  </a:tcPr>
+                </a:tc>
+              </a:tr>
+              <a:tr h="365760">
+                <a:tc>
+                  <a:txBody>
+                    <a:bodyPr/>
+                    <a:lstStyle/>
+                    <a:p>
+                      <a:r>
+                        <a:rPr sz="1100">
+                          <a:solidFill>
+                            <a:srgbClr val="22262B"/>
+                          </a:solidFill>
+                          <a:latin typeface="Calibri"/>
+                        </a:rPr>
+                        <a:t>delta.data</a:t>
+                      </a:r>
+                    </a:p>
+                  </a:txBody>
+                  <a:tcPr>
+                    <a:solidFill>
+                      <a:srgbClr val="FFFFFF"/>
+                    </a:solidFill>
+                  </a:tcPr>
+                </a:tc>
+                <a:tc>
+                  <a:txBody>
+                    <a:bodyPr/>
+                    <a:lstStyle/>
+                    <a:p>
+                      <a:r>
+                        <a:rPr sz="1100">
+                          <a:solidFill>
+                            <a:srgbClr val="22262B"/>
+                          </a:solidFill>
+                          <a:latin typeface="Calibri"/>
+                        </a:rPr>
+                        <a:t>50Salads / Breakfast conventions, transcripts, splits, dataset stats</a:t>
+                      </a:r>
+                    </a:p>
+                  </a:txBody>
+                  <a:tcPr>
+                    <a:solidFill>
+                      <a:srgbClr val="FFFFFF"/>
+                    </a:solidFill>
+                  </a:tcPr>
+                </a:tc>
+                <a:tc>
+                  <a:txBody>
+                    <a:bodyPr/>
+                    <a:lstStyle/>
+                    <a:p>
+                      <a:r>
+                        <a:rPr sz="1100">
+                          <a:solidFill>
+                            <a:srgbClr val="22262B"/>
+                          </a:solidFill>
+                          <a:latin typeface="Calibri"/>
+                        </a:rPr>
+                        <a:t>done + tests</a:t>
+                      </a:r>
+                    </a:p>
+                  </a:txBody>
+                  <a:tcPr>
+                    <a:solidFill>
+                      <a:srgbClr val="FFFFFF"/>
+                    </a:solidFill>
+                  </a:tcPr>
+                </a:tc>
+              </a:tr>
+              <a:tr h="365760">
+                <a:tc>
+                  <a:txBody>
+                    <a:bodyPr/>
+                    <a:lstStyle/>
+                    <a:p>
+                      <a:r>
+                        <a:rPr sz="1100">
+                          <a:solidFill>
+                            <a:srgbClr val="22262B"/>
+                          </a:solidFill>
+                          <a:latin typeface="Calibri"/>
+                        </a:rPr>
+                        <a:t>delta.features</a:t>
+                      </a:r>
+                    </a:p>
+                  </a:txBody>
+                  <a:tcPr>
+                    <a:solidFill>
+                      <a:srgbClr val="ECEEF1"/>
+                    </a:solidFill>
+                  </a:tcPr>
+                </a:tc>
+                <a:tc>
+                  <a:txBody>
+                    <a:bodyPr/>
+                    <a:lstStyle/>
+                    <a:p>
+                      <a:r>
+                        <a:rPr sz="1100">
+                          <a:solidFill>
+                            <a:srgbClr val="22262B"/>
+                          </a:solidFill>
+                          <a:latin typeface="Calibri"/>
+                        </a:rPr>
+                        <a:t>Frozen VLM feature extraction — VideoLLaMA3 / SigLIP2 / DINOv2 backbones, text encoder, extraction CLI</a:t>
+                      </a:r>
+                    </a:p>
+                  </a:txBody>
+                  <a:tcPr>
+                    <a:solidFill>
+                      <a:srgbClr val="ECEEF1"/>
+                    </a:solidFill>
+                  </a:tcPr>
+                </a:tc>
+                <a:tc>
+                  <a:txBody>
+                    <a:bodyPr/>
+                    <a:lstStyle/>
+                    <a:p>
+                      <a:r>
+                        <a:rPr sz="1100">
+                          <a:solidFill>
+                            <a:srgbClr val="22262B"/>
+                          </a:solidFill>
+                          <a:latin typeface="Calibri"/>
+                        </a:rPr>
+                        <a:t>done (untested on video)</a:t>
+                      </a:r>
+                    </a:p>
+                  </a:txBody>
+                  <a:tcPr>
+                    <a:solidFill>
+                      <a:srgbClr val="ECEEF1"/>
+                    </a:solidFill>
+                  </a:tcPr>
+                </a:tc>
+              </a:tr>
+              <a:tr h="365760">
+                <a:tc>
+                  <a:txBody>
+                    <a:bodyPr/>
+                    <a:lstStyle/>
+                    <a:p>
+                      <a:r>
+                        <a:rPr sz="1100">
+                          <a:solidFill>
+                            <a:srgbClr val="22262B"/>
+                          </a:solidFill>
+                          <a:latin typeface="Calibri"/>
+                        </a:rPr>
+                        <a:t>delta.align</a:t>
+                      </a:r>
+                    </a:p>
+                  </a:txBody>
+                  <a:tcPr>
+                    <a:solidFill>
+                      <a:srgbClr val="FFFFFF"/>
+                    </a:solidFill>
+                  </a:tcPr>
+                </a:tc>
+                <a:tc>
+                  <a:txBody>
+                    <a:bodyPr/>
+                    <a:lstStyle/>
+                    <a:p>
+                      <a:r>
+                        <a:rPr sz="1100">
+                          <a:solidFill>
+                            <a:srgbClr val="22262B"/>
+                          </a:solidFill>
+                          <a:latin typeface="Calibri"/>
+                        </a:rPr>
+                        <a:t>similarity matrix · order-preserving DP + soft alignment · segmentation/alignment metrics</a:t>
+                      </a:r>
+                    </a:p>
+                  </a:txBody>
+                  <a:tcPr>
+                    <a:solidFill>
+                      <a:srgbClr val="FFFFFF"/>
+                    </a:solidFill>
+                  </a:tcPr>
+                </a:tc>
+                <a:tc>
+                  <a:txBody>
+                    <a:bodyPr/>
+                    <a:lstStyle/>
+                    <a:p>
+                      <a:r>
+                        <a:rPr sz="1100">
+                          <a:solidFill>
+                            <a:srgbClr val="22262B"/>
+                          </a:solidFill>
+                          <a:latin typeface="Calibri"/>
+                        </a:rPr>
+                        <a:t>done + tests</a:t>
+                      </a:r>
+                    </a:p>
+                  </a:txBody>
+                  <a:tcPr>
+                    <a:solidFill>
+                      <a:srgbClr val="FFFFFF"/>
+                    </a:solidFill>
+                  </a:tcPr>
+                </a:tc>
+              </a:tr>
+              <a:tr h="365760">
+                <a:tc>
+                  <a:txBody>
+                    <a:bodyPr/>
+                    <a:lstStyle/>
+                    <a:p>
+                      <a:r>
+                        <a:rPr sz="1100">
+                          <a:solidFill>
+                            <a:srgbClr val="22262B"/>
+                          </a:solidFill>
+                          <a:latin typeface="Calibri"/>
+                        </a:rPr>
+                        <a:t>delta.viz</a:t>
+                      </a:r>
+                    </a:p>
+                  </a:txBody>
+                  <a:tcPr>
+                    <a:solidFill>
+                      <a:srgbClr val="ECEEF1"/>
+                    </a:solidFill>
+                  </a:tcPr>
+                </a:tc>
+                <a:tc>
+                  <a:txBody>
+                    <a:bodyPr/>
+                    <a:lstStyle/>
+                    <a:p>
+                      <a:r>
+                        <a:rPr sz="1100">
+                          <a:solidFill>
+                            <a:srgbClr val="22262B"/>
+                          </a:solidFill>
+                          <a:latin typeface="Calibri"/>
+                        </a:rPr>
+                        <a:t>segmentation-timeline plotting (GT vs pseudo-labels vs prediction)</a:t>
+                      </a:r>
+                    </a:p>
+                  </a:txBody>
+                  <a:tcPr>
+                    <a:solidFill>
+                      <a:srgbClr val="ECEEF1"/>
+                    </a:solidFill>
+                  </a:tcPr>
+                </a:tc>
+                <a:tc>
+                  <a:txBody>
+                    <a:bodyPr/>
+                    <a:lstStyle/>
+                    <a:p>
+                      <a:r>
+                        <a:rPr sz="1100">
+                          <a:solidFill>
+                            <a:srgbClr val="22262B"/>
+                          </a:solidFill>
+                          <a:latin typeface="Calibri"/>
+                        </a:rPr>
+                        <a:t>done</a:t>
+                      </a:r>
+                    </a:p>
+                  </a:txBody>
+                  <a:tcPr>
+                    <a:solidFill>
+                      <a:srgbClr val="ECEEF1"/>
+                    </a:solidFill>
+                  </a:tcPr>
+                </a:tc>
+              </a:tr>
+              <a:tr h="365760">
+                <a:tc>
+                  <a:txBody>
+                    <a:bodyPr/>
+                    <a:lstStyle/>
+                    <a:p>
+                      <a:r>
+                        <a:rPr sz="1100">
+                          <a:solidFill>
+                            <a:srgbClr val="22262B"/>
+                          </a:solidFill>
+                          <a:latin typeface="Calibri"/>
+                        </a:rPr>
+                        <a:t>docs/</a:t>
+                      </a:r>
+                    </a:p>
+                  </a:txBody>
+                  <a:tcPr>
+                    <a:solidFill>
+                      <a:srgbClr val="FFFFFF"/>
+                    </a:solidFill>
+                  </a:tcPr>
+                </a:tc>
+                <a:tc>
+                  <a:txBody>
+                    <a:bodyPr/>
+                    <a:lstStyle/>
+                    <a:p>
+                      <a:r>
+                        <a:rPr sz="1100">
+                          <a:solidFill>
+                            <a:srgbClr val="22262B"/>
+                          </a:solidFill>
+                          <a:latin typeface="Calibri"/>
+                        </a:rPr>
+                        <a:t>TA reference · 50Salads analysis · DELTA-code deep-read (loss assembly, VLM plug-in points) · HAL &amp; CVA baselines · approach + lit review</a:t>
+                      </a:r>
+                    </a:p>
+                  </a:txBody>
+                  <a:tcPr>
+                    <a:solidFill>
+                      <a:srgbClr val="FFFFFF"/>
+                    </a:solidFill>
+                  </a:tcPr>
+                </a:tc>
+                <a:tc>
+                  <a:txBody>
+                    <a:bodyPr/>
+                    <a:lstStyle/>
+                    <a:p>
+                      <a:r>
+                        <a:rPr sz="1100">
+                          <a:solidFill>
+                            <a:srgbClr val="22262B"/>
+                          </a:solidFill>
+                          <a:latin typeface="Calibri"/>
+                        </a:rPr>
+                        <a:t>8 documents</a:t>
+                      </a:r>
+                    </a:p>
+                  </a:txBody>
+                  <a:tcPr>
+                    <a:solidFill>
+                      <a:srgbClr val="FFFFFF"/>
+                    </a:solidFill>
+                  </a:tcPr>
+                </a:tc>
+              </a:tr>
+              <a:tr h="365760">
+                <a:tc>
+                  <a:txBody>
+                    <a:bodyPr/>
+                    <a:lstStyle/>
+                    <a:p>
+                      <a:r>
+                        <a:rPr sz="1100">
+                          <a:solidFill>
+                            <a:srgbClr val="22262B"/>
+                          </a:solidFill>
+                          <a:latin typeface="Calibri"/>
+                        </a:rPr>
+                        <a:t>tests/</a:t>
+                      </a:r>
+                    </a:p>
+                  </a:txBody>
+                  <a:tcPr>
+                    <a:solidFill>
+                      <a:srgbClr val="ECEEF1"/>
+                    </a:solidFill>
+                  </a:tcPr>
+                </a:tc>
+                <a:tc>
+                  <a:txBody>
+                    <a:bodyPr/>
+                    <a:lstStyle/>
+                    <a:p>
+                      <a:r>
+                        <a:rPr sz="1100">
+                          <a:solidFill>
+                            <a:srgbClr val="22262B"/>
+                          </a:solidFill>
+                          <a:latin typeface="Calibri"/>
+                        </a:rPr>
+                        <a:t>CPU-only unit tests — synthetic + real-transcript validation</a:t>
+                      </a:r>
+                    </a:p>
+                  </a:txBody>
+                  <a:tcPr>
+                    <a:solidFill>
+                      <a:srgbClr val="ECEEF1"/>
+                    </a:solidFill>
+                  </a:tcPr>
+                </a:tc>
+                <a:tc>
+                  <a:txBody>
+                    <a:bodyPr/>
+                    <a:lstStyle/>
+                    <a:p>
+                      <a:r>
+                        <a:rPr sz="1100">
+                          <a:solidFill>
+                            <a:srgbClr val="22262B"/>
+                          </a:solidFill>
+                          <a:latin typeface="Calibri"/>
+                        </a:rPr>
+                        <a:t>21 passing</a:t>
+                      </a:r>
+                    </a:p>
+                  </a:txBody>
+                  <a:tcPr>
+                    <a:solidFill>
+                      <a:srgbClr val="ECEEF1"/>
+                    </a:solidFill>
+                  </a:tcPr>
+                </a:tc>
+              </a:tr>
+            </a:tbl>
+          </a:graphicData>
+        </a:graphic>
+      </p:graphicFrame>
     </p:spTree>
   </p:cSld>
   <p:clrMapOvr>
@@ -9206,7 +10396,7 @@
                 </a:solidFill>
                 <a:latin typeface="Calibri"/>
               </a:rPr>
-              <a:t>Progress 2 — why 50Salads is hard (measured)</a:t>
+              <a:t>Progress 1 — infrastructure &amp; data</a:t>
             </a:r>
           </a:p>
           <a:p>
@@ -9217,7 +10407,7 @@
                 </a:solidFill>
                 <a:latin typeface="Calibri"/>
               </a:rPr>
-              <a:t>Stage 1 dataset analysis  ·  notebook + docs/50salads-notes.md</a:t>
+              <a:t>pipeline · dataset · the video blocker</a:t>
             </a:r>
           </a:p>
         </p:txBody>
@@ -9265,439 +10455,125 @@
           </a:p>
         </p:txBody>
       </p:sp>
-      <p:graphicFrame>
-        <p:nvGraphicFramePr>
-          <p:cNvPr id="4" name="Table 3"/>
-          <p:cNvGraphicFramePr>
-            <a:graphicFrameLocks noGrp="1"/>
-          </p:cNvGraphicFramePr>
+      <p:sp>
+        <p:nvSpPr>
+          <p:cNvPr id="4" name="TextBox 3"/>
+          <p:cNvSpPr txBox="1"/>
           <p:nvPr/>
-        </p:nvGraphicFramePr>
-        <p:xfrm>
-          <a:off x="548640" y="1645920"/>
-          <a:ext cx="11064240" cy="1828800"/>
-        </p:xfrm>
-        <a:graphic>
-          <a:graphicData uri="http://schemas.openxmlformats.org/drawingml/2006/table">
-            <a:tbl>
-              <a:tblPr firstRow="1" bandRow="1">
-                <a:tableStyleId>{5C22544A-7EE6-4342-B048-85BDC9FD1C3A}</a:tableStyleId>
-              </a:tblPr>
-              <a:tblGrid>
-                <a:gridCol w="4206240"/>
-                <a:gridCol w="2103120"/>
-                <a:gridCol w="4754880"/>
-              </a:tblGrid>
-              <a:tr h="365760">
-                <a:tc>
-                  <a:txBody>
-                    <a:bodyPr/>
-                    <a:lstStyle/>
-                    <a:p>
-                      <a:r>
-                        <a:rPr sz="1200" b="1">
-                          <a:solidFill>
-                            <a:srgbClr val="FFFFFF"/>
-                          </a:solidFill>
-                          <a:latin typeface="Calibri"/>
-                        </a:rPr>
-                        <a:t>Finding</a:t>
-                      </a:r>
-                    </a:p>
-                  </a:txBody>
-                  <a:tcPr>
-                    <a:solidFill>
-                      <a:srgbClr val="1F3A5F"/>
-                    </a:solidFill>
-                  </a:tcPr>
-                </a:tc>
-                <a:tc>
-                  <a:txBody>
-                    <a:bodyPr/>
-                    <a:lstStyle/>
-                    <a:p>
-                      <a:r>
-                        <a:rPr sz="1200" b="1">
-                          <a:solidFill>
-                            <a:srgbClr val="FFFFFF"/>
-                          </a:solidFill>
-                          <a:latin typeface="Calibri"/>
-                        </a:rPr>
-                        <a:t>Number</a:t>
-                      </a:r>
-                    </a:p>
-                  </a:txBody>
-                  <a:tcPr>
-                    <a:solidFill>
-                      <a:srgbClr val="1F3A5F"/>
-                    </a:solidFill>
-                  </a:tcPr>
-                </a:tc>
-                <a:tc>
-                  <a:txBody>
-                    <a:bodyPr/>
-                    <a:lstStyle/>
-                    <a:p>
-                      <a:r>
-                        <a:rPr sz="1200" b="1">
-                          <a:solidFill>
-                            <a:srgbClr val="FFFFFF"/>
-                          </a:solidFill>
-                          <a:latin typeface="Calibri"/>
-                        </a:rPr>
-                        <a:t>Implication</a:t>
-                      </a:r>
-                    </a:p>
-                  </a:txBody>
-                  <a:tcPr>
-                    <a:solidFill>
-                      <a:srgbClr val="1F3A5F"/>
-                    </a:solidFill>
-                  </a:tcPr>
-                </a:tc>
-              </a:tr>
-              <a:tr h="365760">
-                <a:tc>
-                  <a:txBody>
-                    <a:bodyPr/>
-                    <a:lstStyle/>
-                    <a:p>
-                      <a:r>
-                        <a:rPr sz="1100">
-                          <a:solidFill>
-                            <a:srgbClr val="22262B"/>
-                          </a:solidFill>
-                          <a:latin typeface="Calibri"/>
-                        </a:rPr>
-                        <a:t>Naive uniform alignment (zero visual evidence)</a:t>
-                      </a:r>
-                    </a:p>
-                  </a:txBody>
-                  <a:tcPr>
-                    <a:solidFill>
-                      <a:srgbClr val="FFFFFF"/>
-                    </a:solidFill>
-                  </a:tcPr>
-                </a:tc>
-                <a:tc>
-                  <a:txBody>
-                    <a:bodyPr/>
-                    <a:lstStyle/>
-                    <a:p>
-                      <a:r>
-                        <a:rPr sz="1100">
-                          <a:solidFill>
-                            <a:srgbClr val="22262B"/>
-                          </a:solidFill>
-                          <a:latin typeface="Calibri"/>
-                        </a:rPr>
-                        <a:t>MoC 0.34</a:t>
-                      </a:r>
-                    </a:p>
-                  </a:txBody>
-                  <a:tcPr>
-                    <a:solidFill>
-                      <a:srgbClr val="FFFFFF"/>
-                    </a:solidFill>
-                  </a:tcPr>
-                </a:tc>
-                <a:tc>
-                  <a:txBody>
-                    <a:bodyPr/>
-                    <a:lstStyle/>
-                    <a:p>
-                      <a:r>
-                        <a:rPr sz="1100">
-                          <a:solidFill>
-                            <a:srgbClr val="22262B"/>
-                          </a:solidFill>
-                          <a:latin typeface="Calibri"/>
-                        </a:rPr>
-                        <a:t>the floor any TA must beat</a:t>
-                      </a:r>
-                    </a:p>
-                  </a:txBody>
-                  <a:tcPr>
-                    <a:solidFill>
-                      <a:srgbClr val="FFFFFF"/>
-                    </a:solidFill>
-                  </a:tcPr>
-                </a:tc>
-              </a:tr>
-              <a:tr h="365760">
-                <a:tc>
-                  <a:txBody>
-                    <a:bodyPr/>
-                    <a:lstStyle/>
-                    <a:p>
-                      <a:r>
-                        <a:rPr sz="1100">
-                          <a:solidFill>
-                            <a:srgbClr val="22262B"/>
-                          </a:solidFill>
-                          <a:latin typeface="Calibri"/>
-                        </a:rPr>
-                        <a:t>I3D consecutive-frame distance at GT boundaries</a:t>
-                      </a:r>
-                    </a:p>
-                    <a:p>
-                      <a:r>
-                        <a:rPr sz="1100">
-                          <a:solidFill>
-                            <a:srgbClr val="22262B"/>
-                          </a:solidFill>
-                          <a:latin typeface="Calibri"/>
-                        </a:rPr>
-                        <a:t>vs at random frames</a:t>
-                      </a:r>
-                    </a:p>
-                  </a:txBody>
-                  <a:tcPr>
-                    <a:solidFill>
-                      <a:srgbClr val="ECEEF1"/>
-                    </a:solidFill>
-                  </a:tcPr>
-                </a:tc>
-                <a:tc>
-                  <a:txBody>
-                    <a:bodyPr/>
-                    <a:lstStyle/>
-                    <a:p>
-                      <a:r>
-                        <a:rPr sz="1100">
-                          <a:solidFill>
-                            <a:srgbClr val="22262B"/>
-                          </a:solidFill>
-                          <a:latin typeface="Calibri"/>
-                        </a:rPr>
-                        <a:t>1.11×</a:t>
-                      </a:r>
-                    </a:p>
-                  </a:txBody>
-                  <a:tcPr>
-                    <a:solidFill>
-                      <a:srgbClr val="ECEEF1"/>
-                    </a:solidFill>
-                  </a:tcPr>
-                </a:tc>
-                <a:tc>
-                  <a:txBody>
-                    <a:bodyPr/>
-                    <a:lstStyle/>
-                    <a:p>
-                      <a:r>
-                        <a:rPr sz="1100">
-                          <a:solidFill>
-                            <a:srgbClr val="22262B"/>
-                          </a:solidFill>
-                          <a:latin typeface="Calibri"/>
-                        </a:rPr>
-                        <a:t>class-agnostic boundary signal is</a:t>
-                      </a:r>
-                    </a:p>
-                    <a:p>
-                      <a:r>
-                        <a:rPr sz="1100">
-                          <a:solidFill>
-                            <a:srgbClr val="22262B"/>
-                          </a:solidFill>
-                          <a:latin typeface="Calibri"/>
-                        </a:rPr>
-                        <a:t>nearly absent → ATBA's candidate</a:t>
-                      </a:r>
-                    </a:p>
-                    <a:p>
-                      <a:r>
-                        <a:rPr sz="1100">
-                          <a:solidFill>
-                            <a:srgbClr val="22262B"/>
-                          </a:solidFill>
-                          <a:latin typeface="Calibri"/>
-                        </a:rPr>
-                        <a:t>step misses true transitions</a:t>
-                      </a:r>
-                    </a:p>
-                  </a:txBody>
-                  <a:tcPr>
-                    <a:solidFill>
-                      <a:srgbClr val="ECEEF1"/>
-                    </a:solidFill>
-                  </a:tcPr>
-                </a:tc>
-              </a:tr>
-              <a:tr h="365760">
-                <a:tc>
-                  <a:txBody>
-                    <a:bodyPr/>
-                    <a:lstStyle/>
-                    <a:p>
-                      <a:r>
-                        <a:rPr sz="1100">
-                          <a:solidFill>
-                            <a:srgbClr val="22262B"/>
-                          </a:solidFill>
-                          <a:latin typeface="Calibri"/>
-                        </a:rPr>
-                        <a:t>Next-action entropy (transcript order)</a:t>
-                      </a:r>
-                    </a:p>
-                  </a:txBody>
-                  <a:tcPr>
-                    <a:solidFill>
-                      <a:srgbClr val="FFFFFF"/>
-                    </a:solidFill>
-                  </a:tcPr>
-                </a:tc>
-                <a:tc>
-                  <a:txBody>
-                    <a:bodyPr/>
-                    <a:lstStyle/>
-                    <a:p>
-                      <a:r>
-                        <a:rPr sz="1100">
-                          <a:solidFill>
-                            <a:srgbClr val="22262B"/>
-                          </a:solidFill>
-                          <a:latin typeface="Calibri"/>
-                        </a:rPr>
-                        <a:t>~1.9 bits</a:t>
-                      </a:r>
-                    </a:p>
-                    <a:p>
-                      <a:r>
-                        <a:rPr sz="1100">
-                          <a:solidFill>
-                            <a:srgbClr val="22262B"/>
-                          </a:solidFill>
-                          <a:latin typeface="Calibri"/>
-                        </a:rPr>
-                        <a:t>(~3–4 successors)</a:t>
-                      </a:r>
-                    </a:p>
-                  </a:txBody>
-                  <a:tcPr>
-                    <a:solidFill>
-                      <a:srgbClr val="FFFFFF"/>
-                    </a:solidFill>
-                  </a:tcPr>
-                </a:tc>
-                <a:tc>
-                  <a:txBody>
-                    <a:bodyPr/>
-                    <a:lstStyle/>
-                    <a:p>
-                      <a:r>
-                        <a:rPr sz="1100">
-                          <a:solidFill>
-                            <a:srgbClr val="22262B"/>
-                          </a:solidFill>
-                          <a:latin typeface="Calibri"/>
-                        </a:rPr>
-                        <a:t>order alone doesn't pin timing —</a:t>
-                      </a:r>
-                    </a:p>
-                    <a:p>
-                      <a:r>
-                        <a:rPr sz="1100">
-                          <a:solidFill>
-                            <a:srgbClr val="22262B"/>
-                          </a:solidFill>
-                          <a:latin typeface="Calibri"/>
-                        </a:rPr>
-                        <a:t>visual evidence must carry it</a:t>
-                      </a:r>
-                    </a:p>
-                  </a:txBody>
-                  <a:tcPr>
-                    <a:solidFill>
-                      <a:srgbClr val="FFFFFF"/>
-                    </a:solidFill>
-                  </a:tcPr>
-                </a:tc>
-              </a:tr>
-              <a:tr h="365760">
-                <a:tc>
-                  <a:txBody>
-                    <a:bodyPr/>
-                    <a:lstStyle/>
-                    <a:p>
-                      <a:r>
-                        <a:rPr sz="1100">
-                          <a:solidFill>
-                            <a:srgbClr val="22262B"/>
-                          </a:solidFill>
-                          <a:latin typeface="Calibri"/>
-                        </a:rPr>
-                        <a:t>Per-class segment-duration variation</a:t>
-                      </a:r>
-                    </a:p>
-                  </a:txBody>
-                  <a:tcPr>
-                    <a:solidFill>
-                      <a:srgbClr val="ECEEF1"/>
-                    </a:solidFill>
-                  </a:tcPr>
-                </a:tc>
-                <a:tc>
-                  <a:txBody>
-                    <a:bodyPr/>
-                    <a:lstStyle/>
-                    <a:p>
-                      <a:r>
-                        <a:rPr sz="1100">
-                          <a:solidFill>
-                            <a:srgbClr val="22262B"/>
-                          </a:solidFill>
-                          <a:latin typeface="Calibri"/>
-                        </a:rPr>
-                        <a:t>CV 0.5–0.8</a:t>
-                      </a:r>
-                    </a:p>
-                  </a:txBody>
-                  <a:tcPr>
-                    <a:solidFill>
-                      <a:srgbClr val="ECEEF1"/>
-                    </a:solidFill>
-                  </a:tcPr>
-                </a:tc>
-                <a:tc>
-                  <a:txBody>
-                    <a:bodyPr/>
-                    <a:lstStyle/>
-                    <a:p>
-                      <a:r>
-                        <a:rPr sz="1100">
-                          <a:solidFill>
-                            <a:srgbClr val="22262B"/>
-                          </a:solidFill>
-                          <a:latin typeface="Calibri"/>
-                        </a:rPr>
-                        <a:t>duration head has weak signal</a:t>
-                      </a:r>
-                    </a:p>
-                    <a:p>
-                      <a:r>
-                        <a:rPr sz="1100">
-                          <a:solidFill>
-                            <a:srgbClr val="22262B"/>
-                          </a:solidFill>
-                          <a:latin typeface="Calibri"/>
-                        </a:rPr>
-                        <a:t>(paper: +0.2 MoC on 50S vs +3.3 BF)</a:t>
-                      </a:r>
-                    </a:p>
-                  </a:txBody>
-                  <a:tcPr>
-                    <a:solidFill>
-                      <a:srgbClr val="ECEEF1"/>
-                    </a:solidFill>
-                  </a:tcPr>
-                </a:tc>
-              </a:tr>
-            </a:tbl>
-          </a:graphicData>
-        </a:graphic>
-      </p:graphicFrame>
+        </p:nvSpPr>
+        <p:spPr>
+          <a:xfrm>
+            <a:off x="640080" y="1600200"/>
+            <a:ext cx="10972800" cy="4937760"/>
+          </a:xfrm>
+          <a:prstGeom prst="rect">
+            <a:avLst/>
+          </a:prstGeom>
+          <a:noFill/>
+        </p:spPr>
+        <p:txBody>
+          <a:bodyPr wrap="square">
+            <a:spAutoFit/>
+          </a:bodyPr>
+          <a:lstStyle/>
+          <a:p>
+            <a:pPr>
+              <a:spcAft>
+                <a:spcPts val="600"/>
+              </a:spcAft>
+            </a:pPr>
+            <a:r>
+              <a:rPr sz="1700" b="0">
+                <a:solidFill>
+                  <a:srgbClr val="22262B"/>
+                </a:solidFill>
+                <a:latin typeface="Calibri"/>
+              </a:rPr>
+              <a:t>▸ Feature-extraction pipeline: pluggable frozen backbones (VL3-SigLIP = VideoLLaMA3 vision tower, SigLIP2, DINOv2), outputs (D,T) features aligned to the ground-truth frame grid — drop-in for I3D.</a:t>
+            </a:r>
+          </a:p>
+          <a:p>
+            <a:pPr>
+              <a:spcAft>
+                <a:spcPts val="600"/>
+              </a:spcAft>
+            </a:pPr>
+            <a:r>
+              <a:rPr sz="1700" b="0">
+                <a:solidFill>
+                  <a:srgbClr val="22262B"/>
+                </a:solidFill>
+                <a:latin typeface="Calibri"/>
+              </a:rPr>
+              <a:t>▸ 50Salads benchmark bundle downloaded &amp; verified (HuggingFace dinggd/50salads):</a:t>
+            </a:r>
+          </a:p>
+          <a:p>
+            <a:pPr lvl="1">
+              <a:spcAft>
+                <a:spcPts val="600"/>
+              </a:spcAft>
+            </a:pPr>
+            <a:r>
+              <a:rPr sz="1500">
+                <a:solidFill>
+                  <a:srgbClr val="5B6470"/>
+                </a:solidFill>
+                <a:latin typeface="Calibri"/>
+              </a:rPr>
+              <a:t>– 50 videos, 19 classes (17 actions + start/end), I3D 2048-d, confirmed 30 fps, ~20 segments/video.</a:t>
+            </a:r>
+          </a:p>
+          <a:p>
+            <a:pPr>
+              <a:spcAft>
+                <a:spcPts val="600"/>
+              </a:spcAft>
+            </a:pPr>
+            <a:r>
+              <a:rPr sz="1700" b="0">
+                <a:solidFill>
+                  <a:srgbClr val="22262B"/>
+                </a:solidFill>
+                <a:latin typeface="Calibri"/>
+              </a:rPr>
+              <a:t>▸ Raw 50Salads videos: the official host (Dundee) is DOWN (NXDOMAIN everywhere); no public mirror.</a:t>
+            </a:r>
+          </a:p>
+          <a:p>
+            <a:pPr lvl="1">
+              <a:spcAft>
+                <a:spcPts val="600"/>
+              </a:spcAft>
+            </a:pPr>
+            <a:r>
+              <a:rPr sz="1500">
+                <a:solidFill>
+                  <a:srgbClr val="5B6470"/>
+                </a:solidFill>
+                <a:latin typeface="Calibri"/>
+              </a:rPr>
+              <a:t>– Blocks VLM feature extraction. Need a copy from the lab — see questions at the end.</a:t>
+            </a:r>
+          </a:p>
+          <a:p>
+            <a:pPr>
+              <a:spcAft>
+                <a:spcPts val="600"/>
+              </a:spcAft>
+            </a:pPr>
+            <a:r>
+              <a:rPr sz="1700" b="0">
+                <a:solidFill>
+                  <a:srgbClr val="22262B"/>
+                </a:solidFill>
+                <a:latin typeface="Calibri"/>
+              </a:rPr>
+              <a:t>▸ Environment: local Mac has no GPU/torch → model runs go to the UPC cluster.</a:t>
+            </a:r>
+          </a:p>
+        </p:txBody>
+      </p:sp>
     </p:spTree>
   </p:cSld>
   <p:clrMapOvr>
@@ -9753,7 +10629,7 @@
                 </a:solidFill>
                 <a:latin typeface="Calibri"/>
               </a:rPr>
-              <a:t>Progress 3 — VLM-direct aligner prototype</a:t>
+              <a:t>Progress 2 — why 50Salads is hard (measured)</a:t>
             </a:r>
           </a:p>
           <a:p>
@@ -9764,7 +10640,7 @@
                 </a:solidFill>
                 <a:latin typeface="Calibri"/>
               </a:rPr>
-              <a:t>the method, minus the VLM  ·  21 tests</a:t>
+              <a:t>Stage 1 dataset analysis  ·  notebook + docs/50salads-notes.md</a:t>
             </a:r>
           </a:p>
         </p:txBody>
@@ -9812,141 +10688,439 @@
           </a:p>
         </p:txBody>
       </p:sp>
-      <p:sp>
-        <p:nvSpPr>
-          <p:cNvPr id="4" name="TextBox 3"/>
-          <p:cNvSpPr txBox="1"/>
+      <p:graphicFrame>
+        <p:nvGraphicFramePr>
+          <p:cNvPr id="4" name="Table 3"/>
+          <p:cNvGraphicFramePr>
+            <a:graphicFrameLocks noGrp="1"/>
+          </p:cNvGraphicFramePr>
           <p:nvPr/>
-        </p:nvSpPr>
-        <p:spPr>
-          <a:xfrm>
-            <a:off x="640080" y="1600200"/>
-            <a:ext cx="10972800" cy="4937760"/>
-          </a:xfrm>
-          <a:prstGeom prst="rect">
-            <a:avLst/>
-          </a:prstGeom>
-          <a:noFill/>
-        </p:spPr>
-        <p:txBody>
-          <a:bodyPr wrap="square">
-            <a:spAutoFit/>
-          </a:bodyPr>
-          <a:lstStyle/>
-          <a:p>
-            <a:pPr>
-              <a:spcAft>
-                <a:spcPts val="600"/>
-              </a:spcAft>
-            </a:pPr>
-            <a:r>
-              <a:rPr sz="1700" b="0">
-                <a:solidFill>
-                  <a:srgbClr val="22262B"/>
-                </a:solidFill>
-                <a:latin typeface="Calibri"/>
-              </a:rPr>
-              <a:t>▸ delta.align.similarity — transcript × frame cosine similarity from frozen VLM embeddings (model-agnostic; takes pre-extracted embeddings).</a:t>
-            </a:r>
-          </a:p>
-          <a:p>
-            <a:pPr>
-              <a:spcAft>
-                <a:spcPts val="600"/>
-              </a:spcAft>
-            </a:pPr>
-            <a:r>
-              <a:rPr sz="1700" b="0">
-                <a:solidFill>
-                  <a:srgbClr val="22262B"/>
-                </a:solidFill>
-                <a:latin typeface="Calibri"/>
-              </a:rPr>
-              <a:t>▸ delta.align.ta — two solvers:</a:t>
-            </a:r>
-          </a:p>
-          <a:p>
-            <a:pPr lvl="1">
-              <a:spcAft>
-                <a:spcPts val="600"/>
-              </a:spcAft>
-            </a:pPr>
-            <a:r>
-              <a:rPr sz="1500">
-                <a:solidFill>
-                  <a:srgbClr val="5B6470"/>
-                </a:solidFill>
-                <a:latin typeface="Calibri"/>
-              </a:rPr>
-              <a:t>– align_dp: hard order-preserving DP (monotone, every transcript action covered, transition penalty).</a:t>
-            </a:r>
-          </a:p>
-          <a:p>
-            <a:pPr lvl="1">
-              <a:spcAft>
-                <a:spcPts val="600"/>
-              </a:spcAft>
-            </a:pPr>
-            <a:r>
-              <a:rPr sz="1500">
-                <a:solidFill>
-                  <a:srgbClr val="5B6470"/>
-                </a:solidFill>
-                <a:latin typeface="Calibri"/>
-              </a:rPr>
-              <a:t>– align_soft: entropic forward–backward → per-frame posteriors AND P(boundary_r = t) distributions (for uncertainty-aware targets later).</a:t>
-            </a:r>
-          </a:p>
-          <a:p>
-            <a:pPr>
-              <a:spcAft>
-                <a:spcPts val="600"/>
-              </a:spcAft>
-            </a:pPr>
-            <a:r>
-              <a:rPr sz="1700" b="0">
-                <a:solidFill>
-                  <a:srgbClr val="22262B"/>
-                </a:solidFill>
-                <a:latin typeface="Calibri"/>
-              </a:rPr>
-              <a:t>▸ delta.align.evaluate — swap-in similarity providers (naive / oracle / VLM), score Y* vs held-out GT.</a:t>
-            </a:r>
-          </a:p>
-          <a:p>
-            <a:pPr>
-              <a:spcAft>
-                <a:spcPts val="600"/>
-              </a:spcAft>
-            </a:pPr>
-            <a:r>
-              <a:rPr sz="1700" b="0">
-                <a:solidFill>
-                  <a:srgbClr val="22262B"/>
-                </a:solidFill>
-                <a:latin typeface="Calibri"/>
-              </a:rPr>
-              <a:t>▸ Validated align_dp on real 50Salads transcripts (up to 26 segments, repeated classes): near-perfect recovery from clean/noisy blocky similarity.</a:t>
-            </a:r>
-          </a:p>
-          <a:p>
-            <a:pPr>
-              <a:spcAft>
-                <a:spcPts val="600"/>
-              </a:spcAft>
-            </a:pPr>
-            <a:r>
-              <a:rPr sz="1700" b="0">
-                <a:solidFill>
-                  <a:srgbClr val="22262B"/>
-                </a:solidFill>
-                <a:latin typeface="Calibri"/>
-              </a:rPr>
-              <a:t>▸ Missing piece: the real VLM similarity matrix → needs frame features → needs raw video.</a:t>
-            </a:r>
-          </a:p>
-        </p:txBody>
-      </p:sp>
+        </p:nvGraphicFramePr>
+        <p:xfrm>
+          <a:off x="548640" y="1645920"/>
+          <a:ext cx="11064240" cy="1828800"/>
+        </p:xfrm>
+        <a:graphic>
+          <a:graphicData uri="http://schemas.openxmlformats.org/drawingml/2006/table">
+            <a:tbl>
+              <a:tblPr firstRow="1" bandRow="1">
+                <a:tableStyleId>{5C22544A-7EE6-4342-B048-85BDC9FD1C3A}</a:tableStyleId>
+              </a:tblPr>
+              <a:tblGrid>
+                <a:gridCol w="4206240"/>
+                <a:gridCol w="2103120"/>
+                <a:gridCol w="4754880"/>
+              </a:tblGrid>
+              <a:tr h="365760">
+                <a:tc>
+                  <a:txBody>
+                    <a:bodyPr/>
+                    <a:lstStyle/>
+                    <a:p>
+                      <a:r>
+                        <a:rPr sz="1200" b="1">
+                          <a:solidFill>
+                            <a:srgbClr val="FFFFFF"/>
+                          </a:solidFill>
+                          <a:latin typeface="Calibri"/>
+                        </a:rPr>
+                        <a:t>Finding</a:t>
+                      </a:r>
+                    </a:p>
+                  </a:txBody>
+                  <a:tcPr>
+                    <a:solidFill>
+                      <a:srgbClr val="1F3A5F"/>
+                    </a:solidFill>
+                  </a:tcPr>
+                </a:tc>
+                <a:tc>
+                  <a:txBody>
+                    <a:bodyPr/>
+                    <a:lstStyle/>
+                    <a:p>
+                      <a:r>
+                        <a:rPr sz="1200" b="1">
+                          <a:solidFill>
+                            <a:srgbClr val="FFFFFF"/>
+                          </a:solidFill>
+                          <a:latin typeface="Calibri"/>
+                        </a:rPr>
+                        <a:t>Number</a:t>
+                      </a:r>
+                    </a:p>
+                  </a:txBody>
+                  <a:tcPr>
+                    <a:solidFill>
+                      <a:srgbClr val="1F3A5F"/>
+                    </a:solidFill>
+                  </a:tcPr>
+                </a:tc>
+                <a:tc>
+                  <a:txBody>
+                    <a:bodyPr/>
+                    <a:lstStyle/>
+                    <a:p>
+                      <a:r>
+                        <a:rPr sz="1200" b="1">
+                          <a:solidFill>
+                            <a:srgbClr val="FFFFFF"/>
+                          </a:solidFill>
+                          <a:latin typeface="Calibri"/>
+                        </a:rPr>
+                        <a:t>Implication</a:t>
+                      </a:r>
+                    </a:p>
+                  </a:txBody>
+                  <a:tcPr>
+                    <a:solidFill>
+                      <a:srgbClr val="1F3A5F"/>
+                    </a:solidFill>
+                  </a:tcPr>
+                </a:tc>
+              </a:tr>
+              <a:tr h="365760">
+                <a:tc>
+                  <a:txBody>
+                    <a:bodyPr/>
+                    <a:lstStyle/>
+                    <a:p>
+                      <a:r>
+                        <a:rPr sz="1100">
+                          <a:solidFill>
+                            <a:srgbClr val="22262B"/>
+                          </a:solidFill>
+                          <a:latin typeface="Calibri"/>
+                        </a:rPr>
+                        <a:t>Naive uniform alignment (zero visual evidence)</a:t>
+                      </a:r>
+                    </a:p>
+                  </a:txBody>
+                  <a:tcPr>
+                    <a:solidFill>
+                      <a:srgbClr val="FFFFFF"/>
+                    </a:solidFill>
+                  </a:tcPr>
+                </a:tc>
+                <a:tc>
+                  <a:txBody>
+                    <a:bodyPr/>
+                    <a:lstStyle/>
+                    <a:p>
+                      <a:r>
+                        <a:rPr sz="1100">
+                          <a:solidFill>
+                            <a:srgbClr val="22262B"/>
+                          </a:solidFill>
+                          <a:latin typeface="Calibri"/>
+                        </a:rPr>
+                        <a:t>MoC 0.34</a:t>
+                      </a:r>
+                    </a:p>
+                  </a:txBody>
+                  <a:tcPr>
+                    <a:solidFill>
+                      <a:srgbClr val="FFFFFF"/>
+                    </a:solidFill>
+                  </a:tcPr>
+                </a:tc>
+                <a:tc>
+                  <a:txBody>
+                    <a:bodyPr/>
+                    <a:lstStyle/>
+                    <a:p>
+                      <a:r>
+                        <a:rPr sz="1100">
+                          <a:solidFill>
+                            <a:srgbClr val="22262B"/>
+                          </a:solidFill>
+                          <a:latin typeface="Calibri"/>
+                        </a:rPr>
+                        <a:t>the floor any TA must beat</a:t>
+                      </a:r>
+                    </a:p>
+                  </a:txBody>
+                  <a:tcPr>
+                    <a:solidFill>
+                      <a:srgbClr val="FFFFFF"/>
+                    </a:solidFill>
+                  </a:tcPr>
+                </a:tc>
+              </a:tr>
+              <a:tr h="365760">
+                <a:tc>
+                  <a:txBody>
+                    <a:bodyPr/>
+                    <a:lstStyle/>
+                    <a:p>
+                      <a:r>
+                        <a:rPr sz="1100">
+                          <a:solidFill>
+                            <a:srgbClr val="22262B"/>
+                          </a:solidFill>
+                          <a:latin typeface="Calibri"/>
+                        </a:rPr>
+                        <a:t>I3D consecutive-frame distance at GT boundaries</a:t>
+                      </a:r>
+                    </a:p>
+                    <a:p>
+                      <a:r>
+                        <a:rPr sz="1100">
+                          <a:solidFill>
+                            <a:srgbClr val="22262B"/>
+                          </a:solidFill>
+                          <a:latin typeface="Calibri"/>
+                        </a:rPr>
+                        <a:t>vs at random frames</a:t>
+                      </a:r>
+                    </a:p>
+                  </a:txBody>
+                  <a:tcPr>
+                    <a:solidFill>
+                      <a:srgbClr val="ECEEF1"/>
+                    </a:solidFill>
+                  </a:tcPr>
+                </a:tc>
+                <a:tc>
+                  <a:txBody>
+                    <a:bodyPr/>
+                    <a:lstStyle/>
+                    <a:p>
+                      <a:r>
+                        <a:rPr sz="1100">
+                          <a:solidFill>
+                            <a:srgbClr val="22262B"/>
+                          </a:solidFill>
+                          <a:latin typeface="Calibri"/>
+                        </a:rPr>
+                        <a:t>1.11×</a:t>
+                      </a:r>
+                    </a:p>
+                  </a:txBody>
+                  <a:tcPr>
+                    <a:solidFill>
+                      <a:srgbClr val="ECEEF1"/>
+                    </a:solidFill>
+                  </a:tcPr>
+                </a:tc>
+                <a:tc>
+                  <a:txBody>
+                    <a:bodyPr/>
+                    <a:lstStyle/>
+                    <a:p>
+                      <a:r>
+                        <a:rPr sz="1100">
+                          <a:solidFill>
+                            <a:srgbClr val="22262B"/>
+                          </a:solidFill>
+                          <a:latin typeface="Calibri"/>
+                        </a:rPr>
+                        <a:t>class-agnostic boundary signal is</a:t>
+                      </a:r>
+                    </a:p>
+                    <a:p>
+                      <a:r>
+                        <a:rPr sz="1100">
+                          <a:solidFill>
+                            <a:srgbClr val="22262B"/>
+                          </a:solidFill>
+                          <a:latin typeface="Calibri"/>
+                        </a:rPr>
+                        <a:t>nearly absent → ATBA's candidate</a:t>
+                      </a:r>
+                    </a:p>
+                    <a:p>
+                      <a:r>
+                        <a:rPr sz="1100">
+                          <a:solidFill>
+                            <a:srgbClr val="22262B"/>
+                          </a:solidFill>
+                          <a:latin typeface="Calibri"/>
+                        </a:rPr>
+                        <a:t>step misses true transitions</a:t>
+                      </a:r>
+                    </a:p>
+                  </a:txBody>
+                  <a:tcPr>
+                    <a:solidFill>
+                      <a:srgbClr val="ECEEF1"/>
+                    </a:solidFill>
+                  </a:tcPr>
+                </a:tc>
+              </a:tr>
+              <a:tr h="365760">
+                <a:tc>
+                  <a:txBody>
+                    <a:bodyPr/>
+                    <a:lstStyle/>
+                    <a:p>
+                      <a:r>
+                        <a:rPr sz="1100">
+                          <a:solidFill>
+                            <a:srgbClr val="22262B"/>
+                          </a:solidFill>
+                          <a:latin typeface="Calibri"/>
+                        </a:rPr>
+                        <a:t>Next-action entropy (transcript order)</a:t>
+                      </a:r>
+                    </a:p>
+                  </a:txBody>
+                  <a:tcPr>
+                    <a:solidFill>
+                      <a:srgbClr val="FFFFFF"/>
+                    </a:solidFill>
+                  </a:tcPr>
+                </a:tc>
+                <a:tc>
+                  <a:txBody>
+                    <a:bodyPr/>
+                    <a:lstStyle/>
+                    <a:p>
+                      <a:r>
+                        <a:rPr sz="1100">
+                          <a:solidFill>
+                            <a:srgbClr val="22262B"/>
+                          </a:solidFill>
+                          <a:latin typeface="Calibri"/>
+                        </a:rPr>
+                        <a:t>~1.9 bits</a:t>
+                      </a:r>
+                    </a:p>
+                    <a:p>
+                      <a:r>
+                        <a:rPr sz="1100">
+                          <a:solidFill>
+                            <a:srgbClr val="22262B"/>
+                          </a:solidFill>
+                          <a:latin typeface="Calibri"/>
+                        </a:rPr>
+                        <a:t>(~3–4 successors)</a:t>
+                      </a:r>
+                    </a:p>
+                  </a:txBody>
+                  <a:tcPr>
+                    <a:solidFill>
+                      <a:srgbClr val="FFFFFF"/>
+                    </a:solidFill>
+                  </a:tcPr>
+                </a:tc>
+                <a:tc>
+                  <a:txBody>
+                    <a:bodyPr/>
+                    <a:lstStyle/>
+                    <a:p>
+                      <a:r>
+                        <a:rPr sz="1100">
+                          <a:solidFill>
+                            <a:srgbClr val="22262B"/>
+                          </a:solidFill>
+                          <a:latin typeface="Calibri"/>
+                        </a:rPr>
+                        <a:t>order alone doesn't pin timing —</a:t>
+                      </a:r>
+                    </a:p>
+                    <a:p>
+                      <a:r>
+                        <a:rPr sz="1100">
+                          <a:solidFill>
+                            <a:srgbClr val="22262B"/>
+                          </a:solidFill>
+                          <a:latin typeface="Calibri"/>
+                        </a:rPr>
+                        <a:t>visual evidence must carry it</a:t>
+                      </a:r>
+                    </a:p>
+                  </a:txBody>
+                  <a:tcPr>
+                    <a:solidFill>
+                      <a:srgbClr val="FFFFFF"/>
+                    </a:solidFill>
+                  </a:tcPr>
+                </a:tc>
+              </a:tr>
+              <a:tr h="365760">
+                <a:tc>
+                  <a:txBody>
+                    <a:bodyPr/>
+                    <a:lstStyle/>
+                    <a:p>
+                      <a:r>
+                        <a:rPr sz="1100">
+                          <a:solidFill>
+                            <a:srgbClr val="22262B"/>
+                          </a:solidFill>
+                          <a:latin typeface="Calibri"/>
+                        </a:rPr>
+                        <a:t>Per-class segment-duration variation</a:t>
+                      </a:r>
+                    </a:p>
+                  </a:txBody>
+                  <a:tcPr>
+                    <a:solidFill>
+                      <a:srgbClr val="ECEEF1"/>
+                    </a:solidFill>
+                  </a:tcPr>
+                </a:tc>
+                <a:tc>
+                  <a:txBody>
+                    <a:bodyPr/>
+                    <a:lstStyle/>
+                    <a:p>
+                      <a:r>
+                        <a:rPr sz="1100">
+                          <a:solidFill>
+                            <a:srgbClr val="22262B"/>
+                          </a:solidFill>
+                          <a:latin typeface="Calibri"/>
+                        </a:rPr>
+                        <a:t>CV 0.5–0.8</a:t>
+                      </a:r>
+                    </a:p>
+                  </a:txBody>
+                  <a:tcPr>
+                    <a:solidFill>
+                      <a:srgbClr val="ECEEF1"/>
+                    </a:solidFill>
+                  </a:tcPr>
+                </a:tc>
+                <a:tc>
+                  <a:txBody>
+                    <a:bodyPr/>
+                    <a:lstStyle/>
+                    <a:p>
+                      <a:r>
+                        <a:rPr sz="1100">
+                          <a:solidFill>
+                            <a:srgbClr val="22262B"/>
+                          </a:solidFill>
+                          <a:latin typeface="Calibri"/>
+                        </a:rPr>
+                        <a:t>duration head has weak signal</a:t>
+                      </a:r>
+                    </a:p>
+                    <a:p>
+                      <a:r>
+                        <a:rPr sz="1100">
+                          <a:solidFill>
+                            <a:srgbClr val="22262B"/>
+                          </a:solidFill>
+                          <a:latin typeface="Calibri"/>
+                        </a:rPr>
+                        <a:t>(paper: +0.2 MoC on 50S vs +3.3 BF)</a:t>
+                      </a:r>
+                    </a:p>
+                  </a:txBody>
+                  <a:tcPr>
+                    <a:solidFill>
+                      <a:srgbClr val="ECEEF1"/>
+                    </a:solidFill>
+                  </a:tcPr>
+                </a:tc>
+              </a:tr>
+            </a:tbl>
+          </a:graphicData>
+        </a:graphic>
+      </p:graphicFrame>
     </p:spTree>
   </p:cSld>
   <p:clrMapOvr>
@@ -10002,7 +11176,7 @@
                 </a:solidFill>
                 <a:latin typeface="Calibri"/>
               </a:rPr>
-              <a:t>Progress 4 — the DELTA code ("WLTA")</a:t>
+              <a:t>Progress 3 — VLM-direct aligner prototype</a:t>
             </a:r>
           </a:p>
           <a:p>
@@ -10013,7 +11187,7 @@
                 </a:solidFill>
                 <a:latin typeface="Calibri"/>
               </a:rPr>
-              <a:t>what it is · how it runs · what it means for us</a:t>
+              <a:t>the method, minus the VLM  ·  21 tests</a:t>
             </a:r>
           </a:p>
         </p:txBody>
@@ -10095,7 +11269,7 @@
                 </a:solidFill>
                 <a:latin typeface="Calibri"/>
               </a:rPr>
-              <a:t>▸ Received from the group; analysed in docs/delta-code.md. WLTA = Weakly-supervised Long-Term Anticipation.</a:t>
+              <a:t>▸ delta.align.similarity — transcript × frame cosine similarity from frozen VLM embeddings (model-agnostic; takes pre-extracted embeddings).</a:t>
             </a:r>
           </a:p>
           <a:p>
@@ -10111,7 +11285,7 @@
                 </a:solidFill>
                 <a:latin typeface="Calibri"/>
               </a:rPr>
-              <a:t>▸ Built on the CLOT / ASOT codebase — so it already contains BOTH alignment mechanisms:</a:t>
+              <a:t>▸ delta.align.ta — two solvers:</a:t>
             </a:r>
           </a:p>
           <a:p>
@@ -10127,7 +11301,7 @@
                 </a:solidFill>
                 <a:latin typeface="Calibri"/>
               </a:rPr>
-              <a:t>– --model_type atba  → the ATBA boundary detector (src/atba_loss.py)</a:t>
+              <a:t>– align_dp: hard order-preserving DP (monotone, every transcript action covered, transition penalty).</a:t>
             </a:r>
           </a:p>
           <a:p>
@@ -10143,23 +11317,7 @@
                 </a:solidFill>
                 <a:latin typeface="Calibri"/>
               </a:rPr>
-              <a:t>– --model_type wclot → ASOT optimal transport (src/asot.py, gsw.py)</a:t>
-            </a:r>
-          </a:p>
-          <a:p>
-            <a:pPr lvl="1">
-              <a:spcAft>
-                <a:spcPts val="600"/>
-              </a:spcAft>
-            </a:pPr>
-            <a:r>
-              <a:rPr sz="1500">
-                <a:solidFill>
-                  <a:srgbClr val="5B6470"/>
-                </a:solidFill>
-                <a:latin typeface="Calibri"/>
-              </a:rPr>
-              <a:t>– plus CTC, TSM smoothing, cross-modal attention, linear-chain CRF, DistilBERT, full LTA eval.</a:t>
+              <a:t>– align_soft: entropic forward–backward → per-frame posteriors AND P(boundary_r = t) distributions (for uncertainty-aware targets later).</a:t>
             </a:r>
           </a:p>
           <a:p>
@@ -10175,7 +11333,7 @@
                 </a:solidFill>
                 <a:latin typeface="Calibri"/>
               </a:rPr>
-              <a:t>▸ The "situation": README is CLOT's; run scripts call a missing train_edit_elena9sept.py; hardcoded paths; needs Linux + CUDA + conda + wandb.</a:t>
+              <a:t>▸ delta.align.evaluate — swap-in similarity providers (naive / oracle / VLM), score Y* vs held-out GT.</a:t>
             </a:r>
           </a:p>
           <a:p>
@@ -10191,7 +11349,23 @@
                 </a:solidFill>
                 <a:latin typeface="Calibri"/>
               </a:rPr>
-              <a:t>▸ Implication: our contribution narrows cleanly — swap the frame-classifier posteriors / OT cost matrix for a frozen-VLM similarity; reuse everything downstream. And we can run the real baseline.</a:t>
+              <a:t>▸ Validated align_dp on real 50Salads transcripts (up to 26 segments, repeated classes): near-perfect recovery from clean/noisy blocky similarity.</a:t>
+            </a:r>
+          </a:p>
+          <a:p>
+            <a:pPr>
+              <a:spcAft>
+                <a:spcPts val="600"/>
+              </a:spcAft>
+            </a:pPr>
+            <a:r>
+              <a:rPr sz="1700" b="0">
+                <a:solidFill>
+                  <a:srgbClr val="22262B"/>
+                </a:solidFill>
+                <a:latin typeface="Calibri"/>
+              </a:rPr>
+              <a:t>▸ Missing piece: the real VLM similarity matrix → needs frame features → needs raw video.</a:t>
             </a:r>
           </a:p>
         </p:txBody>
